--- a/BCHAIN-ACCESS_Package/images/Figure_6.pptx
+++ b/BCHAIN-ACCESS_Package/images/Figure_6.pptx
@@ -1,19 +1,26 @@
 
 <file path=ppt/presentation.xml><?xml version="1.0" encoding="utf-8"?>
-<p:presentation xmlns:a="http://schemas.openxmlformats.org/drawingml/2006/main" xmlns:r="http://schemas.openxmlformats.org/officeDocument/2006/relationships" xmlns:p="http://schemas.openxmlformats.org/presentationml/2006/main" saveSubsetFonts="1" autoCompressPictures="0">
+<p:presentation xmlns:a="http://schemas.openxmlformats.org/drawingml/2006/main" xmlns:r="http://schemas.openxmlformats.org/officeDocument/2006/relationships" xmlns:p="http://schemas.openxmlformats.org/presentationml/2006/main" embedTrueTypeFonts="1" saveSubsetFonts="1">
   <p:sldMasterIdLst>
     <p:sldMasterId id="2147483648" r:id="rId1"/>
   </p:sldMasterIdLst>
   <p:sldIdLst>
-    <p:sldId id="256" r:id="rId7"/>
+    <p:sldId id="256" r:id="rId2"/>
   </p:sldIdLst>
-  <p:sldSz cx="12191695" cy="7619809" type="screen4x3"/>
+  <p:sldSz cx="18288000" cy="10287000"/>
   <p:notesSz cx="6858000" cy="9144000"/>
+  <p:embeddedFontLst>
+    <p:embeddedFont>
+      <p:font typeface="Times New Roman Bold" panose="02020803070505020304" pitchFamily="18" charset="0"/>
+      <p:regular r:id="rId3"/>
+      <p:bold r:id="rId4"/>
+    </p:embeddedFont>
+  </p:embeddedFontLst>
   <p:defaultTextStyle>
     <a:defPPr>
       <a:defRPr lang="en-US"/>
     </a:defPPr>
-    <a:lvl1pPr marL="0" algn="l" defTabSz="457200" rtl="0" eaLnBrk="1" latinLnBrk="0" hangingPunct="1">
+    <a:lvl1pPr marL="0" algn="l" defTabSz="914400" rtl="0" eaLnBrk="1" latinLnBrk="0" hangingPunct="1">
       <a:defRPr sz="1800" kern="1200">
         <a:solidFill>
           <a:schemeClr val="tx1"/>
@@ -23,7 +30,7 @@
         <a:cs typeface="+mn-cs"/>
       </a:defRPr>
     </a:lvl1pPr>
-    <a:lvl2pPr marL="457200" algn="l" defTabSz="457200" rtl="0" eaLnBrk="1" latinLnBrk="0" hangingPunct="1">
+    <a:lvl2pPr marL="457200" algn="l" defTabSz="914400" rtl="0" eaLnBrk="1" latinLnBrk="0" hangingPunct="1">
       <a:defRPr sz="1800" kern="1200">
         <a:solidFill>
           <a:schemeClr val="tx1"/>
@@ -33,7 +40,7 @@
         <a:cs typeface="+mn-cs"/>
       </a:defRPr>
     </a:lvl2pPr>
-    <a:lvl3pPr marL="914400" algn="l" defTabSz="457200" rtl="0" eaLnBrk="1" latinLnBrk="0" hangingPunct="1">
+    <a:lvl3pPr marL="914400" algn="l" defTabSz="914400" rtl="0" eaLnBrk="1" latinLnBrk="0" hangingPunct="1">
       <a:defRPr sz="1800" kern="1200">
         <a:solidFill>
           <a:schemeClr val="tx1"/>
@@ -43,7 +50,7 @@
         <a:cs typeface="+mn-cs"/>
       </a:defRPr>
     </a:lvl3pPr>
-    <a:lvl4pPr marL="1371600" algn="l" defTabSz="457200" rtl="0" eaLnBrk="1" latinLnBrk="0" hangingPunct="1">
+    <a:lvl4pPr marL="1371600" algn="l" defTabSz="914400" rtl="0" eaLnBrk="1" latinLnBrk="0" hangingPunct="1">
       <a:defRPr sz="1800" kern="1200">
         <a:solidFill>
           <a:schemeClr val="tx1"/>
@@ -53,7 +60,7 @@
         <a:cs typeface="+mn-cs"/>
       </a:defRPr>
     </a:lvl4pPr>
-    <a:lvl5pPr marL="1828800" algn="l" defTabSz="457200" rtl="0" eaLnBrk="1" latinLnBrk="0" hangingPunct="1">
+    <a:lvl5pPr marL="1828800" algn="l" defTabSz="914400" rtl="0" eaLnBrk="1" latinLnBrk="0" hangingPunct="1">
       <a:defRPr sz="1800" kern="1200">
         <a:solidFill>
           <a:schemeClr val="tx1"/>
@@ -63,7 +70,7 @@
         <a:cs typeface="+mn-cs"/>
       </a:defRPr>
     </a:lvl5pPr>
-    <a:lvl6pPr marL="2286000" algn="l" defTabSz="457200" rtl="0" eaLnBrk="1" latinLnBrk="0" hangingPunct="1">
+    <a:lvl6pPr marL="2286000" algn="l" defTabSz="914400" rtl="0" eaLnBrk="1" latinLnBrk="0" hangingPunct="1">
       <a:defRPr sz="1800" kern="1200">
         <a:solidFill>
           <a:schemeClr val="tx1"/>
@@ -73,7 +80,7 @@
         <a:cs typeface="+mn-cs"/>
       </a:defRPr>
     </a:lvl6pPr>
-    <a:lvl7pPr marL="2743200" algn="l" defTabSz="457200" rtl="0" eaLnBrk="1" latinLnBrk="0" hangingPunct="1">
+    <a:lvl7pPr marL="2743200" algn="l" defTabSz="914400" rtl="0" eaLnBrk="1" latinLnBrk="0" hangingPunct="1">
       <a:defRPr sz="1800" kern="1200">
         <a:solidFill>
           <a:schemeClr val="tx1"/>
@@ -83,7 +90,7 @@
         <a:cs typeface="+mn-cs"/>
       </a:defRPr>
     </a:lvl7pPr>
-    <a:lvl8pPr marL="3200400" algn="l" defTabSz="457200" rtl="0" eaLnBrk="1" latinLnBrk="0" hangingPunct="1">
+    <a:lvl8pPr marL="3200400" algn="l" defTabSz="914400" rtl="0" eaLnBrk="1" latinLnBrk="0" hangingPunct="1">
       <a:defRPr sz="1800" kern="1200">
         <a:solidFill>
           <a:schemeClr val="tx1"/>
@@ -93,7 +100,7 @@
         <a:cs typeface="+mn-cs"/>
       </a:defRPr>
     </a:lvl8pPr>
-    <a:lvl9pPr marL="3657600" algn="l" defTabSz="457200" rtl="0" eaLnBrk="1" latinLnBrk="0" hangingPunct="1">
+    <a:lvl9pPr marL="3657600" algn="l" defTabSz="914400" rtl="0" eaLnBrk="1" latinLnBrk="0" hangingPunct="1">
       <a:defRPr sz="1800" kern="1200">
         <a:solidFill>
           <a:schemeClr val="tx1"/>
@@ -104,6 +111,22 @@
       </a:defRPr>
     </a:lvl9pPr>
   </p:defaultTextStyle>
+  <p:extLst>
+    <p:ext uri="{EFAFB233-063F-42B5-8137-9DF3F51BA10A}">
+      <p15:sldGuideLst xmlns:p15="http://schemas.microsoft.com/office/powerpoint/2012/main">
+        <p15:guide id="1" orient="horz" pos="2160">
+          <p15:clr>
+            <a:srgbClr val="A4A3A4"/>
+          </p15:clr>
+        </p15:guide>
+        <p15:guide id="2" pos="2880">
+          <p15:clr>
+            <a:srgbClr val="A4A3A4"/>
+          </p15:clr>
+        </p15:guide>
+      </p15:sldGuideLst>
+    </p:ext>
+  </p:extLst>
 </p:presentation>
 </file>
 
@@ -145,10 +168,9 @@
           <a:lstStyle/>
           <a:p>
             <a:r>
-              <a:rPr lang="en-US" smtClean="0"/>
+              <a:rPr lang="en-US"/>
               <a:t>Click to edit Master title style</a:t>
             </a:r>
-            <a:endParaRPr lang="en-US"/>
           </a:p>
         </p:txBody>
       </p:sp>
@@ -264,10 +286,9 @@
           </a:lstStyle>
           <a:p>
             <a:r>
-              <a:rPr lang="en-US" smtClean="0"/>
+              <a:rPr lang="en-US"/>
               <a:t>Click to edit Master subtitle style</a:t>
             </a:r>
-            <a:endParaRPr lang="en-US"/>
           </a:p>
         </p:txBody>
       </p:sp>
@@ -286,9 +307,10 @@
           <a:bodyPr/>
           <a:lstStyle/>
           <a:p>
-            <a:fld id="{5BCAD085-E8A6-8845-BD4E-CB4CCA059FC4}" type="datetimeFigureOut">
+            <a:fld id="{1D8BD707-D9CF-40AE-B4C6-C98DA3205C09}" type="datetimeFigureOut">
               <a:rPr lang="en-US" smtClean="0"/>
-              <a:t>1/27/13</a:t>
+              <a:pPr/>
+              <a:t>7/13/2026</a:t>
             </a:fld>
             <a:endParaRPr lang="en-US"/>
           </a:p>
@@ -328,8 +350,9 @@
           <a:bodyPr/>
           <a:lstStyle/>
           <a:p>
-            <a:fld id="{C1FF6DA9-008F-8B48-92A6-B652298478BF}" type="slidenum">
+            <a:fld id="{B6F15528-21DE-4FAA-801E-634DDDAF4B2B}" type="slidenum">
               <a:rPr lang="en-US" smtClean="0"/>
+              <a:pPr/>
               <a:t>‹#›</a:t>
             </a:fld>
             <a:endParaRPr lang="en-US"/>
@@ -337,11 +360,6 @@
         </p:txBody>
       </p:sp>
     </p:spTree>
-    <p:extLst>
-      <p:ext uri="{BB962C8B-B14F-4D97-AF65-F5344CB8AC3E}">
-        <p14:creationId xmlns:p14="http://schemas.microsoft.com/office/powerpoint/2010/main" val="3168075583"/>
-      </p:ext>
-    </p:extLst>
   </p:cSld>
   <p:clrMapOvr>
     <a:masterClrMapping/>
@@ -382,10 +400,9 @@
           <a:lstStyle/>
           <a:p>
             <a:r>
-              <a:rPr lang="en-US" smtClean="0"/>
+              <a:rPr lang="en-US"/>
               <a:t>Click to edit Master title style</a:t>
             </a:r>
-            <a:endParaRPr lang="en-US"/>
           </a:p>
         </p:txBody>
       </p:sp>
@@ -406,38 +423,37 @@
           <a:p>
             <a:pPr lvl="0"/>
             <a:r>
-              <a:rPr lang="en-US" smtClean="0"/>
+              <a:rPr lang="en-US"/>
               <a:t>Click to edit Master text styles</a:t>
             </a:r>
           </a:p>
           <a:p>
             <a:pPr lvl="1"/>
             <a:r>
-              <a:rPr lang="en-US" smtClean="0"/>
+              <a:rPr lang="en-US"/>
               <a:t>Second level</a:t>
             </a:r>
           </a:p>
           <a:p>
             <a:pPr lvl="2"/>
             <a:r>
-              <a:rPr lang="en-US" smtClean="0"/>
+              <a:rPr lang="en-US"/>
               <a:t>Third level</a:t>
             </a:r>
           </a:p>
           <a:p>
             <a:pPr lvl="3"/>
             <a:r>
-              <a:rPr lang="en-US" smtClean="0"/>
+              <a:rPr lang="en-US"/>
               <a:t>Fourth level</a:t>
             </a:r>
           </a:p>
           <a:p>
             <a:pPr lvl="4"/>
             <a:r>
-              <a:rPr lang="en-US" smtClean="0"/>
+              <a:rPr lang="en-US"/>
               <a:t>Fifth level</a:t>
             </a:r>
-            <a:endParaRPr lang="en-US"/>
           </a:p>
         </p:txBody>
       </p:sp>
@@ -456,9 +472,10 @@
           <a:bodyPr/>
           <a:lstStyle/>
           <a:p>
-            <a:fld id="{5BCAD085-E8A6-8845-BD4E-CB4CCA059FC4}" type="datetimeFigureOut">
+            <a:fld id="{1D8BD707-D9CF-40AE-B4C6-C98DA3205C09}" type="datetimeFigureOut">
               <a:rPr lang="en-US" smtClean="0"/>
-              <a:t>1/27/13</a:t>
+              <a:pPr/>
+              <a:t>7/13/2026</a:t>
             </a:fld>
             <a:endParaRPr lang="en-US"/>
           </a:p>
@@ -498,8 +515,9 @@
           <a:bodyPr/>
           <a:lstStyle/>
           <a:p>
-            <a:fld id="{C1FF6DA9-008F-8B48-92A6-B652298478BF}" type="slidenum">
+            <a:fld id="{B6F15528-21DE-4FAA-801E-634DDDAF4B2B}" type="slidenum">
               <a:rPr lang="en-US" smtClean="0"/>
+              <a:pPr/>
               <a:t>‹#›</a:t>
             </a:fld>
             <a:endParaRPr lang="en-US"/>
@@ -507,11 +525,6 @@
         </p:txBody>
       </p:sp>
     </p:spTree>
-    <p:extLst>
-      <p:ext uri="{BB962C8B-B14F-4D97-AF65-F5344CB8AC3E}">
-        <p14:creationId xmlns:p14="http://schemas.microsoft.com/office/powerpoint/2010/main" val="2910927964"/>
-      </p:ext>
-    </p:extLst>
   </p:cSld>
   <p:clrMapOvr>
     <a:masterClrMapping/>
@@ -557,10 +570,9 @@
           <a:lstStyle/>
           <a:p>
             <a:r>
-              <a:rPr lang="en-US" smtClean="0"/>
+              <a:rPr lang="en-US"/>
               <a:t>Click to edit Master title style</a:t>
             </a:r>
-            <a:endParaRPr lang="en-US"/>
           </a:p>
         </p:txBody>
       </p:sp>
@@ -586,38 +598,37 @@
           <a:p>
             <a:pPr lvl="0"/>
             <a:r>
-              <a:rPr lang="en-US" smtClean="0"/>
+              <a:rPr lang="en-US"/>
               <a:t>Click to edit Master text styles</a:t>
             </a:r>
           </a:p>
           <a:p>
             <a:pPr lvl="1"/>
             <a:r>
-              <a:rPr lang="en-US" smtClean="0"/>
+              <a:rPr lang="en-US"/>
               <a:t>Second level</a:t>
             </a:r>
           </a:p>
           <a:p>
             <a:pPr lvl="2"/>
             <a:r>
-              <a:rPr lang="en-US" smtClean="0"/>
+              <a:rPr lang="en-US"/>
               <a:t>Third level</a:t>
             </a:r>
           </a:p>
           <a:p>
             <a:pPr lvl="3"/>
             <a:r>
-              <a:rPr lang="en-US" smtClean="0"/>
+              <a:rPr lang="en-US"/>
               <a:t>Fourth level</a:t>
             </a:r>
           </a:p>
           <a:p>
             <a:pPr lvl="4"/>
             <a:r>
-              <a:rPr lang="en-US" smtClean="0"/>
+              <a:rPr lang="en-US"/>
               <a:t>Fifth level</a:t>
             </a:r>
-            <a:endParaRPr lang="en-US"/>
           </a:p>
         </p:txBody>
       </p:sp>
@@ -636,9 +647,10 @@
           <a:bodyPr/>
           <a:lstStyle/>
           <a:p>
-            <a:fld id="{5BCAD085-E8A6-8845-BD4E-CB4CCA059FC4}" type="datetimeFigureOut">
+            <a:fld id="{1D8BD707-D9CF-40AE-B4C6-C98DA3205C09}" type="datetimeFigureOut">
               <a:rPr lang="en-US" smtClean="0"/>
-              <a:t>1/27/13</a:t>
+              <a:pPr/>
+              <a:t>7/13/2026</a:t>
             </a:fld>
             <a:endParaRPr lang="en-US"/>
           </a:p>
@@ -678,8 +690,9 @@
           <a:bodyPr/>
           <a:lstStyle/>
           <a:p>
-            <a:fld id="{C1FF6DA9-008F-8B48-92A6-B652298478BF}" type="slidenum">
+            <a:fld id="{B6F15528-21DE-4FAA-801E-634DDDAF4B2B}" type="slidenum">
               <a:rPr lang="en-US" smtClean="0"/>
+              <a:pPr/>
               <a:t>‹#›</a:t>
             </a:fld>
             <a:endParaRPr lang="en-US"/>
@@ -687,11 +700,6 @@
         </p:txBody>
       </p:sp>
     </p:spTree>
-    <p:extLst>
-      <p:ext uri="{BB962C8B-B14F-4D97-AF65-F5344CB8AC3E}">
-        <p14:creationId xmlns:p14="http://schemas.microsoft.com/office/powerpoint/2010/main" val="3612223792"/>
-      </p:ext>
-    </p:extLst>
   </p:cSld>
   <p:clrMapOvr>
     <a:masterClrMapping/>
@@ -732,10 +740,9 @@
           <a:lstStyle/>
           <a:p>
             <a:r>
-              <a:rPr lang="en-US" smtClean="0"/>
+              <a:rPr lang="en-US"/>
               <a:t>Click to edit Master title style</a:t>
             </a:r>
-            <a:endParaRPr lang="en-US"/>
           </a:p>
         </p:txBody>
       </p:sp>
@@ -756,38 +763,37 @@
           <a:p>
             <a:pPr lvl="0"/>
             <a:r>
-              <a:rPr lang="en-US" smtClean="0"/>
+              <a:rPr lang="en-US"/>
               <a:t>Click to edit Master text styles</a:t>
             </a:r>
           </a:p>
           <a:p>
             <a:pPr lvl="1"/>
             <a:r>
-              <a:rPr lang="en-US" smtClean="0"/>
+              <a:rPr lang="en-US"/>
               <a:t>Second level</a:t>
             </a:r>
           </a:p>
           <a:p>
             <a:pPr lvl="2"/>
             <a:r>
-              <a:rPr lang="en-US" smtClean="0"/>
+              <a:rPr lang="en-US"/>
               <a:t>Third level</a:t>
             </a:r>
           </a:p>
           <a:p>
             <a:pPr lvl="3"/>
             <a:r>
-              <a:rPr lang="en-US" smtClean="0"/>
+              <a:rPr lang="en-US"/>
               <a:t>Fourth level</a:t>
             </a:r>
           </a:p>
           <a:p>
             <a:pPr lvl="4"/>
             <a:r>
-              <a:rPr lang="en-US" smtClean="0"/>
+              <a:rPr lang="en-US"/>
               <a:t>Fifth level</a:t>
             </a:r>
-            <a:endParaRPr lang="en-US"/>
           </a:p>
         </p:txBody>
       </p:sp>
@@ -806,9 +812,10 @@
           <a:bodyPr/>
           <a:lstStyle/>
           <a:p>
-            <a:fld id="{5BCAD085-E8A6-8845-BD4E-CB4CCA059FC4}" type="datetimeFigureOut">
+            <a:fld id="{1D8BD707-D9CF-40AE-B4C6-C98DA3205C09}" type="datetimeFigureOut">
               <a:rPr lang="en-US" smtClean="0"/>
-              <a:t>1/27/13</a:t>
+              <a:pPr/>
+              <a:t>7/13/2026</a:t>
             </a:fld>
             <a:endParaRPr lang="en-US"/>
           </a:p>
@@ -848,8 +855,9 @@
           <a:bodyPr/>
           <a:lstStyle/>
           <a:p>
-            <a:fld id="{C1FF6DA9-008F-8B48-92A6-B652298478BF}" type="slidenum">
+            <a:fld id="{B6F15528-21DE-4FAA-801E-634DDDAF4B2B}" type="slidenum">
               <a:rPr lang="en-US" smtClean="0"/>
+              <a:pPr/>
               <a:t>‹#›</a:t>
             </a:fld>
             <a:endParaRPr lang="en-US"/>
@@ -857,11 +865,6 @@
         </p:txBody>
       </p:sp>
     </p:spTree>
-    <p:extLst>
-      <p:ext uri="{BB962C8B-B14F-4D97-AF65-F5344CB8AC3E}">
-        <p14:creationId xmlns:p14="http://schemas.microsoft.com/office/powerpoint/2010/main" val="2614314258"/>
-      </p:ext>
-    </p:extLst>
   </p:cSld>
   <p:clrMapOvr>
     <a:masterClrMapping/>
@@ -911,10 +914,9 @@
           </a:lstStyle>
           <a:p>
             <a:r>
-              <a:rPr lang="en-US" smtClean="0"/>
+              <a:rPr lang="en-US"/>
               <a:t>Click to edit Master title style</a:t>
             </a:r>
-            <a:endParaRPr lang="en-US"/>
           </a:p>
         </p:txBody>
       </p:sp>
@@ -1031,7 +1033,7 @@
           <a:p>
             <a:pPr lvl="0"/>
             <a:r>
-              <a:rPr lang="en-US" smtClean="0"/>
+              <a:rPr lang="en-US"/>
               <a:t>Click to edit Master text styles</a:t>
             </a:r>
           </a:p>
@@ -1052,9 +1054,10 @@
           <a:bodyPr/>
           <a:lstStyle/>
           <a:p>
-            <a:fld id="{5BCAD085-E8A6-8845-BD4E-CB4CCA059FC4}" type="datetimeFigureOut">
+            <a:fld id="{1D8BD707-D9CF-40AE-B4C6-C98DA3205C09}" type="datetimeFigureOut">
               <a:rPr lang="en-US" smtClean="0"/>
-              <a:t>1/27/13</a:t>
+              <a:pPr/>
+              <a:t>7/13/2026</a:t>
             </a:fld>
             <a:endParaRPr lang="en-US"/>
           </a:p>
@@ -1094,8 +1097,9 @@
           <a:bodyPr/>
           <a:lstStyle/>
           <a:p>
-            <a:fld id="{C1FF6DA9-008F-8B48-92A6-B652298478BF}" type="slidenum">
+            <a:fld id="{B6F15528-21DE-4FAA-801E-634DDDAF4B2B}" type="slidenum">
               <a:rPr lang="en-US" smtClean="0"/>
+              <a:pPr/>
               <a:t>‹#›</a:t>
             </a:fld>
             <a:endParaRPr lang="en-US"/>
@@ -1103,11 +1107,6 @@
         </p:txBody>
       </p:sp>
     </p:spTree>
-    <p:extLst>
-      <p:ext uri="{BB962C8B-B14F-4D97-AF65-F5344CB8AC3E}">
-        <p14:creationId xmlns:p14="http://schemas.microsoft.com/office/powerpoint/2010/main" val="960648375"/>
-      </p:ext>
-    </p:extLst>
   </p:cSld>
   <p:clrMapOvr>
     <a:masterClrMapping/>
@@ -1148,10 +1147,9 @@
           <a:lstStyle/>
           <a:p>
             <a:r>
-              <a:rPr lang="en-US" smtClean="0"/>
+              <a:rPr lang="en-US"/>
               <a:t>Click to edit Master title style</a:t>
             </a:r>
-            <a:endParaRPr lang="en-US"/>
           </a:p>
         </p:txBody>
       </p:sp>
@@ -1205,38 +1203,37 @@
           <a:p>
             <a:pPr lvl="0"/>
             <a:r>
-              <a:rPr lang="en-US" smtClean="0"/>
+              <a:rPr lang="en-US"/>
               <a:t>Click to edit Master text styles</a:t>
             </a:r>
           </a:p>
           <a:p>
             <a:pPr lvl="1"/>
             <a:r>
-              <a:rPr lang="en-US" smtClean="0"/>
+              <a:rPr lang="en-US"/>
               <a:t>Second level</a:t>
             </a:r>
           </a:p>
           <a:p>
             <a:pPr lvl="2"/>
             <a:r>
-              <a:rPr lang="en-US" smtClean="0"/>
+              <a:rPr lang="en-US"/>
               <a:t>Third level</a:t>
             </a:r>
           </a:p>
           <a:p>
             <a:pPr lvl="3"/>
             <a:r>
-              <a:rPr lang="en-US" smtClean="0"/>
+              <a:rPr lang="en-US"/>
               <a:t>Fourth level</a:t>
             </a:r>
           </a:p>
           <a:p>
             <a:pPr lvl="4"/>
             <a:r>
-              <a:rPr lang="en-US" smtClean="0"/>
+              <a:rPr lang="en-US"/>
               <a:t>Fifth level</a:t>
             </a:r>
-            <a:endParaRPr lang="en-US"/>
           </a:p>
         </p:txBody>
       </p:sp>
@@ -1290,38 +1287,37 @@
           <a:p>
             <a:pPr lvl="0"/>
             <a:r>
-              <a:rPr lang="en-US" smtClean="0"/>
+              <a:rPr lang="en-US"/>
               <a:t>Click to edit Master text styles</a:t>
             </a:r>
           </a:p>
           <a:p>
             <a:pPr lvl="1"/>
             <a:r>
-              <a:rPr lang="en-US" smtClean="0"/>
+              <a:rPr lang="en-US"/>
               <a:t>Second level</a:t>
             </a:r>
           </a:p>
           <a:p>
             <a:pPr lvl="2"/>
             <a:r>
-              <a:rPr lang="en-US" smtClean="0"/>
+              <a:rPr lang="en-US"/>
               <a:t>Third level</a:t>
             </a:r>
           </a:p>
           <a:p>
             <a:pPr lvl="3"/>
             <a:r>
-              <a:rPr lang="en-US" smtClean="0"/>
+              <a:rPr lang="en-US"/>
               <a:t>Fourth level</a:t>
             </a:r>
           </a:p>
           <a:p>
             <a:pPr lvl="4"/>
             <a:r>
-              <a:rPr lang="en-US" smtClean="0"/>
+              <a:rPr lang="en-US"/>
               <a:t>Fifth level</a:t>
             </a:r>
-            <a:endParaRPr lang="en-US"/>
           </a:p>
         </p:txBody>
       </p:sp>
@@ -1340,9 +1336,10 @@
           <a:bodyPr/>
           <a:lstStyle/>
           <a:p>
-            <a:fld id="{5BCAD085-E8A6-8845-BD4E-CB4CCA059FC4}" type="datetimeFigureOut">
+            <a:fld id="{1D8BD707-D9CF-40AE-B4C6-C98DA3205C09}" type="datetimeFigureOut">
               <a:rPr lang="en-US" smtClean="0"/>
-              <a:t>1/27/13</a:t>
+              <a:pPr/>
+              <a:t>7/13/2026</a:t>
             </a:fld>
             <a:endParaRPr lang="en-US"/>
           </a:p>
@@ -1382,8 +1379,9 @@
           <a:bodyPr/>
           <a:lstStyle/>
           <a:p>
-            <a:fld id="{C1FF6DA9-008F-8B48-92A6-B652298478BF}" type="slidenum">
+            <a:fld id="{B6F15528-21DE-4FAA-801E-634DDDAF4B2B}" type="slidenum">
               <a:rPr lang="en-US" smtClean="0"/>
+              <a:pPr/>
               <a:t>‹#›</a:t>
             </a:fld>
             <a:endParaRPr lang="en-US"/>
@@ -1391,11 +1389,6 @@
         </p:txBody>
       </p:sp>
     </p:spTree>
-    <p:extLst>
-      <p:ext uri="{BB962C8B-B14F-4D97-AF65-F5344CB8AC3E}">
-        <p14:creationId xmlns:p14="http://schemas.microsoft.com/office/powerpoint/2010/main" val="2782244947"/>
-      </p:ext>
-    </p:extLst>
   </p:cSld>
   <p:clrMapOvr>
     <a:masterClrMapping/>
@@ -1440,10 +1433,9 @@
           </a:lstStyle>
           <a:p>
             <a:r>
-              <a:rPr lang="en-US" smtClean="0"/>
+              <a:rPr lang="en-US"/>
               <a:t>Click to edit Master title style</a:t>
             </a:r>
-            <a:endParaRPr lang="en-US"/>
           </a:p>
         </p:txBody>
       </p:sp>
@@ -1506,7 +1498,7 @@
           <a:p>
             <a:pPr lvl="0"/>
             <a:r>
-              <a:rPr lang="en-US" smtClean="0"/>
+              <a:rPr lang="en-US"/>
               <a:t>Click to edit Master text styles</a:t>
             </a:r>
           </a:p>
@@ -1562,38 +1554,37 @@
           <a:p>
             <a:pPr lvl="0"/>
             <a:r>
-              <a:rPr lang="en-US" smtClean="0"/>
+              <a:rPr lang="en-US"/>
               <a:t>Click to edit Master text styles</a:t>
             </a:r>
           </a:p>
           <a:p>
             <a:pPr lvl="1"/>
             <a:r>
-              <a:rPr lang="en-US" smtClean="0"/>
+              <a:rPr lang="en-US"/>
               <a:t>Second level</a:t>
             </a:r>
           </a:p>
           <a:p>
             <a:pPr lvl="2"/>
             <a:r>
-              <a:rPr lang="en-US" smtClean="0"/>
+              <a:rPr lang="en-US"/>
               <a:t>Third level</a:t>
             </a:r>
           </a:p>
           <a:p>
             <a:pPr lvl="3"/>
             <a:r>
-              <a:rPr lang="en-US" smtClean="0"/>
+              <a:rPr lang="en-US"/>
               <a:t>Fourth level</a:t>
             </a:r>
           </a:p>
           <a:p>
             <a:pPr lvl="4"/>
             <a:r>
-              <a:rPr lang="en-US" smtClean="0"/>
+              <a:rPr lang="en-US"/>
               <a:t>Fifth level</a:t>
             </a:r>
-            <a:endParaRPr lang="en-US"/>
           </a:p>
         </p:txBody>
       </p:sp>
@@ -1656,7 +1647,7 @@
           <a:p>
             <a:pPr lvl="0"/>
             <a:r>
-              <a:rPr lang="en-US" smtClean="0"/>
+              <a:rPr lang="en-US"/>
               <a:t>Click to edit Master text styles</a:t>
             </a:r>
           </a:p>
@@ -1712,38 +1703,37 @@
           <a:p>
             <a:pPr lvl="0"/>
             <a:r>
-              <a:rPr lang="en-US" smtClean="0"/>
+              <a:rPr lang="en-US"/>
               <a:t>Click to edit Master text styles</a:t>
             </a:r>
           </a:p>
           <a:p>
             <a:pPr lvl="1"/>
             <a:r>
-              <a:rPr lang="en-US" smtClean="0"/>
+              <a:rPr lang="en-US"/>
               <a:t>Second level</a:t>
             </a:r>
           </a:p>
           <a:p>
             <a:pPr lvl="2"/>
             <a:r>
-              <a:rPr lang="en-US" smtClean="0"/>
+              <a:rPr lang="en-US"/>
               <a:t>Third level</a:t>
             </a:r>
           </a:p>
           <a:p>
             <a:pPr lvl="3"/>
             <a:r>
-              <a:rPr lang="en-US" smtClean="0"/>
+              <a:rPr lang="en-US"/>
               <a:t>Fourth level</a:t>
             </a:r>
           </a:p>
           <a:p>
             <a:pPr lvl="4"/>
             <a:r>
-              <a:rPr lang="en-US" smtClean="0"/>
+              <a:rPr lang="en-US"/>
               <a:t>Fifth level</a:t>
             </a:r>
-            <a:endParaRPr lang="en-US"/>
           </a:p>
         </p:txBody>
       </p:sp>
@@ -1762,9 +1752,10 @@
           <a:bodyPr/>
           <a:lstStyle/>
           <a:p>
-            <a:fld id="{5BCAD085-E8A6-8845-BD4E-CB4CCA059FC4}" type="datetimeFigureOut">
+            <a:fld id="{1D8BD707-D9CF-40AE-B4C6-C98DA3205C09}" type="datetimeFigureOut">
               <a:rPr lang="en-US" smtClean="0"/>
-              <a:t>1/27/13</a:t>
+              <a:pPr/>
+              <a:t>7/13/2026</a:t>
             </a:fld>
             <a:endParaRPr lang="en-US"/>
           </a:p>
@@ -1804,8 +1795,9 @@
           <a:bodyPr/>
           <a:lstStyle/>
           <a:p>
-            <a:fld id="{C1FF6DA9-008F-8B48-92A6-B652298478BF}" type="slidenum">
+            <a:fld id="{B6F15528-21DE-4FAA-801E-634DDDAF4B2B}" type="slidenum">
               <a:rPr lang="en-US" smtClean="0"/>
+              <a:pPr/>
               <a:t>‹#›</a:t>
             </a:fld>
             <a:endParaRPr lang="en-US"/>
@@ -1813,11 +1805,6 @@
         </p:txBody>
       </p:sp>
     </p:spTree>
-    <p:extLst>
-      <p:ext uri="{BB962C8B-B14F-4D97-AF65-F5344CB8AC3E}">
-        <p14:creationId xmlns:p14="http://schemas.microsoft.com/office/powerpoint/2010/main" val="990158736"/>
-      </p:ext>
-    </p:extLst>
   </p:cSld>
   <p:clrMapOvr>
     <a:masterClrMapping/>
@@ -1858,10 +1845,9 @@
           <a:lstStyle/>
           <a:p>
             <a:r>
-              <a:rPr lang="en-US" smtClean="0"/>
+              <a:rPr lang="en-US"/>
               <a:t>Click to edit Master title style</a:t>
             </a:r>
-            <a:endParaRPr lang="en-US"/>
           </a:p>
         </p:txBody>
       </p:sp>
@@ -1880,9 +1866,10 @@
           <a:bodyPr/>
           <a:lstStyle/>
           <a:p>
-            <a:fld id="{5BCAD085-E8A6-8845-BD4E-CB4CCA059FC4}" type="datetimeFigureOut">
+            <a:fld id="{1D8BD707-D9CF-40AE-B4C6-C98DA3205C09}" type="datetimeFigureOut">
               <a:rPr lang="en-US" smtClean="0"/>
-              <a:t>1/27/13</a:t>
+              <a:pPr/>
+              <a:t>7/13/2026</a:t>
             </a:fld>
             <a:endParaRPr lang="en-US"/>
           </a:p>
@@ -1922,8 +1909,9 @@
           <a:bodyPr/>
           <a:lstStyle/>
           <a:p>
-            <a:fld id="{C1FF6DA9-008F-8B48-92A6-B652298478BF}" type="slidenum">
+            <a:fld id="{B6F15528-21DE-4FAA-801E-634DDDAF4B2B}" type="slidenum">
               <a:rPr lang="en-US" smtClean="0"/>
+              <a:pPr/>
               <a:t>‹#›</a:t>
             </a:fld>
             <a:endParaRPr lang="en-US"/>
@@ -1931,11 +1919,6 @@
         </p:txBody>
       </p:sp>
     </p:spTree>
-    <p:extLst>
-      <p:ext uri="{BB962C8B-B14F-4D97-AF65-F5344CB8AC3E}">
-        <p14:creationId xmlns:p14="http://schemas.microsoft.com/office/powerpoint/2010/main" val="727027711"/>
-      </p:ext>
-    </p:extLst>
   </p:cSld>
   <p:clrMapOvr>
     <a:masterClrMapping/>
@@ -1975,9 +1958,10 @@
           <a:bodyPr/>
           <a:lstStyle/>
           <a:p>
-            <a:fld id="{5BCAD085-E8A6-8845-BD4E-CB4CCA059FC4}" type="datetimeFigureOut">
+            <a:fld id="{1D8BD707-D9CF-40AE-B4C6-C98DA3205C09}" type="datetimeFigureOut">
               <a:rPr lang="en-US" smtClean="0"/>
-              <a:t>1/27/13</a:t>
+              <a:pPr/>
+              <a:t>7/13/2026</a:t>
             </a:fld>
             <a:endParaRPr lang="en-US"/>
           </a:p>
@@ -2017,8 +2001,9 @@
           <a:bodyPr/>
           <a:lstStyle/>
           <a:p>
-            <a:fld id="{C1FF6DA9-008F-8B48-92A6-B652298478BF}" type="slidenum">
+            <a:fld id="{B6F15528-21DE-4FAA-801E-634DDDAF4B2B}" type="slidenum">
               <a:rPr lang="en-US" smtClean="0"/>
+              <a:pPr/>
               <a:t>‹#›</a:t>
             </a:fld>
             <a:endParaRPr lang="en-US"/>
@@ -2026,11 +2011,6 @@
         </p:txBody>
       </p:sp>
     </p:spTree>
-    <p:extLst>
-      <p:ext uri="{BB962C8B-B14F-4D97-AF65-F5344CB8AC3E}">
-        <p14:creationId xmlns:p14="http://schemas.microsoft.com/office/powerpoint/2010/main" val="1212999818"/>
-      </p:ext>
-    </p:extLst>
   </p:cSld>
   <p:clrMapOvr>
     <a:masterClrMapping/>
@@ -2080,10 +2060,9 @@
           </a:lstStyle>
           <a:p>
             <a:r>
-              <a:rPr lang="en-US" smtClean="0"/>
+              <a:rPr lang="en-US"/>
               <a:t>Click to edit Master title style</a:t>
             </a:r>
-            <a:endParaRPr lang="en-US"/>
           </a:p>
         </p:txBody>
       </p:sp>
@@ -2137,38 +2116,37 @@
           <a:p>
             <a:pPr lvl="0"/>
             <a:r>
-              <a:rPr lang="en-US" smtClean="0"/>
+              <a:rPr lang="en-US"/>
               <a:t>Click to edit Master text styles</a:t>
             </a:r>
           </a:p>
           <a:p>
             <a:pPr lvl="1"/>
             <a:r>
-              <a:rPr lang="en-US" smtClean="0"/>
+              <a:rPr lang="en-US"/>
               <a:t>Second level</a:t>
             </a:r>
           </a:p>
           <a:p>
             <a:pPr lvl="2"/>
             <a:r>
-              <a:rPr lang="en-US" smtClean="0"/>
+              <a:rPr lang="en-US"/>
               <a:t>Third level</a:t>
             </a:r>
           </a:p>
           <a:p>
             <a:pPr lvl="3"/>
             <a:r>
-              <a:rPr lang="en-US" smtClean="0"/>
+              <a:rPr lang="en-US"/>
               <a:t>Fourth level</a:t>
             </a:r>
           </a:p>
           <a:p>
             <a:pPr lvl="4"/>
             <a:r>
-              <a:rPr lang="en-US" smtClean="0"/>
+              <a:rPr lang="en-US"/>
               <a:t>Fifth level</a:t>
             </a:r>
-            <a:endParaRPr lang="en-US"/>
           </a:p>
         </p:txBody>
       </p:sp>
@@ -2231,7 +2209,7 @@
           <a:p>
             <a:pPr lvl="0"/>
             <a:r>
-              <a:rPr lang="en-US" smtClean="0"/>
+              <a:rPr lang="en-US"/>
               <a:t>Click to edit Master text styles</a:t>
             </a:r>
           </a:p>
@@ -2252,9 +2230,10 @@
           <a:bodyPr/>
           <a:lstStyle/>
           <a:p>
-            <a:fld id="{5BCAD085-E8A6-8845-BD4E-CB4CCA059FC4}" type="datetimeFigureOut">
+            <a:fld id="{1D8BD707-D9CF-40AE-B4C6-C98DA3205C09}" type="datetimeFigureOut">
               <a:rPr lang="en-US" smtClean="0"/>
-              <a:t>1/27/13</a:t>
+              <a:pPr/>
+              <a:t>7/13/2026</a:t>
             </a:fld>
             <a:endParaRPr lang="en-US"/>
           </a:p>
@@ -2294,8 +2273,9 @@
           <a:bodyPr/>
           <a:lstStyle/>
           <a:p>
-            <a:fld id="{C1FF6DA9-008F-8B48-92A6-B652298478BF}" type="slidenum">
+            <a:fld id="{B6F15528-21DE-4FAA-801E-634DDDAF4B2B}" type="slidenum">
               <a:rPr lang="en-US" smtClean="0"/>
+              <a:pPr/>
               <a:t>‹#›</a:t>
             </a:fld>
             <a:endParaRPr lang="en-US"/>
@@ -2303,11 +2283,6 @@
         </p:txBody>
       </p:sp>
     </p:spTree>
-    <p:extLst>
-      <p:ext uri="{BB962C8B-B14F-4D97-AF65-F5344CB8AC3E}">
-        <p14:creationId xmlns:p14="http://schemas.microsoft.com/office/powerpoint/2010/main" val="1840726560"/>
-      </p:ext>
-    </p:extLst>
   </p:cSld>
   <p:clrMapOvr>
     <a:masterClrMapping/>
@@ -2357,10 +2332,9 @@
           </a:lstStyle>
           <a:p>
             <a:r>
-              <a:rPr lang="en-US" smtClean="0"/>
+              <a:rPr lang="en-US"/>
               <a:t>Click to edit Master title style</a:t>
             </a:r>
-            <a:endParaRPr lang="en-US"/>
           </a:p>
         </p:txBody>
       </p:sp>
@@ -2484,7 +2458,7 @@
           <a:p>
             <a:pPr lvl="0"/>
             <a:r>
-              <a:rPr lang="en-US" smtClean="0"/>
+              <a:rPr lang="en-US"/>
               <a:t>Click to edit Master text styles</a:t>
             </a:r>
           </a:p>
@@ -2505,9 +2479,10 @@
           <a:bodyPr/>
           <a:lstStyle/>
           <a:p>
-            <a:fld id="{5BCAD085-E8A6-8845-BD4E-CB4CCA059FC4}" type="datetimeFigureOut">
+            <a:fld id="{1D8BD707-D9CF-40AE-B4C6-C98DA3205C09}" type="datetimeFigureOut">
               <a:rPr lang="en-US" smtClean="0"/>
-              <a:t>1/27/13</a:t>
+              <a:pPr/>
+              <a:t>7/13/2026</a:t>
             </a:fld>
             <a:endParaRPr lang="en-US"/>
           </a:p>
@@ -2547,8 +2522,9 @@
           <a:bodyPr/>
           <a:lstStyle/>
           <a:p>
-            <a:fld id="{C1FF6DA9-008F-8B48-92A6-B652298478BF}" type="slidenum">
+            <a:fld id="{B6F15528-21DE-4FAA-801E-634DDDAF4B2B}" type="slidenum">
               <a:rPr lang="en-US" smtClean="0"/>
+              <a:pPr/>
               <a:t>‹#›</a:t>
             </a:fld>
             <a:endParaRPr lang="en-US"/>
@@ -2556,11 +2532,6 @@
         </p:txBody>
       </p:sp>
     </p:spTree>
-    <p:extLst>
-      <p:ext uri="{BB962C8B-B14F-4D97-AF65-F5344CB8AC3E}">
-        <p14:creationId xmlns:p14="http://schemas.microsoft.com/office/powerpoint/2010/main" val="3889236939"/>
-      </p:ext>
-    </p:extLst>
   </p:cSld>
   <p:clrMapOvr>
     <a:masterClrMapping/>
@@ -2616,10 +2587,9 @@
           <a:lstStyle/>
           <a:p>
             <a:r>
-              <a:rPr lang="en-US" smtClean="0"/>
+              <a:rPr lang="en-US"/>
               <a:t>Click to edit Master title style</a:t>
             </a:r>
-            <a:endParaRPr lang="en-US"/>
           </a:p>
         </p:txBody>
       </p:sp>
@@ -2650,38 +2620,37 @@
           <a:p>
             <a:pPr lvl="0"/>
             <a:r>
-              <a:rPr lang="en-US" smtClean="0"/>
+              <a:rPr lang="en-US"/>
               <a:t>Click to edit Master text styles</a:t>
             </a:r>
           </a:p>
           <a:p>
             <a:pPr lvl="1"/>
             <a:r>
-              <a:rPr lang="en-US" smtClean="0"/>
+              <a:rPr lang="en-US"/>
               <a:t>Second level</a:t>
             </a:r>
           </a:p>
           <a:p>
             <a:pPr lvl="2"/>
             <a:r>
-              <a:rPr lang="en-US" smtClean="0"/>
+              <a:rPr lang="en-US"/>
               <a:t>Third level</a:t>
             </a:r>
           </a:p>
           <a:p>
             <a:pPr lvl="3"/>
             <a:r>
-              <a:rPr lang="en-US" smtClean="0"/>
+              <a:rPr lang="en-US"/>
               <a:t>Fourth level</a:t>
             </a:r>
           </a:p>
           <a:p>
             <a:pPr lvl="4"/>
             <a:r>
-              <a:rPr lang="en-US" smtClean="0"/>
+              <a:rPr lang="en-US"/>
               <a:t>Fifth level</a:t>
             </a:r>
-            <a:endParaRPr lang="en-US"/>
           </a:p>
         </p:txBody>
       </p:sp>
@@ -2718,9 +2687,10 @@
             </a:lvl1pPr>
           </a:lstStyle>
           <a:p>
-            <a:fld id="{5BCAD085-E8A6-8845-BD4E-CB4CCA059FC4}" type="datetimeFigureOut">
+            <a:fld id="{1D8BD707-D9CF-40AE-B4C6-C98DA3205C09}" type="datetimeFigureOut">
               <a:rPr lang="en-US" smtClean="0"/>
-              <a:t>1/27/13</a:t>
+              <a:pPr/>
+              <a:t>7/13/2026</a:t>
             </a:fld>
             <a:endParaRPr lang="en-US"/>
           </a:p>
@@ -2796,8 +2766,9 @@
             </a:lvl1pPr>
           </a:lstStyle>
           <a:p>
-            <a:fld id="{C1FF6DA9-008F-8B48-92A6-B652298478BF}" type="slidenum">
+            <a:fld id="{B6F15528-21DE-4FAA-801E-634DDDAF4B2B}" type="slidenum">
               <a:rPr lang="en-US" smtClean="0"/>
+              <a:pPr/>
               <a:t>‹#›</a:t>
             </a:fld>
             <a:endParaRPr lang="en-US"/>
@@ -2805,11 +2776,6 @@
         </p:txBody>
       </p:sp>
     </p:spTree>
-    <p:extLst>
-      <p:ext uri="{BB962C8B-B14F-4D97-AF65-F5344CB8AC3E}">
-        <p14:creationId xmlns:p14="http://schemas.microsoft.com/office/powerpoint/2010/main" val="2209977519"/>
-      </p:ext>
-    </p:extLst>
   </p:cSld>
   <p:clrMap bg1="lt1" tx1="dk1" bg2="lt2" tx2="dk2" accent1="accent1" accent2="accent2" accent3="accent3" accent4="accent4" accent5="accent5" accent6="accent6" hlink="hlink" folHlink="folHlink"/>
   <p:sldLayoutIdLst>
@@ -2827,7 +2793,7 @@
   </p:sldLayoutIdLst>
   <p:txStyles>
     <p:titleStyle>
-      <a:lvl1pPr algn="ctr" defTabSz="457200" rtl="0" eaLnBrk="1" latinLnBrk="0" hangingPunct="1">
+      <a:lvl1pPr algn="ctr" defTabSz="914400" rtl="0" eaLnBrk="1" latinLnBrk="0" hangingPunct="1">
         <a:spcBef>
           <a:spcPct val="0"/>
         </a:spcBef>
@@ -2843,11 +2809,11 @@
       </a:lvl1pPr>
     </p:titleStyle>
     <p:bodyStyle>
-      <a:lvl1pPr marL="342900" indent="-342900" algn="l" defTabSz="457200" rtl="0" eaLnBrk="1" latinLnBrk="0" hangingPunct="1">
+      <a:lvl1pPr marL="342900" indent="-342900" algn="l" defTabSz="914400" rtl="0" eaLnBrk="1" latinLnBrk="0" hangingPunct="1">
         <a:spcBef>
           <a:spcPct val="20000"/>
         </a:spcBef>
-        <a:buFont typeface="Arial"/>
+        <a:buFont typeface="Arial" pitchFamily="34" charset="0"/>
         <a:buChar char="•"/>
         <a:defRPr sz="3200" kern="1200">
           <a:solidFill>
@@ -2858,11 +2824,11 @@
           <a:cs typeface="+mn-cs"/>
         </a:defRPr>
       </a:lvl1pPr>
-      <a:lvl2pPr marL="742950" indent="-285750" algn="l" defTabSz="457200" rtl="0" eaLnBrk="1" latinLnBrk="0" hangingPunct="1">
+      <a:lvl2pPr marL="742950" indent="-285750" algn="l" defTabSz="914400" rtl="0" eaLnBrk="1" latinLnBrk="0" hangingPunct="1">
         <a:spcBef>
           <a:spcPct val="20000"/>
         </a:spcBef>
-        <a:buFont typeface="Arial"/>
+        <a:buFont typeface="Arial" pitchFamily="34" charset="0"/>
         <a:buChar char="–"/>
         <a:defRPr sz="2800" kern="1200">
           <a:solidFill>
@@ -2873,11 +2839,11 @@
           <a:cs typeface="+mn-cs"/>
         </a:defRPr>
       </a:lvl2pPr>
-      <a:lvl3pPr marL="1143000" indent="-228600" algn="l" defTabSz="457200" rtl="0" eaLnBrk="1" latinLnBrk="0" hangingPunct="1">
+      <a:lvl3pPr marL="1143000" indent="-228600" algn="l" defTabSz="914400" rtl="0" eaLnBrk="1" latinLnBrk="0" hangingPunct="1">
         <a:spcBef>
           <a:spcPct val="20000"/>
         </a:spcBef>
-        <a:buFont typeface="Arial"/>
+        <a:buFont typeface="Arial" pitchFamily="34" charset="0"/>
         <a:buChar char="•"/>
         <a:defRPr sz="2400" kern="1200">
           <a:solidFill>
@@ -2888,11 +2854,11 @@
           <a:cs typeface="+mn-cs"/>
         </a:defRPr>
       </a:lvl3pPr>
-      <a:lvl4pPr marL="1600200" indent="-228600" algn="l" defTabSz="457200" rtl="0" eaLnBrk="1" latinLnBrk="0" hangingPunct="1">
+      <a:lvl4pPr marL="1600200" indent="-228600" algn="l" defTabSz="914400" rtl="0" eaLnBrk="1" latinLnBrk="0" hangingPunct="1">
         <a:spcBef>
           <a:spcPct val="20000"/>
         </a:spcBef>
-        <a:buFont typeface="Arial"/>
+        <a:buFont typeface="Arial" pitchFamily="34" charset="0"/>
         <a:buChar char="–"/>
         <a:defRPr sz="2000" kern="1200">
           <a:solidFill>
@@ -2903,11 +2869,11 @@
           <a:cs typeface="+mn-cs"/>
         </a:defRPr>
       </a:lvl4pPr>
-      <a:lvl5pPr marL="2057400" indent="-228600" algn="l" defTabSz="457200" rtl="0" eaLnBrk="1" latinLnBrk="0" hangingPunct="1">
+      <a:lvl5pPr marL="2057400" indent="-228600" algn="l" defTabSz="914400" rtl="0" eaLnBrk="1" latinLnBrk="0" hangingPunct="1">
         <a:spcBef>
           <a:spcPct val="20000"/>
         </a:spcBef>
-        <a:buFont typeface="Arial"/>
+        <a:buFont typeface="Arial" pitchFamily="34" charset="0"/>
         <a:buChar char="»"/>
         <a:defRPr sz="2000" kern="1200">
           <a:solidFill>
@@ -2918,11 +2884,11 @@
           <a:cs typeface="+mn-cs"/>
         </a:defRPr>
       </a:lvl5pPr>
-      <a:lvl6pPr marL="2514600" indent="-228600" algn="l" defTabSz="457200" rtl="0" eaLnBrk="1" latinLnBrk="0" hangingPunct="1">
+      <a:lvl6pPr marL="2514600" indent="-228600" algn="l" defTabSz="914400" rtl="0" eaLnBrk="1" latinLnBrk="0" hangingPunct="1">
         <a:spcBef>
           <a:spcPct val="20000"/>
         </a:spcBef>
-        <a:buFont typeface="Arial"/>
+        <a:buFont typeface="Arial" pitchFamily="34" charset="0"/>
         <a:buChar char="•"/>
         <a:defRPr sz="2000" kern="1200">
           <a:solidFill>
@@ -2933,11 +2899,11 @@
           <a:cs typeface="+mn-cs"/>
         </a:defRPr>
       </a:lvl6pPr>
-      <a:lvl7pPr marL="2971800" indent="-228600" algn="l" defTabSz="457200" rtl="0" eaLnBrk="1" latinLnBrk="0" hangingPunct="1">
+      <a:lvl7pPr marL="2971800" indent="-228600" algn="l" defTabSz="914400" rtl="0" eaLnBrk="1" latinLnBrk="0" hangingPunct="1">
         <a:spcBef>
           <a:spcPct val="20000"/>
         </a:spcBef>
-        <a:buFont typeface="Arial"/>
+        <a:buFont typeface="Arial" pitchFamily="34" charset="0"/>
         <a:buChar char="•"/>
         <a:defRPr sz="2000" kern="1200">
           <a:solidFill>
@@ -2948,11 +2914,11 @@
           <a:cs typeface="+mn-cs"/>
         </a:defRPr>
       </a:lvl7pPr>
-      <a:lvl8pPr marL="3429000" indent="-228600" algn="l" defTabSz="457200" rtl="0" eaLnBrk="1" latinLnBrk="0" hangingPunct="1">
+      <a:lvl8pPr marL="3429000" indent="-228600" algn="l" defTabSz="914400" rtl="0" eaLnBrk="1" latinLnBrk="0" hangingPunct="1">
         <a:spcBef>
           <a:spcPct val="20000"/>
         </a:spcBef>
-        <a:buFont typeface="Arial"/>
+        <a:buFont typeface="Arial" pitchFamily="34" charset="0"/>
         <a:buChar char="•"/>
         <a:defRPr sz="2000" kern="1200">
           <a:solidFill>
@@ -2963,11 +2929,11 @@
           <a:cs typeface="+mn-cs"/>
         </a:defRPr>
       </a:lvl8pPr>
-      <a:lvl9pPr marL="3886200" indent="-228600" algn="l" defTabSz="457200" rtl="0" eaLnBrk="1" latinLnBrk="0" hangingPunct="1">
+      <a:lvl9pPr marL="3886200" indent="-228600" algn="l" defTabSz="914400" rtl="0" eaLnBrk="1" latinLnBrk="0" hangingPunct="1">
         <a:spcBef>
           <a:spcPct val="20000"/>
         </a:spcBef>
-        <a:buFont typeface="Arial"/>
+        <a:buFont typeface="Arial" pitchFamily="34" charset="0"/>
         <a:buChar char="•"/>
         <a:defRPr sz="2000" kern="1200">
           <a:solidFill>
@@ -2983,7 +2949,7 @@
       <a:defPPr>
         <a:defRPr lang="en-US"/>
       </a:defPPr>
-      <a:lvl1pPr marL="0" algn="l" defTabSz="457200" rtl="0" eaLnBrk="1" latinLnBrk="0" hangingPunct="1">
+      <a:lvl1pPr marL="0" algn="l" defTabSz="914400" rtl="0" eaLnBrk="1" latinLnBrk="0" hangingPunct="1">
         <a:defRPr sz="1800" kern="1200">
           <a:solidFill>
             <a:schemeClr val="tx1"/>
@@ -2993,7 +2959,7 @@
           <a:cs typeface="+mn-cs"/>
         </a:defRPr>
       </a:lvl1pPr>
-      <a:lvl2pPr marL="457200" algn="l" defTabSz="457200" rtl="0" eaLnBrk="1" latinLnBrk="0" hangingPunct="1">
+      <a:lvl2pPr marL="457200" algn="l" defTabSz="914400" rtl="0" eaLnBrk="1" latinLnBrk="0" hangingPunct="1">
         <a:defRPr sz="1800" kern="1200">
           <a:solidFill>
             <a:schemeClr val="tx1"/>
@@ -3003,7 +2969,7 @@
           <a:cs typeface="+mn-cs"/>
         </a:defRPr>
       </a:lvl2pPr>
-      <a:lvl3pPr marL="914400" algn="l" defTabSz="457200" rtl="0" eaLnBrk="1" latinLnBrk="0" hangingPunct="1">
+      <a:lvl3pPr marL="914400" algn="l" defTabSz="914400" rtl="0" eaLnBrk="1" latinLnBrk="0" hangingPunct="1">
         <a:defRPr sz="1800" kern="1200">
           <a:solidFill>
             <a:schemeClr val="tx1"/>
@@ -3013,7 +2979,7 @@
           <a:cs typeface="+mn-cs"/>
         </a:defRPr>
       </a:lvl3pPr>
-      <a:lvl4pPr marL="1371600" algn="l" defTabSz="457200" rtl="0" eaLnBrk="1" latinLnBrk="0" hangingPunct="1">
+      <a:lvl4pPr marL="1371600" algn="l" defTabSz="914400" rtl="0" eaLnBrk="1" latinLnBrk="0" hangingPunct="1">
         <a:defRPr sz="1800" kern="1200">
           <a:solidFill>
             <a:schemeClr val="tx1"/>
@@ -3023,7 +2989,7 @@
           <a:cs typeface="+mn-cs"/>
         </a:defRPr>
       </a:lvl4pPr>
-      <a:lvl5pPr marL="1828800" algn="l" defTabSz="457200" rtl="0" eaLnBrk="1" latinLnBrk="0" hangingPunct="1">
+      <a:lvl5pPr marL="1828800" algn="l" defTabSz="914400" rtl="0" eaLnBrk="1" latinLnBrk="0" hangingPunct="1">
         <a:defRPr sz="1800" kern="1200">
           <a:solidFill>
             <a:schemeClr val="tx1"/>
@@ -3033,7 +2999,7 @@
           <a:cs typeface="+mn-cs"/>
         </a:defRPr>
       </a:lvl5pPr>
-      <a:lvl6pPr marL="2286000" algn="l" defTabSz="457200" rtl="0" eaLnBrk="1" latinLnBrk="0" hangingPunct="1">
+      <a:lvl6pPr marL="2286000" algn="l" defTabSz="914400" rtl="0" eaLnBrk="1" latinLnBrk="0" hangingPunct="1">
         <a:defRPr sz="1800" kern="1200">
           <a:solidFill>
             <a:schemeClr val="tx1"/>
@@ -3043,7 +3009,7 @@
           <a:cs typeface="+mn-cs"/>
         </a:defRPr>
       </a:lvl6pPr>
-      <a:lvl7pPr marL="2743200" algn="l" defTabSz="457200" rtl="0" eaLnBrk="1" latinLnBrk="0" hangingPunct="1">
+      <a:lvl7pPr marL="2743200" algn="l" defTabSz="914400" rtl="0" eaLnBrk="1" latinLnBrk="0" hangingPunct="1">
         <a:defRPr sz="1800" kern="1200">
           <a:solidFill>
             <a:schemeClr val="tx1"/>
@@ -3053,7 +3019,7 @@
           <a:cs typeface="+mn-cs"/>
         </a:defRPr>
       </a:lvl7pPr>
-      <a:lvl8pPr marL="3200400" algn="l" defTabSz="457200" rtl="0" eaLnBrk="1" latinLnBrk="0" hangingPunct="1">
+      <a:lvl8pPr marL="3200400" algn="l" defTabSz="914400" rtl="0" eaLnBrk="1" latinLnBrk="0" hangingPunct="1">
         <a:defRPr sz="1800" kern="1200">
           <a:solidFill>
             <a:schemeClr val="tx1"/>
@@ -3063,7 +3029,7 @@
           <a:cs typeface="+mn-cs"/>
         </a:defRPr>
       </a:lvl8pPr>
-      <a:lvl9pPr marL="3657600" algn="l" defTabSz="457200" rtl="0" eaLnBrk="1" latinLnBrk="0" hangingPunct="1">
+      <a:lvl9pPr marL="3657600" algn="l" defTabSz="914400" rtl="0" eaLnBrk="1" latinLnBrk="0" hangingPunct="1">
         <a:defRPr sz="1800" kern="1200">
           <a:solidFill>
             <a:schemeClr val="tx1"/>
@@ -3079,7 +3045,7 @@
 </file>
 
 <file path=ppt/slides/slide1.xml><?xml version="1.0" encoding="utf-8"?>
-<p:sld xmlns:a="http://schemas.openxmlformats.org/drawingml/2006/main" xmlns:p="http://schemas.openxmlformats.org/presentationml/2006/main" xmlns:r="http://schemas.openxmlformats.org/officeDocument/2006/relationships">
+<p:sld xmlns:a="http://schemas.openxmlformats.org/drawingml/2006/main" xmlns:r="http://schemas.openxmlformats.org/officeDocument/2006/relationships" xmlns:p="http://schemas.openxmlformats.org/presentationml/2006/main">
   <p:cSld>
     <p:spTree>
       <p:nvGrpSpPr>
@@ -3087,31 +3053,4794 @@
         <p:cNvGrpSpPr/>
         <p:nvPr/>
       </p:nvGrpSpPr>
-      <p:grpSpPr/>
-      <p:pic>
-        <p:nvPicPr>
-          <p:cNvPr id="2" name="Picture 1" descr="fig7_testing.png"/>
-          <p:cNvPicPr>
-            <a:picLocks noChangeAspect="1"/>
-          </p:cNvPicPr>
+      <p:grpSpPr>
+        <a:xfrm>
+          <a:off x="0" y="0"/>
+          <a:ext cx="0" cy="0"/>
+          <a:chOff x="0" y="0"/>
+          <a:chExt cx="0" cy="0"/>
+        </a:xfrm>
+      </p:grpSpPr>
+      <p:grpSp>
+        <p:nvGrpSpPr>
+          <p:cNvPr id="2" name="Group 2"/>
+          <p:cNvGrpSpPr/>
           <p:nvPr/>
-        </p:nvPicPr>
-        <p:blipFill>
-          <a:blip r:embed="rId2"/>
-          <a:stretch>
-            <a:fillRect/>
-          </a:stretch>
-        </p:blipFill>
+        </p:nvGrpSpPr>
+        <p:grpSpPr>
+          <a:xfrm>
+            <a:off x="404364" y="114300"/>
+            <a:ext cx="5082036" cy="7543800"/>
+            <a:chOff x="0" y="0"/>
+            <a:chExt cx="6809981" cy="8758485"/>
+          </a:xfrm>
+        </p:grpSpPr>
+        <p:sp>
+          <p:nvSpPr>
+            <p:cNvPr id="3" name="Freeform 3"/>
+            <p:cNvSpPr/>
+            <p:nvPr/>
+          </p:nvSpPr>
+          <p:spPr>
+            <a:xfrm>
+              <a:off x="0" y="0"/>
+              <a:ext cx="6809994" cy="8758524"/>
+            </a:xfrm>
+            <a:custGeom>
+              <a:avLst/>
+              <a:gdLst/>
+              <a:ahLst/>
+              <a:cxnLst/>
+              <a:rect l="l" t="t" r="r" b="b"/>
+              <a:pathLst>
+                <a:path w="6809994" h="8758524">
+                  <a:moveTo>
+                    <a:pt x="0" y="254574"/>
+                  </a:moveTo>
+                  <a:cubicBezTo>
+                    <a:pt x="0" y="113935"/>
+                    <a:pt x="121920" y="0"/>
+                    <a:pt x="272415" y="0"/>
+                  </a:cubicBezTo>
+                  <a:lnTo>
+                    <a:pt x="6537579" y="0"/>
+                  </a:lnTo>
+                  <a:cubicBezTo>
+                    <a:pt x="6688074" y="0"/>
+                    <a:pt x="6809994" y="113935"/>
+                    <a:pt x="6809994" y="254574"/>
+                  </a:cubicBezTo>
+                  <a:lnTo>
+                    <a:pt x="6809994" y="8503947"/>
+                  </a:lnTo>
+                  <a:cubicBezTo>
+                    <a:pt x="6809994" y="8644586"/>
+                    <a:pt x="6688074" y="8758524"/>
+                    <a:pt x="6537579" y="8758524"/>
+                  </a:cubicBezTo>
+                  <a:lnTo>
+                    <a:pt x="272415" y="8758524"/>
+                  </a:lnTo>
+                  <a:cubicBezTo>
+                    <a:pt x="121920" y="8758523"/>
+                    <a:pt x="0" y="8644467"/>
+                    <a:pt x="0" y="8503947"/>
+                  </a:cubicBezTo>
+                  <a:close/>
+                </a:path>
+              </a:pathLst>
+            </a:custGeom>
+            <a:solidFill>
+              <a:srgbClr val="FFFFFF"/>
+            </a:solidFill>
+            <a:ln w="28597" cap="sq">
+              <a:solidFill>
+                <a:srgbClr val="15803D"/>
+              </a:solidFill>
+              <a:prstDash val="solid"/>
+              <a:miter/>
+            </a:ln>
+          </p:spPr>
+        </p:sp>
+      </p:grpSp>
+      <p:grpSp>
+        <p:nvGrpSpPr>
+          <p:cNvPr id="4" name="Group 4"/>
+          <p:cNvGrpSpPr/>
+          <p:nvPr/>
+        </p:nvGrpSpPr>
+        <p:grpSpPr>
+          <a:xfrm>
+            <a:off x="381000" y="83493"/>
+            <a:ext cx="5085312" cy="960872"/>
+            <a:chOff x="0" y="0"/>
+            <a:chExt cx="6771856" cy="1281163"/>
+          </a:xfrm>
+        </p:grpSpPr>
+        <p:sp>
+          <p:nvSpPr>
+            <p:cNvPr id="5" name="Freeform 5"/>
+            <p:cNvSpPr/>
+            <p:nvPr/>
+          </p:nvSpPr>
+          <p:spPr>
+            <a:xfrm>
+              <a:off x="0" y="0"/>
+              <a:ext cx="6771894" cy="1281176"/>
+            </a:xfrm>
+            <a:custGeom>
+              <a:avLst/>
+              <a:gdLst/>
+              <a:ahLst/>
+              <a:cxnLst/>
+              <a:rect l="l" t="t" r="r" b="b"/>
+              <a:pathLst>
+                <a:path w="6771894" h="1281176">
+                  <a:moveTo>
+                    <a:pt x="0" y="0"/>
+                  </a:moveTo>
+                  <a:lnTo>
+                    <a:pt x="6771894" y="0"/>
+                  </a:lnTo>
+                  <a:lnTo>
+                    <a:pt x="6771894" y="1281176"/>
+                  </a:lnTo>
+                  <a:lnTo>
+                    <a:pt x="0" y="1281176"/>
+                  </a:lnTo>
+                  <a:close/>
+                </a:path>
+              </a:pathLst>
+            </a:custGeom>
+            <a:solidFill>
+              <a:srgbClr val="0B6A3A"/>
+            </a:solidFill>
+            <a:ln>
+              <a:noFill/>
+            </a:ln>
+          </p:spPr>
+          <p:style>
+            <a:lnRef idx="1">
+              <a:schemeClr val="accent1"/>
+            </a:lnRef>
+            <a:fillRef idx="3">
+              <a:schemeClr val="accent1"/>
+            </a:fillRef>
+            <a:effectRef idx="2">
+              <a:schemeClr val="accent1"/>
+            </a:effectRef>
+            <a:fontRef idx="minor">
+              <a:schemeClr val="lt1"/>
+            </a:fontRef>
+          </p:style>
+        </p:sp>
+      </p:grpSp>
+      <p:sp>
+        <p:nvSpPr>
+          <p:cNvPr id="6" name="TextBox 6"/>
+          <p:cNvSpPr txBox="1"/>
+          <p:nvPr/>
+        </p:nvSpPr>
         <p:spPr>
           <a:xfrm>
-            <a:off x="0" y="0"/>
-            <a:ext cx="12191695" cy="7619809"/>
+            <a:off x="920740" y="325309"/>
+            <a:ext cx="4227833" cy="564257"/>
           </a:xfrm>
           <a:prstGeom prst="rect">
             <a:avLst/>
           </a:prstGeom>
         </p:spPr>
-      </p:pic>
+        <p:txBody>
+          <a:bodyPr lIns="0" tIns="0" rIns="0" bIns="0" rtlCol="0" anchor="t">
+            <a:spAutoFit/>
+          </a:bodyPr>
+          <a:lstStyle/>
+          <a:p>
+            <a:pPr algn="ctr">
+              <a:lnSpc>
+                <a:spcPts val="2160"/>
+              </a:lnSpc>
+            </a:pPr>
+            <a:r>
+              <a:rPr lang="en-US" sz="2000" b="1" dirty="0">
+                <a:solidFill>
+                  <a:srgbClr val="FFFFFF"/>
+                </a:solidFill>
+                <a:latin typeface="Times New Roman" panose="02020603050405020304" pitchFamily="18" charset="0"/>
+                <a:ea typeface="Times New Roman Bold"/>
+                <a:cs typeface="Times New Roman" panose="02020603050405020304" pitchFamily="18" charset="0"/>
+                <a:sym typeface="Times New Roman Bold"/>
+              </a:rPr>
+              <a:t>1. GOOGLE LIGHTHOUSE</a:t>
+            </a:r>
+          </a:p>
+          <a:p>
+            <a:pPr algn="ctr">
+              <a:lnSpc>
+                <a:spcPts val="2160"/>
+              </a:lnSpc>
+            </a:pPr>
+            <a:r>
+              <a:rPr lang="en-US" sz="2000" dirty="0">
+                <a:solidFill>
+                  <a:srgbClr val="FFFFFF"/>
+                </a:solidFill>
+                <a:latin typeface="Times New Roman" panose="02020603050405020304" pitchFamily="18" charset="0"/>
+                <a:ea typeface="Times New Roman"/>
+                <a:cs typeface="Times New Roman" panose="02020603050405020304" pitchFamily="18" charset="0"/>
+                <a:sym typeface="Times New Roman"/>
+              </a:rPr>
+              <a:t>(Accessibility Audit)</a:t>
+            </a:r>
+          </a:p>
+        </p:txBody>
+      </p:sp>
+      <p:grpSp>
+        <p:nvGrpSpPr>
+          <p:cNvPr id="7" name="Group 7"/>
+          <p:cNvGrpSpPr/>
+          <p:nvPr/>
+        </p:nvGrpSpPr>
+        <p:grpSpPr>
+          <a:xfrm>
+            <a:off x="635041" y="1309888"/>
+            <a:ext cx="1058900" cy="1058903"/>
+            <a:chOff x="0" y="0"/>
+            <a:chExt cx="1827682" cy="1827688"/>
+          </a:xfrm>
+        </p:grpSpPr>
+        <p:sp>
+          <p:nvSpPr>
+            <p:cNvPr id="8" name="Freeform 8"/>
+            <p:cNvSpPr/>
+            <p:nvPr/>
+          </p:nvSpPr>
+          <p:spPr>
+            <a:xfrm>
+              <a:off x="0" y="0"/>
+              <a:ext cx="1827784" cy="1827789"/>
+            </a:xfrm>
+            <a:custGeom>
+              <a:avLst/>
+              <a:gdLst/>
+              <a:ahLst/>
+              <a:cxnLst/>
+              <a:rect l="l" t="t" r="r" b="b"/>
+              <a:pathLst>
+                <a:path w="1827784" h="1827789">
+                  <a:moveTo>
+                    <a:pt x="0" y="913895"/>
+                  </a:moveTo>
+                  <a:cubicBezTo>
+                    <a:pt x="0" y="409195"/>
+                    <a:pt x="409194" y="0"/>
+                    <a:pt x="913892" y="0"/>
+                  </a:cubicBezTo>
+                  <a:cubicBezTo>
+                    <a:pt x="1418590" y="0"/>
+                    <a:pt x="1827784" y="409195"/>
+                    <a:pt x="1827784" y="913895"/>
+                  </a:cubicBezTo>
+                  <a:cubicBezTo>
+                    <a:pt x="1827784" y="1418594"/>
+                    <a:pt x="1418590" y="1827789"/>
+                    <a:pt x="913892" y="1827789"/>
+                  </a:cubicBezTo>
+                  <a:cubicBezTo>
+                    <a:pt x="409194" y="1827789"/>
+                    <a:pt x="0" y="1418594"/>
+                    <a:pt x="0" y="913895"/>
+                  </a:cubicBezTo>
+                  <a:close/>
+                </a:path>
+              </a:pathLst>
+            </a:custGeom>
+            <a:solidFill>
+              <a:srgbClr val="FFFFFF"/>
+            </a:solidFill>
+            <a:ln w="66727" cap="sq">
+              <a:solidFill>
+                <a:srgbClr val="15803D"/>
+              </a:solidFill>
+              <a:prstDash val="solid"/>
+              <a:miter/>
+            </a:ln>
+          </p:spPr>
+        </p:sp>
+        <p:sp>
+          <p:nvSpPr>
+            <p:cNvPr id="9" name="TextBox 9"/>
+            <p:cNvSpPr txBox="1"/>
+            <p:nvPr/>
+          </p:nvSpPr>
+          <p:spPr>
+            <a:xfrm>
+              <a:off x="0" y="-19050"/>
+              <a:ext cx="1827682" cy="1846738"/>
+            </a:xfrm>
+            <a:prstGeom prst="rect">
+              <a:avLst/>
+            </a:prstGeom>
+          </p:spPr>
+          <p:txBody>
+            <a:bodyPr lIns="50800" tIns="50800" rIns="50800" bIns="50800" rtlCol="0" anchor="ctr"/>
+            <a:lstStyle/>
+            <a:p>
+              <a:pPr algn="ctr">
+                <a:lnSpc>
+                  <a:spcPts val="1981"/>
+                </a:lnSpc>
+              </a:pPr>
+              <a:r>
+                <a:rPr lang="en-US" b="1" dirty="0">
+                  <a:solidFill>
+                    <a:srgbClr val="111827"/>
+                  </a:solidFill>
+                  <a:latin typeface="Times New Roman Bold"/>
+                  <a:ea typeface="Times New Roman Bold"/>
+                  <a:cs typeface="Times New Roman Bold"/>
+                  <a:sym typeface="Times New Roman Bold"/>
+                </a:rPr>
+                <a:t>100/100</a:t>
+              </a:r>
+            </a:p>
+          </p:txBody>
+        </p:sp>
+      </p:grpSp>
+      <p:sp>
+        <p:nvSpPr>
+          <p:cNvPr id="10" name="TextBox 10"/>
+          <p:cNvSpPr txBox="1"/>
+          <p:nvPr/>
+        </p:nvSpPr>
+        <p:spPr>
+          <a:xfrm>
+            <a:off x="2178348" y="1529229"/>
+            <a:ext cx="3225784" cy="730969"/>
+          </a:xfrm>
+          <a:prstGeom prst="rect">
+            <a:avLst/>
+          </a:prstGeom>
+        </p:spPr>
+        <p:txBody>
+          <a:bodyPr lIns="0" tIns="0" rIns="0" bIns="0" rtlCol="0" anchor="t">
+            <a:spAutoFit/>
+          </a:bodyPr>
+          <a:lstStyle/>
+          <a:p>
+            <a:pPr algn="l">
+              <a:lnSpc>
+                <a:spcPts val="1919"/>
+              </a:lnSpc>
+            </a:pPr>
+            <a:r>
+              <a:rPr lang="en-US" b="1" dirty="0">
+                <a:solidFill>
+                  <a:srgbClr val="4B5563"/>
+                </a:solidFill>
+                <a:latin typeface="Times New Roman Bold"/>
+                <a:ea typeface="Times New Roman Bold"/>
+                <a:cs typeface="Times New Roman Bold"/>
+                <a:sym typeface="Times New Roman Bold"/>
+              </a:rPr>
+              <a:t>Overall Accessibility Score</a:t>
+            </a:r>
+          </a:p>
+          <a:p>
+            <a:pPr algn="l">
+              <a:lnSpc>
+                <a:spcPts val="1919"/>
+              </a:lnSpc>
+            </a:pPr>
+            <a:r>
+              <a:rPr lang="en-US" b="1" dirty="0">
+                <a:solidFill>
+                  <a:srgbClr val="15803D"/>
+                </a:solidFill>
+                <a:latin typeface="Times New Roman Bold"/>
+                <a:ea typeface="Times New Roman Bold"/>
+                <a:cs typeface="Times New Roman Bold"/>
+                <a:sym typeface="Times New Roman Bold"/>
+              </a:rPr>
+              <a:t>No failed audits; composite 100/100</a:t>
+            </a:r>
+          </a:p>
+        </p:txBody>
+      </p:sp>
+      <p:grpSp>
+        <p:nvGrpSpPr>
+          <p:cNvPr id="11" name="Group 11"/>
+          <p:cNvGrpSpPr/>
+          <p:nvPr/>
+        </p:nvGrpSpPr>
+        <p:grpSpPr>
+          <a:xfrm>
+            <a:off x="724266" y="2692437"/>
+            <a:ext cx="4686205" cy="1597628"/>
+            <a:chOff x="0" y="203213"/>
+            <a:chExt cx="6248273" cy="2130171"/>
+          </a:xfrm>
+        </p:grpSpPr>
+        <p:sp>
+          <p:nvSpPr>
+            <p:cNvPr id="12" name="Freeform 12"/>
+            <p:cNvSpPr/>
+            <p:nvPr/>
+          </p:nvSpPr>
+          <p:spPr>
+            <a:xfrm>
+              <a:off x="0" y="203213"/>
+              <a:ext cx="6248273" cy="2130171"/>
+            </a:xfrm>
+            <a:custGeom>
+              <a:avLst/>
+              <a:gdLst/>
+              <a:ahLst/>
+              <a:cxnLst/>
+              <a:rect l="l" t="t" r="r" b="b"/>
+              <a:pathLst>
+                <a:path w="6248273" h="2130171">
+                  <a:moveTo>
+                    <a:pt x="0" y="106553"/>
+                  </a:moveTo>
+                  <a:cubicBezTo>
+                    <a:pt x="0" y="47625"/>
+                    <a:pt x="47625" y="0"/>
+                    <a:pt x="106553" y="0"/>
+                  </a:cubicBezTo>
+                  <a:lnTo>
+                    <a:pt x="6141720" y="0"/>
+                  </a:lnTo>
+                  <a:cubicBezTo>
+                    <a:pt x="6200521" y="0"/>
+                    <a:pt x="6248273" y="47625"/>
+                    <a:pt x="6248273" y="106553"/>
+                  </a:cubicBezTo>
+                  <a:lnTo>
+                    <a:pt x="6248273" y="2023618"/>
+                  </a:lnTo>
+                  <a:cubicBezTo>
+                    <a:pt x="6248273" y="2082419"/>
+                    <a:pt x="6200648" y="2130171"/>
+                    <a:pt x="6141720" y="2130171"/>
+                  </a:cubicBezTo>
+                  <a:lnTo>
+                    <a:pt x="106553" y="2130171"/>
+                  </a:lnTo>
+                  <a:cubicBezTo>
+                    <a:pt x="47752" y="2130171"/>
+                    <a:pt x="0" y="2082546"/>
+                    <a:pt x="0" y="2023618"/>
+                  </a:cubicBezTo>
+                  <a:close/>
+                </a:path>
+              </a:pathLst>
+            </a:custGeom>
+            <a:solidFill>
+              <a:srgbClr val="F9FAFB"/>
+            </a:solidFill>
+            <a:ln w="19065" cap="sq">
+              <a:solidFill>
+                <a:srgbClr val="E5E7EB"/>
+              </a:solidFill>
+              <a:prstDash val="solid"/>
+              <a:miter/>
+            </a:ln>
+          </p:spPr>
+        </p:sp>
+      </p:grpSp>
+      <p:sp>
+        <p:nvSpPr>
+          <p:cNvPr id="13" name="TextBox 13"/>
+          <p:cNvSpPr txBox="1"/>
+          <p:nvPr/>
+        </p:nvSpPr>
+        <p:spPr>
+          <a:xfrm>
+            <a:off x="1828800" y="2766244"/>
+            <a:ext cx="3034074" cy="243656"/>
+          </a:xfrm>
+          <a:prstGeom prst="rect">
+            <a:avLst/>
+          </a:prstGeom>
+        </p:spPr>
+        <p:txBody>
+          <a:bodyPr wrap="square" lIns="0" tIns="0" rIns="0" bIns="0" rtlCol="0" anchor="t">
+            <a:spAutoFit/>
+          </a:bodyPr>
+          <a:lstStyle/>
+          <a:p>
+            <a:pPr algn="ctr">
+              <a:lnSpc>
+                <a:spcPts val="1919"/>
+              </a:lnSpc>
+            </a:pPr>
+            <a:r>
+              <a:rPr lang="en-US" b="1" dirty="0">
+                <a:solidFill>
+                  <a:srgbClr val="15803D"/>
+                </a:solidFill>
+                <a:latin typeface="Times New Roman Bold"/>
+                <a:ea typeface="Times New Roman Bold"/>
+                <a:cs typeface="Times New Roman Bold"/>
+                <a:sym typeface="Times New Roman Bold"/>
+              </a:rPr>
+              <a:t>LIGHTHOUSE CHECKS (76)</a:t>
+            </a:r>
+          </a:p>
+        </p:txBody>
+      </p:sp>
+      <p:grpSp>
+        <p:nvGrpSpPr>
+          <p:cNvPr id="14" name="Group 14"/>
+          <p:cNvGrpSpPr/>
+          <p:nvPr/>
+        </p:nvGrpSpPr>
+        <p:grpSpPr>
+          <a:xfrm>
+            <a:off x="876300" y="3055298"/>
+            <a:ext cx="411804" cy="411802"/>
+            <a:chOff x="0" y="0"/>
+            <a:chExt cx="549072" cy="549069"/>
+          </a:xfrm>
+        </p:grpSpPr>
+        <p:sp>
+          <p:nvSpPr>
+            <p:cNvPr id="15" name="Freeform 15"/>
+            <p:cNvSpPr/>
+            <p:nvPr/>
+          </p:nvSpPr>
+          <p:spPr>
+            <a:xfrm>
+              <a:off x="0" y="0"/>
+              <a:ext cx="549021" cy="549018"/>
+            </a:xfrm>
+            <a:custGeom>
+              <a:avLst/>
+              <a:gdLst/>
+              <a:ahLst/>
+              <a:cxnLst/>
+              <a:rect l="l" t="t" r="r" b="b"/>
+              <a:pathLst>
+                <a:path w="549021" h="549018">
+                  <a:moveTo>
+                    <a:pt x="0" y="274573"/>
+                  </a:moveTo>
+                  <a:cubicBezTo>
+                    <a:pt x="0" y="122935"/>
+                    <a:pt x="122936" y="0"/>
+                    <a:pt x="274574" y="0"/>
+                  </a:cubicBezTo>
+                  <a:cubicBezTo>
+                    <a:pt x="426212" y="0"/>
+                    <a:pt x="549021" y="122935"/>
+                    <a:pt x="549021" y="274573"/>
+                  </a:cubicBezTo>
+                  <a:cubicBezTo>
+                    <a:pt x="549021" y="426210"/>
+                    <a:pt x="426212" y="549018"/>
+                    <a:pt x="274574" y="549018"/>
+                  </a:cubicBezTo>
+                  <a:cubicBezTo>
+                    <a:pt x="122936" y="549018"/>
+                    <a:pt x="0" y="426210"/>
+                    <a:pt x="0" y="274573"/>
+                  </a:cubicBezTo>
+                  <a:close/>
+                </a:path>
+              </a:pathLst>
+            </a:custGeom>
+            <a:solidFill>
+              <a:srgbClr val="15803D"/>
+            </a:solidFill>
+          </p:spPr>
+        </p:sp>
+        <p:sp>
+          <p:nvSpPr>
+            <p:cNvPr id="16" name="TextBox 16"/>
+            <p:cNvSpPr txBox="1"/>
+            <p:nvPr/>
+          </p:nvSpPr>
+          <p:spPr>
+            <a:xfrm>
+              <a:off x="0" y="-19050"/>
+              <a:ext cx="549072" cy="568119"/>
+            </a:xfrm>
+            <a:prstGeom prst="rect">
+              <a:avLst/>
+            </a:prstGeom>
+          </p:spPr>
+          <p:txBody>
+            <a:bodyPr lIns="50800" tIns="50800" rIns="50800" bIns="50800" rtlCol="0" anchor="ctr"/>
+            <a:lstStyle/>
+            <a:p>
+              <a:pPr algn="ctr">
+                <a:lnSpc>
+                  <a:spcPts val="1441"/>
+                </a:lnSpc>
+              </a:pPr>
+              <a:r>
+                <a:rPr lang="en-US" sz="1200" b="1">
+                  <a:solidFill>
+                    <a:srgbClr val="FFFFFF"/>
+                  </a:solidFill>
+                  <a:latin typeface="Times New Roman Bold"/>
+                  <a:ea typeface="Times New Roman Bold"/>
+                  <a:cs typeface="Times New Roman Bold"/>
+                  <a:sym typeface="Times New Roman Bold"/>
+                </a:rPr>
+                <a:t>✓</a:t>
+              </a:r>
+            </a:p>
+          </p:txBody>
+        </p:sp>
+      </p:grpSp>
+      <p:sp>
+        <p:nvSpPr>
+          <p:cNvPr id="17" name="TextBox 17"/>
+          <p:cNvSpPr txBox="1"/>
+          <p:nvPr/>
+        </p:nvSpPr>
+        <p:spPr>
+          <a:xfrm>
+            <a:off x="876300" y="3652279"/>
+            <a:ext cx="304800" cy="243656"/>
+          </a:xfrm>
+          <a:prstGeom prst="rect">
+            <a:avLst/>
+          </a:prstGeom>
+        </p:spPr>
+        <p:txBody>
+          <a:bodyPr lIns="0" tIns="0" rIns="0" bIns="0" rtlCol="0" anchor="t">
+            <a:spAutoFit/>
+          </a:bodyPr>
+          <a:lstStyle/>
+          <a:p>
+            <a:pPr algn="ctr">
+              <a:lnSpc>
+                <a:spcPts val="1919"/>
+              </a:lnSpc>
+            </a:pPr>
+            <a:r>
+              <a:rPr lang="en-US" b="1" dirty="0">
+                <a:solidFill>
+                  <a:srgbClr val="111827"/>
+                </a:solidFill>
+                <a:latin typeface="Times New Roman Bold"/>
+                <a:ea typeface="Times New Roman Bold"/>
+                <a:cs typeface="Times New Roman Bold"/>
+                <a:sym typeface="Times New Roman Bold"/>
+              </a:rPr>
+              <a:t>23</a:t>
+            </a:r>
+          </a:p>
+        </p:txBody>
+      </p:sp>
+      <p:sp>
+        <p:nvSpPr>
+          <p:cNvPr id="18" name="TextBox 18"/>
+          <p:cNvSpPr txBox="1"/>
+          <p:nvPr/>
+        </p:nvSpPr>
+        <p:spPr>
+          <a:xfrm>
+            <a:off x="512921" y="3909244"/>
+            <a:ext cx="1235402" cy="243656"/>
+          </a:xfrm>
+          <a:prstGeom prst="rect">
+            <a:avLst/>
+          </a:prstGeom>
+        </p:spPr>
+        <p:txBody>
+          <a:bodyPr lIns="0" tIns="0" rIns="0" bIns="0" rtlCol="0" anchor="t">
+            <a:spAutoFit/>
+          </a:bodyPr>
+          <a:lstStyle/>
+          <a:p>
+            <a:pPr algn="ctr">
+              <a:lnSpc>
+                <a:spcPts val="1919"/>
+              </a:lnSpc>
+            </a:pPr>
+            <a:r>
+              <a:rPr lang="en-US" b="1">
+                <a:solidFill>
+                  <a:srgbClr val="4B5563"/>
+                </a:solidFill>
+                <a:latin typeface="Times New Roman Bold"/>
+                <a:ea typeface="Times New Roman Bold"/>
+                <a:cs typeface="Times New Roman Bold"/>
+                <a:sym typeface="Times New Roman Bold"/>
+              </a:rPr>
+              <a:t>Passed</a:t>
+            </a:r>
+          </a:p>
+        </p:txBody>
+      </p:sp>
+      <p:grpSp>
+        <p:nvGrpSpPr>
+          <p:cNvPr id="19" name="Group 19"/>
+          <p:cNvGrpSpPr/>
+          <p:nvPr/>
+        </p:nvGrpSpPr>
+        <p:grpSpPr>
+          <a:xfrm>
+            <a:off x="2259301" y="3041009"/>
+            <a:ext cx="411804" cy="426091"/>
+            <a:chOff x="0" y="-19051"/>
+            <a:chExt cx="549072" cy="568120"/>
+          </a:xfrm>
+        </p:grpSpPr>
+        <p:sp>
+          <p:nvSpPr>
+            <p:cNvPr id="20" name="Freeform 20"/>
+            <p:cNvSpPr/>
+            <p:nvPr/>
+          </p:nvSpPr>
+          <p:spPr>
+            <a:xfrm>
+              <a:off x="0" y="0"/>
+              <a:ext cx="549021" cy="549018"/>
+            </a:xfrm>
+            <a:custGeom>
+              <a:avLst/>
+              <a:gdLst/>
+              <a:ahLst/>
+              <a:cxnLst/>
+              <a:rect l="l" t="t" r="r" b="b"/>
+              <a:pathLst>
+                <a:path w="549021" h="549018">
+                  <a:moveTo>
+                    <a:pt x="0" y="274573"/>
+                  </a:moveTo>
+                  <a:cubicBezTo>
+                    <a:pt x="0" y="122935"/>
+                    <a:pt x="122936" y="0"/>
+                    <a:pt x="274574" y="0"/>
+                  </a:cubicBezTo>
+                  <a:cubicBezTo>
+                    <a:pt x="426212" y="0"/>
+                    <a:pt x="549021" y="122935"/>
+                    <a:pt x="549021" y="274573"/>
+                  </a:cubicBezTo>
+                  <a:cubicBezTo>
+                    <a:pt x="549021" y="426210"/>
+                    <a:pt x="426212" y="549018"/>
+                    <a:pt x="274574" y="549018"/>
+                  </a:cubicBezTo>
+                  <a:cubicBezTo>
+                    <a:pt x="122936" y="549018"/>
+                    <a:pt x="0" y="426210"/>
+                    <a:pt x="0" y="274573"/>
+                  </a:cubicBezTo>
+                  <a:close/>
+                </a:path>
+              </a:pathLst>
+            </a:custGeom>
+            <a:solidFill>
+              <a:srgbClr val="15803D"/>
+            </a:solidFill>
+          </p:spPr>
+        </p:sp>
+        <p:sp>
+          <p:nvSpPr>
+            <p:cNvPr id="21" name="TextBox 21"/>
+            <p:cNvSpPr txBox="1"/>
+            <p:nvPr/>
+          </p:nvSpPr>
+          <p:spPr>
+            <a:xfrm>
+              <a:off x="0" y="-19051"/>
+              <a:ext cx="549072" cy="568120"/>
+            </a:xfrm>
+            <a:prstGeom prst="rect">
+              <a:avLst/>
+            </a:prstGeom>
+          </p:spPr>
+          <p:txBody>
+            <a:bodyPr lIns="50800" tIns="50800" rIns="50800" bIns="50800" rtlCol="0" anchor="ctr"/>
+            <a:lstStyle/>
+            <a:p>
+              <a:pPr algn="ctr">
+                <a:lnSpc>
+                  <a:spcPts val="1441"/>
+                </a:lnSpc>
+              </a:pPr>
+              <a:r>
+                <a:rPr lang="en-US" sz="1200" b="1" dirty="0">
+                  <a:solidFill>
+                    <a:srgbClr val="FFFFFF"/>
+                  </a:solidFill>
+                  <a:latin typeface="Times New Roman Bold"/>
+                  <a:ea typeface="Times New Roman Bold"/>
+                  <a:cs typeface="Times New Roman Bold"/>
+                  <a:sym typeface="Times New Roman Bold"/>
+                </a:rPr>
+                <a:t>✓</a:t>
+              </a:r>
+            </a:p>
+          </p:txBody>
+        </p:sp>
+      </p:grpSp>
+      <p:sp>
+        <p:nvSpPr>
+          <p:cNvPr id="22" name="TextBox 22"/>
+          <p:cNvSpPr txBox="1"/>
+          <p:nvPr/>
+        </p:nvSpPr>
+        <p:spPr>
+          <a:xfrm>
+            <a:off x="2259301" y="3661594"/>
+            <a:ext cx="304800" cy="243656"/>
+          </a:xfrm>
+          <a:prstGeom prst="rect">
+            <a:avLst/>
+          </a:prstGeom>
+        </p:spPr>
+        <p:txBody>
+          <a:bodyPr lIns="0" tIns="0" rIns="0" bIns="0" rtlCol="0" anchor="t">
+            <a:spAutoFit/>
+          </a:bodyPr>
+          <a:lstStyle/>
+          <a:p>
+            <a:pPr algn="ctr">
+              <a:lnSpc>
+                <a:spcPts val="1919"/>
+              </a:lnSpc>
+            </a:pPr>
+            <a:r>
+              <a:rPr lang="en-US" b="1">
+                <a:solidFill>
+                  <a:srgbClr val="111827"/>
+                </a:solidFill>
+                <a:latin typeface="Times New Roman Bold"/>
+                <a:ea typeface="Times New Roman Bold"/>
+                <a:cs typeface="Times New Roman Bold"/>
+                <a:sym typeface="Times New Roman Bold"/>
+              </a:rPr>
+              <a:t>0</a:t>
+            </a:r>
+          </a:p>
+        </p:txBody>
+      </p:sp>
+      <p:sp>
+        <p:nvSpPr>
+          <p:cNvPr id="23" name="TextBox 23"/>
+          <p:cNvSpPr txBox="1"/>
+          <p:nvPr/>
+        </p:nvSpPr>
+        <p:spPr>
+          <a:xfrm>
+            <a:off x="1793996" y="3890404"/>
+            <a:ext cx="1235402" cy="243656"/>
+          </a:xfrm>
+          <a:prstGeom prst="rect">
+            <a:avLst/>
+          </a:prstGeom>
+        </p:spPr>
+        <p:txBody>
+          <a:bodyPr lIns="0" tIns="0" rIns="0" bIns="0" rtlCol="0" anchor="t">
+            <a:spAutoFit/>
+          </a:bodyPr>
+          <a:lstStyle/>
+          <a:p>
+            <a:pPr algn="ctr">
+              <a:lnSpc>
+                <a:spcPts val="1919"/>
+              </a:lnSpc>
+            </a:pPr>
+            <a:r>
+              <a:rPr lang="en-US" b="1">
+                <a:solidFill>
+                  <a:srgbClr val="4B5563"/>
+                </a:solidFill>
+                <a:latin typeface="Times New Roman Bold"/>
+                <a:ea typeface="Times New Roman Bold"/>
+                <a:cs typeface="Times New Roman Bold"/>
+                <a:sym typeface="Times New Roman Bold"/>
+              </a:rPr>
+              <a:t>Failed</a:t>
+            </a:r>
+          </a:p>
+        </p:txBody>
+      </p:sp>
+      <p:grpSp>
+        <p:nvGrpSpPr>
+          <p:cNvPr id="24" name="Group 24"/>
+          <p:cNvGrpSpPr/>
+          <p:nvPr/>
+        </p:nvGrpSpPr>
+        <p:grpSpPr>
+          <a:xfrm>
+            <a:off x="3610423" y="3055298"/>
+            <a:ext cx="411804" cy="411802"/>
+            <a:chOff x="0" y="0"/>
+            <a:chExt cx="549072" cy="549069"/>
+          </a:xfrm>
+        </p:grpSpPr>
+        <p:sp>
+          <p:nvSpPr>
+            <p:cNvPr id="25" name="Freeform 25"/>
+            <p:cNvSpPr/>
+            <p:nvPr/>
+          </p:nvSpPr>
+          <p:spPr>
+            <a:xfrm>
+              <a:off x="0" y="0"/>
+              <a:ext cx="549021" cy="549018"/>
+            </a:xfrm>
+            <a:custGeom>
+              <a:avLst/>
+              <a:gdLst/>
+              <a:ahLst/>
+              <a:cxnLst/>
+              <a:rect l="l" t="t" r="r" b="b"/>
+              <a:pathLst>
+                <a:path w="549021" h="549018">
+                  <a:moveTo>
+                    <a:pt x="0" y="274573"/>
+                  </a:moveTo>
+                  <a:cubicBezTo>
+                    <a:pt x="0" y="122935"/>
+                    <a:pt x="122936" y="0"/>
+                    <a:pt x="274574" y="0"/>
+                  </a:cubicBezTo>
+                  <a:cubicBezTo>
+                    <a:pt x="426212" y="0"/>
+                    <a:pt x="549021" y="122935"/>
+                    <a:pt x="549021" y="274573"/>
+                  </a:cubicBezTo>
+                  <a:cubicBezTo>
+                    <a:pt x="549021" y="426210"/>
+                    <a:pt x="426212" y="549018"/>
+                    <a:pt x="274574" y="549018"/>
+                  </a:cubicBezTo>
+                  <a:cubicBezTo>
+                    <a:pt x="122936" y="549018"/>
+                    <a:pt x="0" y="426210"/>
+                    <a:pt x="0" y="274573"/>
+                  </a:cubicBezTo>
+                  <a:close/>
+                </a:path>
+              </a:pathLst>
+            </a:custGeom>
+            <a:solidFill>
+              <a:srgbClr val="15803D"/>
+            </a:solidFill>
+          </p:spPr>
+        </p:sp>
+        <p:sp>
+          <p:nvSpPr>
+            <p:cNvPr id="26" name="TextBox 26"/>
+            <p:cNvSpPr txBox="1"/>
+            <p:nvPr/>
+          </p:nvSpPr>
+          <p:spPr>
+            <a:xfrm>
+              <a:off x="0" y="-19050"/>
+              <a:ext cx="549072" cy="568119"/>
+            </a:xfrm>
+            <a:prstGeom prst="rect">
+              <a:avLst/>
+            </a:prstGeom>
+          </p:spPr>
+          <p:txBody>
+            <a:bodyPr lIns="50800" tIns="50800" rIns="50800" bIns="50800" rtlCol="0" anchor="ctr"/>
+            <a:lstStyle/>
+            <a:p>
+              <a:pPr algn="ctr">
+                <a:lnSpc>
+                  <a:spcPts val="1441"/>
+                </a:lnSpc>
+              </a:pPr>
+              <a:r>
+                <a:rPr lang="en-US" sz="1200" b="1">
+                  <a:solidFill>
+                    <a:srgbClr val="FFFFFF"/>
+                  </a:solidFill>
+                  <a:latin typeface="Times New Roman Bold"/>
+                  <a:ea typeface="Times New Roman Bold"/>
+                  <a:cs typeface="Times New Roman Bold"/>
+                  <a:sym typeface="Times New Roman Bold"/>
+                </a:rPr>
+                <a:t>✓</a:t>
+              </a:r>
+            </a:p>
+          </p:txBody>
+        </p:sp>
+      </p:grpSp>
+      <p:sp>
+        <p:nvSpPr>
+          <p:cNvPr id="27" name="TextBox 27"/>
+          <p:cNvSpPr txBox="1"/>
+          <p:nvPr/>
+        </p:nvSpPr>
+        <p:spPr>
+          <a:xfrm>
+            <a:off x="3629473" y="3661594"/>
+            <a:ext cx="304800" cy="243656"/>
+          </a:xfrm>
+          <a:prstGeom prst="rect">
+            <a:avLst/>
+          </a:prstGeom>
+        </p:spPr>
+        <p:txBody>
+          <a:bodyPr lIns="0" tIns="0" rIns="0" bIns="0" rtlCol="0" anchor="t">
+            <a:spAutoFit/>
+          </a:bodyPr>
+          <a:lstStyle/>
+          <a:p>
+            <a:pPr algn="ctr">
+              <a:lnSpc>
+                <a:spcPts val="1919"/>
+              </a:lnSpc>
+            </a:pPr>
+            <a:r>
+              <a:rPr lang="en-US" b="1">
+                <a:solidFill>
+                  <a:srgbClr val="111827"/>
+                </a:solidFill>
+                <a:latin typeface="Times New Roman Bold"/>
+                <a:ea typeface="Times New Roman Bold"/>
+                <a:cs typeface="Times New Roman Bold"/>
+                <a:sym typeface="Times New Roman Bold"/>
+              </a:rPr>
+              <a:t>43</a:t>
+            </a:r>
+          </a:p>
+        </p:txBody>
+      </p:sp>
+      <p:sp>
+        <p:nvSpPr>
+          <p:cNvPr id="28" name="TextBox 28"/>
+          <p:cNvSpPr txBox="1"/>
+          <p:nvPr/>
+        </p:nvSpPr>
+        <p:spPr>
+          <a:xfrm>
+            <a:off x="3214402" y="3890404"/>
+            <a:ext cx="1235402" cy="243656"/>
+          </a:xfrm>
+          <a:prstGeom prst="rect">
+            <a:avLst/>
+          </a:prstGeom>
+        </p:spPr>
+        <p:txBody>
+          <a:bodyPr lIns="0" tIns="0" rIns="0" bIns="0" rtlCol="0" anchor="t">
+            <a:spAutoFit/>
+          </a:bodyPr>
+          <a:lstStyle/>
+          <a:p>
+            <a:pPr algn="ctr">
+              <a:lnSpc>
+                <a:spcPts val="1919"/>
+              </a:lnSpc>
+            </a:pPr>
+            <a:r>
+              <a:rPr lang="en-US" b="1" dirty="0">
+                <a:solidFill>
+                  <a:srgbClr val="4B5563"/>
+                </a:solidFill>
+                <a:latin typeface="Times New Roman Bold"/>
+                <a:ea typeface="Times New Roman Bold"/>
+                <a:cs typeface="Times New Roman Bold"/>
+                <a:sym typeface="Times New Roman Bold"/>
+              </a:rPr>
+              <a:t>N/A</a:t>
+            </a:r>
+          </a:p>
+        </p:txBody>
+      </p:sp>
+      <p:grpSp>
+        <p:nvGrpSpPr>
+          <p:cNvPr id="29" name="Group 29"/>
+          <p:cNvGrpSpPr/>
+          <p:nvPr/>
+        </p:nvGrpSpPr>
+        <p:grpSpPr>
+          <a:xfrm>
+            <a:off x="4680204" y="3055298"/>
+            <a:ext cx="411804" cy="411802"/>
+            <a:chOff x="0" y="0"/>
+            <a:chExt cx="549072" cy="549069"/>
+          </a:xfrm>
+        </p:grpSpPr>
+        <p:sp>
+          <p:nvSpPr>
+            <p:cNvPr id="30" name="Freeform 30"/>
+            <p:cNvSpPr/>
+            <p:nvPr/>
+          </p:nvSpPr>
+          <p:spPr>
+            <a:xfrm>
+              <a:off x="0" y="0"/>
+              <a:ext cx="549021" cy="549018"/>
+            </a:xfrm>
+            <a:custGeom>
+              <a:avLst/>
+              <a:gdLst/>
+              <a:ahLst/>
+              <a:cxnLst/>
+              <a:rect l="l" t="t" r="r" b="b"/>
+              <a:pathLst>
+                <a:path w="549021" h="549018">
+                  <a:moveTo>
+                    <a:pt x="0" y="274573"/>
+                  </a:moveTo>
+                  <a:cubicBezTo>
+                    <a:pt x="0" y="122935"/>
+                    <a:pt x="122936" y="0"/>
+                    <a:pt x="274574" y="0"/>
+                  </a:cubicBezTo>
+                  <a:cubicBezTo>
+                    <a:pt x="426212" y="0"/>
+                    <a:pt x="549021" y="122935"/>
+                    <a:pt x="549021" y="274573"/>
+                  </a:cubicBezTo>
+                  <a:cubicBezTo>
+                    <a:pt x="549021" y="426210"/>
+                    <a:pt x="426212" y="549018"/>
+                    <a:pt x="274574" y="549018"/>
+                  </a:cubicBezTo>
+                  <a:cubicBezTo>
+                    <a:pt x="122936" y="549018"/>
+                    <a:pt x="0" y="426210"/>
+                    <a:pt x="0" y="274573"/>
+                  </a:cubicBezTo>
+                  <a:close/>
+                </a:path>
+              </a:pathLst>
+            </a:custGeom>
+            <a:solidFill>
+              <a:srgbClr val="15803D"/>
+            </a:solidFill>
+          </p:spPr>
+        </p:sp>
+        <p:sp>
+          <p:nvSpPr>
+            <p:cNvPr id="31" name="TextBox 31"/>
+            <p:cNvSpPr txBox="1"/>
+            <p:nvPr/>
+          </p:nvSpPr>
+          <p:spPr>
+            <a:xfrm>
+              <a:off x="0" y="-19050"/>
+              <a:ext cx="549072" cy="568119"/>
+            </a:xfrm>
+            <a:prstGeom prst="rect">
+              <a:avLst/>
+            </a:prstGeom>
+          </p:spPr>
+          <p:txBody>
+            <a:bodyPr lIns="50800" tIns="50800" rIns="50800" bIns="50800" rtlCol="0" anchor="ctr"/>
+            <a:lstStyle/>
+            <a:p>
+              <a:pPr algn="ctr">
+                <a:lnSpc>
+                  <a:spcPts val="1441"/>
+                </a:lnSpc>
+              </a:pPr>
+              <a:r>
+                <a:rPr lang="en-US" sz="1200" b="1">
+                  <a:solidFill>
+                    <a:srgbClr val="FFFFFF"/>
+                  </a:solidFill>
+                  <a:latin typeface="Times New Roman Bold"/>
+                  <a:ea typeface="Times New Roman Bold"/>
+                  <a:cs typeface="Times New Roman Bold"/>
+                  <a:sym typeface="Times New Roman Bold"/>
+                </a:rPr>
+                <a:t>✓</a:t>
+              </a:r>
+            </a:p>
+          </p:txBody>
+        </p:sp>
+      </p:grpSp>
+      <p:sp>
+        <p:nvSpPr>
+          <p:cNvPr id="32" name="TextBox 32"/>
+          <p:cNvSpPr txBox="1"/>
+          <p:nvPr/>
+        </p:nvSpPr>
+        <p:spPr>
+          <a:xfrm>
+            <a:off x="4711008" y="3661594"/>
+            <a:ext cx="304800" cy="243656"/>
+          </a:xfrm>
+          <a:prstGeom prst="rect">
+            <a:avLst/>
+          </a:prstGeom>
+        </p:spPr>
+        <p:txBody>
+          <a:bodyPr lIns="0" tIns="0" rIns="0" bIns="0" rtlCol="0" anchor="t">
+            <a:spAutoFit/>
+          </a:bodyPr>
+          <a:lstStyle/>
+          <a:p>
+            <a:pPr algn="ctr">
+              <a:lnSpc>
+                <a:spcPts val="1919"/>
+              </a:lnSpc>
+            </a:pPr>
+            <a:r>
+              <a:rPr lang="en-US" b="1">
+                <a:solidFill>
+                  <a:srgbClr val="111827"/>
+                </a:solidFill>
+                <a:latin typeface="Times New Roman Bold"/>
+                <a:ea typeface="Times New Roman Bold"/>
+                <a:cs typeface="Times New Roman Bold"/>
+                <a:sym typeface="Times New Roman Bold"/>
+              </a:rPr>
+              <a:t>10</a:t>
+            </a:r>
+          </a:p>
+        </p:txBody>
+      </p:sp>
+      <p:sp>
+        <p:nvSpPr>
+          <p:cNvPr id="33" name="TextBox 33"/>
+          <p:cNvSpPr txBox="1"/>
+          <p:nvPr/>
+        </p:nvSpPr>
+        <p:spPr>
+          <a:xfrm>
+            <a:off x="4230910" y="3890404"/>
+            <a:ext cx="1235402" cy="243656"/>
+          </a:xfrm>
+          <a:prstGeom prst="rect">
+            <a:avLst/>
+          </a:prstGeom>
+        </p:spPr>
+        <p:txBody>
+          <a:bodyPr lIns="0" tIns="0" rIns="0" bIns="0" rtlCol="0" anchor="t">
+            <a:spAutoFit/>
+          </a:bodyPr>
+          <a:lstStyle/>
+          <a:p>
+            <a:pPr algn="ctr">
+              <a:lnSpc>
+                <a:spcPts val="1919"/>
+              </a:lnSpc>
+            </a:pPr>
+            <a:r>
+              <a:rPr lang="en-US" b="1" dirty="0">
+                <a:solidFill>
+                  <a:srgbClr val="4B5563"/>
+                </a:solidFill>
+                <a:latin typeface="Times New Roman Bold"/>
+                <a:ea typeface="Times New Roman Bold"/>
+                <a:cs typeface="Times New Roman Bold"/>
+                <a:sym typeface="Times New Roman Bold"/>
+              </a:rPr>
+              <a:t>Manual</a:t>
+            </a:r>
+          </a:p>
+        </p:txBody>
+      </p:sp>
+      <p:sp>
+        <p:nvSpPr>
+          <p:cNvPr id="34" name="TextBox 34"/>
+          <p:cNvSpPr txBox="1"/>
+          <p:nvPr/>
+        </p:nvSpPr>
+        <p:spPr>
+          <a:xfrm>
+            <a:off x="627230" y="4545330"/>
+            <a:ext cx="4776901" cy="1692771"/>
+          </a:xfrm>
+          <a:prstGeom prst="rect">
+            <a:avLst/>
+          </a:prstGeom>
+        </p:spPr>
+        <p:txBody>
+          <a:bodyPr wrap="square" lIns="0" tIns="0" rIns="0" bIns="0" rtlCol="0" anchor="t">
+            <a:spAutoFit/>
+          </a:bodyPr>
+          <a:lstStyle/>
+          <a:p>
+            <a:pPr algn="ctr"/>
+            <a:r>
+              <a:rPr lang="en-US" sz="2000" b="1" dirty="0">
+                <a:solidFill>
+                  <a:srgbClr val="15803D"/>
+                </a:solidFill>
+                <a:latin typeface="Times New Roman" panose="02020603050405020304" pitchFamily="18" charset="0"/>
+                <a:ea typeface="Times New Roman Bold"/>
+                <a:cs typeface="Times New Roman" panose="02020603050405020304" pitchFamily="18" charset="0"/>
+                <a:sym typeface="Times New Roman Bold"/>
+              </a:rPr>
+              <a:t>HIGHLIGHTS</a:t>
+            </a:r>
+          </a:p>
+          <a:p>
+            <a:pPr algn="l"/>
+            <a:r>
+              <a:rPr lang="en-US" dirty="0">
+                <a:solidFill>
+                  <a:srgbClr val="111827"/>
+                </a:solidFill>
+                <a:latin typeface="Times New Roman" panose="02020603050405020304" pitchFamily="18" charset="0"/>
+                <a:ea typeface="Times New Roman"/>
+                <a:cs typeface="Times New Roman" panose="02020603050405020304" pitchFamily="18" charset="0"/>
+                <a:sym typeface="Times New Roman"/>
+              </a:rPr>
+              <a:t>✓  All elements have sufficient color contrast</a:t>
+            </a:r>
+          </a:p>
+          <a:p>
+            <a:pPr algn="l"/>
+            <a:r>
+              <a:rPr lang="en-US" dirty="0">
+                <a:solidFill>
+                  <a:srgbClr val="111827"/>
+                </a:solidFill>
+                <a:latin typeface="Times New Roman" panose="02020603050405020304" pitchFamily="18" charset="0"/>
+                <a:ea typeface="Times New Roman"/>
+                <a:cs typeface="Times New Roman" panose="02020603050405020304" pitchFamily="18" charset="0"/>
+                <a:sym typeface="Times New Roman"/>
+              </a:rPr>
+              <a:t>✓  All images include appropriate alternative text</a:t>
+            </a:r>
+          </a:p>
+          <a:p>
+            <a:pPr algn="l"/>
+            <a:r>
+              <a:rPr lang="en-US" dirty="0">
+                <a:solidFill>
+                  <a:srgbClr val="111827"/>
+                </a:solidFill>
+                <a:latin typeface="Times New Roman" panose="02020603050405020304" pitchFamily="18" charset="0"/>
+                <a:ea typeface="Times New Roman"/>
+                <a:cs typeface="Times New Roman" panose="02020603050405020304" pitchFamily="18" charset="0"/>
+                <a:sym typeface="Times New Roman"/>
+              </a:rPr>
+              <a:t>✓  Semantic HTML structure and ARIA landmarks used</a:t>
+            </a:r>
+          </a:p>
+          <a:p>
+            <a:pPr algn="l"/>
+            <a:r>
+              <a:rPr lang="en-US" dirty="0">
+                <a:solidFill>
+                  <a:srgbClr val="111827"/>
+                </a:solidFill>
+                <a:latin typeface="Times New Roman" panose="02020603050405020304" pitchFamily="18" charset="0"/>
+                <a:ea typeface="Times New Roman"/>
+                <a:cs typeface="Times New Roman" panose="02020603050405020304" pitchFamily="18" charset="0"/>
+                <a:sym typeface="Times New Roman"/>
+              </a:rPr>
+              <a:t>✓  All interactive elements are keyboard accessible</a:t>
+            </a:r>
+          </a:p>
+        </p:txBody>
+      </p:sp>
+      <p:grpSp>
+        <p:nvGrpSpPr>
+          <p:cNvPr id="35" name="Group 35"/>
+          <p:cNvGrpSpPr/>
+          <p:nvPr/>
+        </p:nvGrpSpPr>
+        <p:grpSpPr>
+          <a:xfrm>
+            <a:off x="617696" y="6629048"/>
+            <a:ext cx="4686110" cy="648052"/>
+            <a:chOff x="0" y="37017"/>
+            <a:chExt cx="6248146" cy="532789"/>
+          </a:xfrm>
+        </p:grpSpPr>
+        <p:sp>
+          <p:nvSpPr>
+            <p:cNvPr id="36" name="Freeform 36"/>
+            <p:cNvSpPr/>
+            <p:nvPr/>
+          </p:nvSpPr>
+          <p:spPr>
+            <a:xfrm>
+              <a:off x="0" y="37017"/>
+              <a:ext cx="6248146" cy="532789"/>
+            </a:xfrm>
+            <a:custGeom>
+              <a:avLst/>
+              <a:gdLst/>
+              <a:ahLst/>
+              <a:cxnLst/>
+              <a:rect l="l" t="t" r="r" b="b"/>
+              <a:pathLst>
+                <a:path w="6248146" h="720852">
+                  <a:moveTo>
+                    <a:pt x="0" y="108077"/>
+                  </a:moveTo>
+                  <a:cubicBezTo>
+                    <a:pt x="0" y="48387"/>
+                    <a:pt x="48387" y="0"/>
+                    <a:pt x="108077" y="0"/>
+                  </a:cubicBezTo>
+                  <a:lnTo>
+                    <a:pt x="6140069" y="0"/>
+                  </a:lnTo>
+                  <a:cubicBezTo>
+                    <a:pt x="6199759" y="0"/>
+                    <a:pt x="6248146" y="48387"/>
+                    <a:pt x="6248146" y="108077"/>
+                  </a:cubicBezTo>
+                  <a:lnTo>
+                    <a:pt x="6248146" y="612775"/>
+                  </a:lnTo>
+                  <a:cubicBezTo>
+                    <a:pt x="6248146" y="672465"/>
+                    <a:pt x="6199759" y="720852"/>
+                    <a:pt x="6140069" y="720852"/>
+                  </a:cubicBezTo>
+                  <a:lnTo>
+                    <a:pt x="108077" y="720852"/>
+                  </a:lnTo>
+                  <a:cubicBezTo>
+                    <a:pt x="48387" y="720852"/>
+                    <a:pt x="0" y="672465"/>
+                    <a:pt x="0" y="612775"/>
+                  </a:cubicBezTo>
+                  <a:close/>
+                </a:path>
+              </a:pathLst>
+            </a:custGeom>
+            <a:solidFill>
+              <a:srgbClr val="F9FAFB"/>
+            </a:solidFill>
+            <a:ln w="19065" cap="sq">
+              <a:solidFill>
+                <a:srgbClr val="15803D"/>
+              </a:solidFill>
+              <a:prstDash val="solid"/>
+              <a:miter/>
+            </a:ln>
+          </p:spPr>
+        </p:sp>
+      </p:grpSp>
+      <p:sp>
+        <p:nvSpPr>
+          <p:cNvPr id="37" name="TextBox 37"/>
+          <p:cNvSpPr txBox="1"/>
+          <p:nvPr/>
+        </p:nvSpPr>
+        <p:spPr>
+          <a:xfrm>
+            <a:off x="866940" y="6842571"/>
+            <a:ext cx="297551" cy="282129"/>
+          </a:xfrm>
+          <a:prstGeom prst="rect">
+            <a:avLst/>
+          </a:prstGeom>
+        </p:spPr>
+        <p:txBody>
+          <a:bodyPr lIns="0" tIns="0" rIns="0" bIns="0" rtlCol="0" anchor="t">
+            <a:spAutoFit/>
+          </a:bodyPr>
+          <a:lstStyle/>
+          <a:p>
+            <a:pPr algn="ctr">
+              <a:lnSpc>
+                <a:spcPts val="2161"/>
+              </a:lnSpc>
+            </a:pPr>
+            <a:r>
+              <a:rPr lang="en-US" sz="2400" dirty="0">
+                <a:solidFill>
+                  <a:srgbClr val="15803D"/>
+                </a:solidFill>
+                <a:latin typeface="Times New Roman" panose="02020603050405020304" pitchFamily="18" charset="0"/>
+                <a:ea typeface="Times New Roman"/>
+                <a:cs typeface="Times New Roman" panose="02020603050405020304" pitchFamily="18" charset="0"/>
+                <a:sym typeface="Times New Roman"/>
+              </a:rPr>
+              <a:t>🛡️</a:t>
+            </a:r>
+          </a:p>
+        </p:txBody>
+      </p:sp>
+      <p:sp>
+        <p:nvSpPr>
+          <p:cNvPr id="38" name="TextBox 38"/>
+          <p:cNvSpPr txBox="1"/>
+          <p:nvPr/>
+        </p:nvSpPr>
+        <p:spPr>
+          <a:xfrm>
+            <a:off x="1267739" y="6743700"/>
+            <a:ext cx="3866502" cy="495300"/>
+          </a:xfrm>
+          <a:prstGeom prst="rect">
+            <a:avLst/>
+          </a:prstGeom>
+        </p:spPr>
+        <p:txBody>
+          <a:bodyPr lIns="0" tIns="0" rIns="0" bIns="0" rtlCol="0" anchor="t">
+            <a:spAutoFit/>
+          </a:bodyPr>
+          <a:lstStyle/>
+          <a:p>
+            <a:pPr algn="l">
+              <a:lnSpc>
+                <a:spcPts val="1919"/>
+              </a:lnSpc>
+            </a:pPr>
+            <a:r>
+              <a:rPr lang="en-US" b="1" dirty="0">
+                <a:solidFill>
+                  <a:srgbClr val="15803D"/>
+                </a:solidFill>
+                <a:latin typeface="Times New Roman" panose="02020603050405020304" pitchFamily="18" charset="0"/>
+                <a:ea typeface="Times New Roman Bold"/>
+                <a:cs typeface="Times New Roman" panose="02020603050405020304" pitchFamily="18" charset="0"/>
+                <a:sym typeface="Times New Roman Bold"/>
+              </a:rPr>
+              <a:t>WCAG 2.1 LEVEL AA Compliance Achieved</a:t>
+            </a:r>
+          </a:p>
+        </p:txBody>
+      </p:sp>
+      <p:grpSp>
+        <p:nvGrpSpPr>
+          <p:cNvPr id="39" name="Group 39"/>
+          <p:cNvGrpSpPr/>
+          <p:nvPr/>
+        </p:nvGrpSpPr>
+        <p:grpSpPr>
+          <a:xfrm>
+            <a:off x="5740928" y="179263"/>
+            <a:ext cx="5122194" cy="7478837"/>
+            <a:chOff x="0" y="0"/>
+            <a:chExt cx="6675203" cy="8758524"/>
+          </a:xfrm>
+        </p:grpSpPr>
+        <p:sp>
+          <p:nvSpPr>
+            <p:cNvPr id="40" name="Freeform 40"/>
+            <p:cNvSpPr/>
+            <p:nvPr/>
+          </p:nvSpPr>
+          <p:spPr>
+            <a:xfrm>
+              <a:off x="0" y="0"/>
+              <a:ext cx="6675203" cy="8758524"/>
+            </a:xfrm>
+            <a:custGeom>
+              <a:avLst/>
+              <a:gdLst/>
+              <a:ahLst/>
+              <a:cxnLst/>
+              <a:rect l="l" t="t" r="r" b="b"/>
+              <a:pathLst>
+                <a:path w="6818148" h="8758524">
+                  <a:moveTo>
+                    <a:pt x="0" y="254574"/>
+                  </a:moveTo>
+                  <a:cubicBezTo>
+                    <a:pt x="0" y="113935"/>
+                    <a:pt x="122066" y="0"/>
+                    <a:pt x="272741" y="0"/>
+                  </a:cubicBezTo>
+                  <a:lnTo>
+                    <a:pt x="6545407" y="0"/>
+                  </a:lnTo>
+                  <a:cubicBezTo>
+                    <a:pt x="6696081" y="0"/>
+                    <a:pt x="6818148" y="113935"/>
+                    <a:pt x="6818148" y="254574"/>
+                  </a:cubicBezTo>
+                  <a:lnTo>
+                    <a:pt x="6818148" y="8503947"/>
+                  </a:lnTo>
+                  <a:cubicBezTo>
+                    <a:pt x="6818148" y="8644586"/>
+                    <a:pt x="6696081" y="8758524"/>
+                    <a:pt x="6545407" y="8758524"/>
+                  </a:cubicBezTo>
+                  <a:lnTo>
+                    <a:pt x="272741" y="8758524"/>
+                  </a:lnTo>
+                  <a:cubicBezTo>
+                    <a:pt x="122066" y="8758523"/>
+                    <a:pt x="0" y="8644467"/>
+                    <a:pt x="0" y="8503947"/>
+                  </a:cubicBezTo>
+                  <a:close/>
+                </a:path>
+              </a:pathLst>
+            </a:custGeom>
+            <a:solidFill>
+              <a:srgbClr val="FFFFFF"/>
+            </a:solidFill>
+            <a:ln w="28597" cap="sq">
+              <a:solidFill>
+                <a:srgbClr val="1E40AF"/>
+              </a:solidFill>
+              <a:prstDash val="solid"/>
+              <a:miter/>
+            </a:ln>
+          </p:spPr>
+        </p:sp>
+      </p:grpSp>
+      <p:grpSp>
+        <p:nvGrpSpPr>
+          <p:cNvPr id="41" name="Group 41"/>
+          <p:cNvGrpSpPr/>
+          <p:nvPr/>
+        </p:nvGrpSpPr>
+        <p:grpSpPr>
+          <a:xfrm>
+            <a:off x="5716747" y="88656"/>
+            <a:ext cx="5156150" cy="960872"/>
+            <a:chOff x="0" y="0"/>
+            <a:chExt cx="6771856" cy="1281163"/>
+          </a:xfrm>
+        </p:grpSpPr>
+        <p:sp>
+          <p:nvSpPr>
+            <p:cNvPr id="42" name="Freeform 42"/>
+            <p:cNvSpPr/>
+            <p:nvPr/>
+          </p:nvSpPr>
+          <p:spPr>
+            <a:xfrm>
+              <a:off x="0" y="0"/>
+              <a:ext cx="6771894" cy="1281176"/>
+            </a:xfrm>
+            <a:custGeom>
+              <a:avLst/>
+              <a:gdLst/>
+              <a:ahLst/>
+              <a:cxnLst/>
+              <a:rect l="l" t="t" r="r" b="b"/>
+              <a:pathLst>
+                <a:path w="6771894" h="1281176">
+                  <a:moveTo>
+                    <a:pt x="0" y="0"/>
+                  </a:moveTo>
+                  <a:lnTo>
+                    <a:pt x="6771894" y="0"/>
+                  </a:lnTo>
+                  <a:lnTo>
+                    <a:pt x="6771894" y="1281176"/>
+                  </a:lnTo>
+                  <a:lnTo>
+                    <a:pt x="0" y="1281176"/>
+                  </a:lnTo>
+                  <a:close/>
+                </a:path>
+              </a:pathLst>
+            </a:custGeom>
+            <a:solidFill>
+              <a:srgbClr val="004B9E"/>
+            </a:solidFill>
+            <a:ln>
+              <a:noFill/>
+            </a:ln>
+          </p:spPr>
+          <p:style>
+            <a:lnRef idx="1">
+              <a:schemeClr val="accent1"/>
+            </a:lnRef>
+            <a:fillRef idx="3">
+              <a:schemeClr val="accent1"/>
+            </a:fillRef>
+            <a:effectRef idx="2">
+              <a:schemeClr val="accent1"/>
+            </a:effectRef>
+            <a:fontRef idx="minor">
+              <a:schemeClr val="lt1"/>
+            </a:fontRef>
+          </p:style>
+        </p:sp>
+      </p:grpSp>
+      <p:sp>
+        <p:nvSpPr>
+          <p:cNvPr id="43" name="TextBox 43"/>
+          <p:cNvSpPr txBox="1"/>
+          <p:nvPr/>
+        </p:nvSpPr>
+        <p:spPr>
+          <a:xfrm>
+            <a:off x="5772355" y="320916"/>
+            <a:ext cx="4982804" cy="564257"/>
+          </a:xfrm>
+          <a:prstGeom prst="rect">
+            <a:avLst/>
+          </a:prstGeom>
+        </p:spPr>
+        <p:txBody>
+          <a:bodyPr lIns="0" tIns="0" rIns="0" bIns="0" rtlCol="0" anchor="t">
+            <a:spAutoFit/>
+          </a:bodyPr>
+          <a:lstStyle/>
+          <a:p>
+            <a:pPr algn="ctr">
+              <a:lnSpc>
+                <a:spcPts val="2160"/>
+              </a:lnSpc>
+            </a:pPr>
+            <a:r>
+              <a:rPr lang="en-US" sz="2000" b="1" dirty="0">
+                <a:solidFill>
+                  <a:srgbClr val="FFFFFF"/>
+                </a:solidFill>
+                <a:latin typeface="Times New Roman Bold"/>
+                <a:ea typeface="Times New Roman Bold"/>
+                <a:cs typeface="Times New Roman Bold"/>
+                <a:sym typeface="Times New Roman Bold"/>
+              </a:rPr>
+              <a:t>2. WAVE (Web Accessibility</a:t>
+            </a:r>
+          </a:p>
+          <a:p>
+            <a:pPr algn="ctr">
+              <a:lnSpc>
+                <a:spcPts val="2160"/>
+              </a:lnSpc>
+            </a:pPr>
+            <a:r>
+              <a:rPr lang="en-US" sz="2000" dirty="0">
+                <a:solidFill>
+                  <a:srgbClr val="FFFFFF"/>
+                </a:solidFill>
+                <a:latin typeface="Times New Roman"/>
+                <a:ea typeface="Times New Roman"/>
+                <a:cs typeface="Times New Roman"/>
+                <a:sym typeface="Times New Roman"/>
+              </a:rPr>
+              <a:t>Evaluation Tool)</a:t>
+            </a:r>
+          </a:p>
+        </p:txBody>
+      </p:sp>
+      <p:grpSp>
+        <p:nvGrpSpPr>
+          <p:cNvPr id="44" name="Group 44"/>
+          <p:cNvGrpSpPr/>
+          <p:nvPr/>
+        </p:nvGrpSpPr>
+        <p:grpSpPr>
+          <a:xfrm>
+            <a:off x="5969098" y="1302463"/>
+            <a:ext cx="1073751" cy="1073754"/>
+            <a:chOff x="0" y="0"/>
+            <a:chExt cx="1827682" cy="1827688"/>
+          </a:xfrm>
+        </p:grpSpPr>
+        <p:sp>
+          <p:nvSpPr>
+            <p:cNvPr id="45" name="Freeform 45"/>
+            <p:cNvSpPr/>
+            <p:nvPr/>
+          </p:nvSpPr>
+          <p:spPr>
+            <a:xfrm>
+              <a:off x="0" y="0"/>
+              <a:ext cx="1827784" cy="1827789"/>
+            </a:xfrm>
+            <a:custGeom>
+              <a:avLst/>
+              <a:gdLst/>
+              <a:ahLst/>
+              <a:cxnLst/>
+              <a:rect l="l" t="t" r="r" b="b"/>
+              <a:pathLst>
+                <a:path w="1827784" h="1827789">
+                  <a:moveTo>
+                    <a:pt x="0" y="913895"/>
+                  </a:moveTo>
+                  <a:cubicBezTo>
+                    <a:pt x="0" y="409195"/>
+                    <a:pt x="409194" y="0"/>
+                    <a:pt x="913892" y="0"/>
+                  </a:cubicBezTo>
+                  <a:cubicBezTo>
+                    <a:pt x="1418590" y="0"/>
+                    <a:pt x="1827784" y="409195"/>
+                    <a:pt x="1827784" y="913895"/>
+                  </a:cubicBezTo>
+                  <a:cubicBezTo>
+                    <a:pt x="1827784" y="1418594"/>
+                    <a:pt x="1418590" y="1827789"/>
+                    <a:pt x="913892" y="1827789"/>
+                  </a:cubicBezTo>
+                  <a:cubicBezTo>
+                    <a:pt x="409194" y="1827789"/>
+                    <a:pt x="0" y="1418594"/>
+                    <a:pt x="0" y="913895"/>
+                  </a:cubicBezTo>
+                  <a:close/>
+                </a:path>
+              </a:pathLst>
+            </a:custGeom>
+            <a:solidFill>
+              <a:srgbClr val="FFFFFF"/>
+            </a:solidFill>
+            <a:ln w="66727" cap="sq">
+              <a:solidFill>
+                <a:srgbClr val="1E40AF"/>
+              </a:solidFill>
+              <a:prstDash val="solid"/>
+              <a:miter/>
+            </a:ln>
+          </p:spPr>
+        </p:sp>
+        <p:sp>
+          <p:nvSpPr>
+            <p:cNvPr id="46" name="TextBox 46"/>
+            <p:cNvSpPr txBox="1"/>
+            <p:nvPr/>
+          </p:nvSpPr>
+          <p:spPr>
+            <a:xfrm>
+              <a:off x="0" y="-19050"/>
+              <a:ext cx="1827682" cy="1846738"/>
+            </a:xfrm>
+            <a:prstGeom prst="rect">
+              <a:avLst/>
+            </a:prstGeom>
+          </p:spPr>
+          <p:txBody>
+            <a:bodyPr lIns="50800" tIns="50800" rIns="50800" bIns="50800" rtlCol="0" anchor="ctr"/>
+            <a:lstStyle/>
+            <a:p>
+              <a:pPr algn="ctr">
+                <a:lnSpc>
+                  <a:spcPts val="1981"/>
+                </a:lnSpc>
+              </a:pPr>
+              <a:r>
+                <a:rPr lang="en-US" b="1" dirty="0">
+                  <a:solidFill>
+                    <a:srgbClr val="111827"/>
+                  </a:solidFill>
+                  <a:latin typeface="Times New Roman Bold"/>
+                  <a:ea typeface="Times New Roman Bold"/>
+                  <a:cs typeface="Times New Roman Bold"/>
+                  <a:sym typeface="Times New Roman Bold"/>
+                </a:rPr>
+                <a:t>0 Errors</a:t>
+              </a:r>
+            </a:p>
+          </p:txBody>
+        </p:sp>
+      </p:grpSp>
+      <p:sp>
+        <p:nvSpPr>
+          <p:cNvPr id="47" name="TextBox 47"/>
+          <p:cNvSpPr txBox="1"/>
+          <p:nvPr/>
+        </p:nvSpPr>
+        <p:spPr>
+          <a:xfrm>
+            <a:off x="7512396" y="1601215"/>
+            <a:ext cx="3225784" cy="495300"/>
+          </a:xfrm>
+          <a:prstGeom prst="rect">
+            <a:avLst/>
+          </a:prstGeom>
+        </p:spPr>
+        <p:txBody>
+          <a:bodyPr lIns="0" tIns="0" rIns="0" bIns="0" rtlCol="0" anchor="t">
+            <a:spAutoFit/>
+          </a:bodyPr>
+          <a:lstStyle/>
+          <a:p>
+            <a:pPr algn="l">
+              <a:lnSpc>
+                <a:spcPts val="1919"/>
+              </a:lnSpc>
+            </a:pPr>
+            <a:r>
+              <a:rPr lang="en-US" b="1" dirty="0">
+                <a:solidFill>
+                  <a:srgbClr val="4B5563"/>
+                </a:solidFill>
+                <a:latin typeface="Times New Roman Bold"/>
+                <a:ea typeface="Times New Roman Bold"/>
+                <a:cs typeface="Times New Roman Bold"/>
+                <a:sym typeface="Times New Roman Bold"/>
+              </a:rPr>
+              <a:t>Overall Result</a:t>
+            </a:r>
+          </a:p>
+          <a:p>
+            <a:pPr algn="l">
+              <a:lnSpc>
+                <a:spcPts val="1919"/>
+              </a:lnSpc>
+            </a:pPr>
+            <a:r>
+              <a:rPr lang="en-US" b="1" dirty="0">
+                <a:solidFill>
+                  <a:srgbClr val="1E40AF"/>
+                </a:solidFill>
+                <a:latin typeface="Times New Roman Bold"/>
+                <a:ea typeface="Times New Roman Bold"/>
+                <a:cs typeface="Times New Roman Bold"/>
+                <a:sym typeface="Times New Roman Bold"/>
+              </a:rPr>
+              <a:t>No accessibility errors identified</a:t>
+            </a:r>
+          </a:p>
+        </p:txBody>
+      </p:sp>
+      <p:grpSp>
+        <p:nvGrpSpPr>
+          <p:cNvPr id="48" name="Group 48"/>
+          <p:cNvGrpSpPr/>
+          <p:nvPr/>
+        </p:nvGrpSpPr>
+        <p:grpSpPr>
+          <a:xfrm>
+            <a:off x="5815917" y="2627615"/>
+            <a:ext cx="4745826" cy="1635204"/>
+            <a:chOff x="0" y="-93241"/>
+            <a:chExt cx="6878898" cy="2223412"/>
+          </a:xfrm>
+        </p:grpSpPr>
+        <p:sp>
+          <p:nvSpPr>
+            <p:cNvPr id="49" name="Freeform 49"/>
+            <p:cNvSpPr/>
+            <p:nvPr/>
+          </p:nvSpPr>
+          <p:spPr>
+            <a:xfrm>
+              <a:off x="0" y="-93241"/>
+              <a:ext cx="6878898" cy="2223412"/>
+            </a:xfrm>
+            <a:custGeom>
+              <a:avLst/>
+              <a:gdLst/>
+              <a:ahLst/>
+              <a:cxnLst/>
+              <a:rect l="l" t="t" r="r" b="b"/>
+              <a:pathLst>
+                <a:path w="6878899" h="2130171">
+                  <a:moveTo>
+                    <a:pt x="0" y="106553"/>
+                  </a:moveTo>
+                  <a:cubicBezTo>
+                    <a:pt x="0" y="47625"/>
+                    <a:pt x="52432" y="0"/>
+                    <a:pt x="117307" y="0"/>
+                  </a:cubicBezTo>
+                  <a:lnTo>
+                    <a:pt x="6761600" y="0"/>
+                  </a:lnTo>
+                  <a:cubicBezTo>
+                    <a:pt x="6826335" y="0"/>
+                    <a:pt x="6878899" y="47625"/>
+                    <a:pt x="6878899" y="106553"/>
+                  </a:cubicBezTo>
+                  <a:lnTo>
+                    <a:pt x="6878899" y="2023618"/>
+                  </a:lnTo>
+                  <a:cubicBezTo>
+                    <a:pt x="6878899" y="2082419"/>
+                    <a:pt x="6826476" y="2130171"/>
+                    <a:pt x="6761600" y="2130171"/>
+                  </a:cubicBezTo>
+                  <a:lnTo>
+                    <a:pt x="117307" y="2130171"/>
+                  </a:lnTo>
+                  <a:cubicBezTo>
+                    <a:pt x="52572" y="2130171"/>
+                    <a:pt x="0" y="2082546"/>
+                    <a:pt x="0" y="2023618"/>
+                  </a:cubicBezTo>
+                  <a:close/>
+                </a:path>
+              </a:pathLst>
+            </a:custGeom>
+            <a:solidFill>
+              <a:srgbClr val="F9FAFB"/>
+            </a:solidFill>
+            <a:ln w="19065" cap="sq">
+              <a:solidFill>
+                <a:srgbClr val="E5E7EB"/>
+              </a:solidFill>
+              <a:prstDash val="solid"/>
+              <a:miter/>
+            </a:ln>
+          </p:spPr>
+        </p:sp>
+      </p:grpSp>
+      <p:sp>
+        <p:nvSpPr>
+          <p:cNvPr id="50" name="TextBox 50"/>
+          <p:cNvSpPr txBox="1"/>
+          <p:nvPr/>
+        </p:nvSpPr>
+        <p:spPr>
+          <a:xfrm>
+            <a:off x="7610734" y="2690044"/>
+            <a:ext cx="1533266" cy="243656"/>
+          </a:xfrm>
+          <a:prstGeom prst="rect">
+            <a:avLst/>
+          </a:prstGeom>
+        </p:spPr>
+        <p:txBody>
+          <a:bodyPr wrap="square" lIns="0" tIns="0" rIns="0" bIns="0" rtlCol="0" anchor="t">
+            <a:spAutoFit/>
+          </a:bodyPr>
+          <a:lstStyle/>
+          <a:p>
+            <a:pPr algn="ctr">
+              <a:lnSpc>
+                <a:spcPts val="1919"/>
+              </a:lnSpc>
+            </a:pPr>
+            <a:r>
+              <a:rPr lang="en-US" b="1" dirty="0">
+                <a:solidFill>
+                  <a:srgbClr val="1E40AF"/>
+                </a:solidFill>
+                <a:latin typeface="Times New Roman Bold"/>
+                <a:ea typeface="Times New Roman Bold"/>
+                <a:cs typeface="Times New Roman Bold"/>
+                <a:sym typeface="Times New Roman Bold"/>
+              </a:rPr>
+              <a:t>KEY CHECKS</a:t>
+            </a:r>
+          </a:p>
+        </p:txBody>
+      </p:sp>
+      <p:grpSp>
+        <p:nvGrpSpPr>
+          <p:cNvPr id="51" name="Group 51"/>
+          <p:cNvGrpSpPr/>
+          <p:nvPr/>
+        </p:nvGrpSpPr>
+        <p:grpSpPr>
+          <a:xfrm>
+            <a:off x="6227721" y="3046278"/>
+            <a:ext cx="411804" cy="411802"/>
+            <a:chOff x="0" y="0"/>
+            <a:chExt cx="549072" cy="549069"/>
+          </a:xfrm>
+        </p:grpSpPr>
+        <p:sp>
+          <p:nvSpPr>
+            <p:cNvPr id="52" name="Freeform 52"/>
+            <p:cNvSpPr/>
+            <p:nvPr/>
+          </p:nvSpPr>
+          <p:spPr>
+            <a:xfrm>
+              <a:off x="0" y="0"/>
+              <a:ext cx="549021" cy="549018"/>
+            </a:xfrm>
+            <a:custGeom>
+              <a:avLst/>
+              <a:gdLst/>
+              <a:ahLst/>
+              <a:cxnLst/>
+              <a:rect l="l" t="t" r="r" b="b"/>
+              <a:pathLst>
+                <a:path w="549021" h="549018">
+                  <a:moveTo>
+                    <a:pt x="0" y="274573"/>
+                  </a:moveTo>
+                  <a:cubicBezTo>
+                    <a:pt x="0" y="122935"/>
+                    <a:pt x="122936" y="0"/>
+                    <a:pt x="274574" y="0"/>
+                  </a:cubicBezTo>
+                  <a:cubicBezTo>
+                    <a:pt x="426212" y="0"/>
+                    <a:pt x="549021" y="122935"/>
+                    <a:pt x="549021" y="274573"/>
+                  </a:cubicBezTo>
+                  <a:cubicBezTo>
+                    <a:pt x="549021" y="426210"/>
+                    <a:pt x="426212" y="549018"/>
+                    <a:pt x="274574" y="549018"/>
+                  </a:cubicBezTo>
+                  <a:cubicBezTo>
+                    <a:pt x="122936" y="549018"/>
+                    <a:pt x="0" y="426210"/>
+                    <a:pt x="0" y="274573"/>
+                  </a:cubicBezTo>
+                  <a:close/>
+                </a:path>
+              </a:pathLst>
+            </a:custGeom>
+            <a:solidFill>
+              <a:srgbClr val="1E40AF"/>
+            </a:solidFill>
+          </p:spPr>
+        </p:sp>
+        <p:sp>
+          <p:nvSpPr>
+            <p:cNvPr id="53" name="TextBox 53"/>
+            <p:cNvSpPr txBox="1"/>
+            <p:nvPr/>
+          </p:nvSpPr>
+          <p:spPr>
+            <a:xfrm>
+              <a:off x="0" y="-19050"/>
+              <a:ext cx="549072" cy="568119"/>
+            </a:xfrm>
+            <a:prstGeom prst="rect">
+              <a:avLst/>
+            </a:prstGeom>
+          </p:spPr>
+          <p:txBody>
+            <a:bodyPr lIns="50800" tIns="50800" rIns="50800" bIns="50800" rtlCol="0" anchor="ctr"/>
+            <a:lstStyle/>
+            <a:p>
+              <a:pPr algn="ctr">
+                <a:lnSpc>
+                  <a:spcPts val="1919"/>
+                </a:lnSpc>
+              </a:pPr>
+              <a:r>
+                <a:rPr lang="en-US" b="1" dirty="0">
+                  <a:solidFill>
+                    <a:srgbClr val="FFFFFF"/>
+                  </a:solidFill>
+                  <a:latin typeface="Times New Roman Bold"/>
+                  <a:ea typeface="Times New Roman Bold"/>
+                  <a:cs typeface="Times New Roman Bold"/>
+                  <a:sym typeface="Times New Roman Bold"/>
+                </a:rPr>
+                <a:t>✓</a:t>
+              </a:r>
+            </a:p>
+          </p:txBody>
+        </p:sp>
+      </p:grpSp>
+      <p:sp>
+        <p:nvSpPr>
+          <p:cNvPr id="54" name="TextBox 54"/>
+          <p:cNvSpPr txBox="1"/>
+          <p:nvPr/>
+        </p:nvSpPr>
+        <p:spPr>
+          <a:xfrm>
+            <a:off x="6382798" y="3656567"/>
+            <a:ext cx="101650" cy="243656"/>
+          </a:xfrm>
+          <a:prstGeom prst="rect">
+            <a:avLst/>
+          </a:prstGeom>
+        </p:spPr>
+        <p:txBody>
+          <a:bodyPr lIns="0" tIns="0" rIns="0" bIns="0" rtlCol="0" anchor="t">
+            <a:spAutoFit/>
+          </a:bodyPr>
+          <a:lstStyle/>
+          <a:p>
+            <a:pPr algn="ctr">
+              <a:lnSpc>
+                <a:spcPts val="1919"/>
+              </a:lnSpc>
+            </a:pPr>
+            <a:r>
+              <a:rPr lang="en-US" b="1">
+                <a:solidFill>
+                  <a:srgbClr val="111827"/>
+                </a:solidFill>
+                <a:latin typeface="Times New Roman Bold"/>
+                <a:ea typeface="Times New Roman Bold"/>
+                <a:cs typeface="Times New Roman Bold"/>
+                <a:sym typeface="Times New Roman Bold"/>
+              </a:rPr>
+              <a:t>0</a:t>
+            </a:r>
+          </a:p>
+        </p:txBody>
+      </p:sp>
+      <p:sp>
+        <p:nvSpPr>
+          <p:cNvPr id="55" name="TextBox 55"/>
+          <p:cNvSpPr txBox="1"/>
+          <p:nvPr/>
+        </p:nvSpPr>
+        <p:spPr>
+          <a:xfrm>
+            <a:off x="5815917" y="3894397"/>
+            <a:ext cx="1235402" cy="243656"/>
+          </a:xfrm>
+          <a:prstGeom prst="rect">
+            <a:avLst/>
+          </a:prstGeom>
+        </p:spPr>
+        <p:txBody>
+          <a:bodyPr lIns="0" tIns="0" rIns="0" bIns="0" rtlCol="0" anchor="t">
+            <a:spAutoFit/>
+          </a:bodyPr>
+          <a:lstStyle/>
+          <a:p>
+            <a:pPr algn="ctr">
+              <a:lnSpc>
+                <a:spcPts val="1919"/>
+              </a:lnSpc>
+            </a:pPr>
+            <a:r>
+              <a:rPr lang="en-US" b="1" dirty="0">
+                <a:solidFill>
+                  <a:srgbClr val="4B5563"/>
+                </a:solidFill>
+                <a:latin typeface="Times New Roman Bold"/>
+                <a:ea typeface="Times New Roman Bold"/>
+                <a:cs typeface="Times New Roman Bold"/>
+                <a:sym typeface="Times New Roman Bold"/>
+              </a:rPr>
+              <a:t>Errors</a:t>
+            </a:r>
+          </a:p>
+        </p:txBody>
+      </p:sp>
+      <p:grpSp>
+        <p:nvGrpSpPr>
+          <p:cNvPr id="56" name="Group 56"/>
+          <p:cNvGrpSpPr/>
+          <p:nvPr/>
+        </p:nvGrpSpPr>
+        <p:grpSpPr>
+          <a:xfrm>
+            <a:off x="7325858" y="3046278"/>
+            <a:ext cx="411804" cy="411802"/>
+            <a:chOff x="0" y="0"/>
+            <a:chExt cx="549072" cy="549069"/>
+          </a:xfrm>
+        </p:grpSpPr>
+        <p:sp>
+          <p:nvSpPr>
+            <p:cNvPr id="57" name="Freeform 57"/>
+            <p:cNvSpPr/>
+            <p:nvPr/>
+          </p:nvSpPr>
+          <p:spPr>
+            <a:xfrm>
+              <a:off x="0" y="0"/>
+              <a:ext cx="549021" cy="549018"/>
+            </a:xfrm>
+            <a:custGeom>
+              <a:avLst/>
+              <a:gdLst/>
+              <a:ahLst/>
+              <a:cxnLst/>
+              <a:rect l="l" t="t" r="r" b="b"/>
+              <a:pathLst>
+                <a:path w="549021" h="549018">
+                  <a:moveTo>
+                    <a:pt x="0" y="274573"/>
+                  </a:moveTo>
+                  <a:cubicBezTo>
+                    <a:pt x="0" y="122935"/>
+                    <a:pt x="122936" y="0"/>
+                    <a:pt x="274574" y="0"/>
+                  </a:cubicBezTo>
+                  <a:cubicBezTo>
+                    <a:pt x="426212" y="0"/>
+                    <a:pt x="549021" y="122935"/>
+                    <a:pt x="549021" y="274573"/>
+                  </a:cubicBezTo>
+                  <a:cubicBezTo>
+                    <a:pt x="549021" y="426210"/>
+                    <a:pt x="426212" y="549018"/>
+                    <a:pt x="274574" y="549018"/>
+                  </a:cubicBezTo>
+                  <a:cubicBezTo>
+                    <a:pt x="122936" y="549018"/>
+                    <a:pt x="0" y="426210"/>
+                    <a:pt x="0" y="274573"/>
+                  </a:cubicBezTo>
+                  <a:close/>
+                </a:path>
+              </a:pathLst>
+            </a:custGeom>
+            <a:solidFill>
+              <a:srgbClr val="1E40AF"/>
+            </a:solidFill>
+          </p:spPr>
+        </p:sp>
+        <p:sp>
+          <p:nvSpPr>
+            <p:cNvPr id="58" name="TextBox 58"/>
+            <p:cNvSpPr txBox="1"/>
+            <p:nvPr/>
+          </p:nvSpPr>
+          <p:spPr>
+            <a:xfrm>
+              <a:off x="0" y="-19050"/>
+              <a:ext cx="549072" cy="568119"/>
+            </a:xfrm>
+            <a:prstGeom prst="rect">
+              <a:avLst/>
+            </a:prstGeom>
+          </p:spPr>
+          <p:txBody>
+            <a:bodyPr lIns="50800" tIns="50800" rIns="50800" bIns="50800" rtlCol="0" anchor="ctr"/>
+            <a:lstStyle/>
+            <a:p>
+              <a:pPr algn="ctr">
+                <a:lnSpc>
+                  <a:spcPts val="1919"/>
+                </a:lnSpc>
+              </a:pPr>
+              <a:r>
+                <a:rPr lang="en-US" b="1">
+                  <a:solidFill>
+                    <a:srgbClr val="FFFFFF"/>
+                  </a:solidFill>
+                  <a:latin typeface="Times New Roman Bold"/>
+                  <a:ea typeface="Times New Roman Bold"/>
+                  <a:cs typeface="Times New Roman Bold"/>
+                  <a:sym typeface="Times New Roman Bold"/>
+                </a:rPr>
+                <a:t>✓</a:t>
+              </a:r>
+            </a:p>
+          </p:txBody>
+        </p:sp>
+      </p:grpSp>
+      <p:sp>
+        <p:nvSpPr>
+          <p:cNvPr id="59" name="TextBox 59"/>
+          <p:cNvSpPr txBox="1"/>
+          <p:nvPr/>
+        </p:nvSpPr>
+        <p:spPr>
+          <a:xfrm>
+            <a:off x="7480936" y="3656567"/>
+            <a:ext cx="101650" cy="243656"/>
+          </a:xfrm>
+          <a:prstGeom prst="rect">
+            <a:avLst/>
+          </a:prstGeom>
+        </p:spPr>
+        <p:txBody>
+          <a:bodyPr lIns="0" tIns="0" rIns="0" bIns="0" rtlCol="0" anchor="t">
+            <a:spAutoFit/>
+          </a:bodyPr>
+          <a:lstStyle/>
+          <a:p>
+            <a:pPr algn="ctr">
+              <a:lnSpc>
+                <a:spcPts val="1919"/>
+              </a:lnSpc>
+            </a:pPr>
+            <a:r>
+              <a:rPr lang="en-US" b="1">
+                <a:solidFill>
+                  <a:srgbClr val="111827"/>
+                </a:solidFill>
+                <a:latin typeface="Times New Roman Bold"/>
+                <a:ea typeface="Times New Roman Bold"/>
+                <a:cs typeface="Times New Roman Bold"/>
+                <a:sym typeface="Times New Roman Bold"/>
+              </a:rPr>
+              <a:t>0</a:t>
+            </a:r>
+          </a:p>
+        </p:txBody>
+      </p:sp>
+      <p:sp>
+        <p:nvSpPr>
+          <p:cNvPr id="60" name="TextBox 60"/>
+          <p:cNvSpPr txBox="1"/>
+          <p:nvPr/>
+        </p:nvSpPr>
+        <p:spPr>
+          <a:xfrm>
+            <a:off x="6914055" y="3885376"/>
+            <a:ext cx="1235402" cy="243656"/>
+          </a:xfrm>
+          <a:prstGeom prst="rect">
+            <a:avLst/>
+          </a:prstGeom>
+        </p:spPr>
+        <p:txBody>
+          <a:bodyPr lIns="0" tIns="0" rIns="0" bIns="0" rtlCol="0" anchor="t">
+            <a:spAutoFit/>
+          </a:bodyPr>
+          <a:lstStyle/>
+          <a:p>
+            <a:pPr algn="ctr">
+              <a:lnSpc>
+                <a:spcPts val="1919"/>
+              </a:lnSpc>
+            </a:pPr>
+            <a:r>
+              <a:rPr lang="en-US" b="1">
+                <a:solidFill>
+                  <a:srgbClr val="4B5563"/>
+                </a:solidFill>
+                <a:latin typeface="Times New Roman Bold"/>
+                <a:ea typeface="Times New Roman Bold"/>
+                <a:cs typeface="Times New Roman Bold"/>
+                <a:sym typeface="Times New Roman Bold"/>
+              </a:rPr>
+              <a:t>Alerts</a:t>
+            </a:r>
+          </a:p>
+        </p:txBody>
+      </p:sp>
+      <p:grpSp>
+        <p:nvGrpSpPr>
+          <p:cNvPr id="61" name="Group 61"/>
+          <p:cNvGrpSpPr/>
+          <p:nvPr/>
+        </p:nvGrpSpPr>
+        <p:grpSpPr>
+          <a:xfrm>
+            <a:off x="8528771" y="3055298"/>
+            <a:ext cx="411804" cy="411802"/>
+            <a:chOff x="0" y="0"/>
+            <a:chExt cx="549072" cy="549069"/>
+          </a:xfrm>
+        </p:grpSpPr>
+        <p:sp>
+          <p:nvSpPr>
+            <p:cNvPr id="62" name="Freeform 62"/>
+            <p:cNvSpPr/>
+            <p:nvPr/>
+          </p:nvSpPr>
+          <p:spPr>
+            <a:xfrm>
+              <a:off x="0" y="0"/>
+              <a:ext cx="549021" cy="549018"/>
+            </a:xfrm>
+            <a:custGeom>
+              <a:avLst/>
+              <a:gdLst/>
+              <a:ahLst/>
+              <a:cxnLst/>
+              <a:rect l="l" t="t" r="r" b="b"/>
+              <a:pathLst>
+                <a:path w="549021" h="549018">
+                  <a:moveTo>
+                    <a:pt x="0" y="274573"/>
+                  </a:moveTo>
+                  <a:cubicBezTo>
+                    <a:pt x="0" y="122935"/>
+                    <a:pt x="122936" y="0"/>
+                    <a:pt x="274574" y="0"/>
+                  </a:cubicBezTo>
+                  <a:cubicBezTo>
+                    <a:pt x="426212" y="0"/>
+                    <a:pt x="549021" y="122935"/>
+                    <a:pt x="549021" y="274573"/>
+                  </a:cubicBezTo>
+                  <a:cubicBezTo>
+                    <a:pt x="549021" y="426210"/>
+                    <a:pt x="426212" y="549018"/>
+                    <a:pt x="274574" y="549018"/>
+                  </a:cubicBezTo>
+                  <a:cubicBezTo>
+                    <a:pt x="122936" y="549018"/>
+                    <a:pt x="0" y="426210"/>
+                    <a:pt x="0" y="274573"/>
+                  </a:cubicBezTo>
+                  <a:close/>
+                </a:path>
+              </a:pathLst>
+            </a:custGeom>
+            <a:solidFill>
+              <a:srgbClr val="1E40AF"/>
+            </a:solidFill>
+          </p:spPr>
+        </p:sp>
+        <p:sp>
+          <p:nvSpPr>
+            <p:cNvPr id="63" name="TextBox 63"/>
+            <p:cNvSpPr txBox="1"/>
+            <p:nvPr/>
+          </p:nvSpPr>
+          <p:spPr>
+            <a:xfrm>
+              <a:off x="0" y="-19050"/>
+              <a:ext cx="549072" cy="568119"/>
+            </a:xfrm>
+            <a:prstGeom prst="rect">
+              <a:avLst/>
+            </a:prstGeom>
+          </p:spPr>
+          <p:txBody>
+            <a:bodyPr lIns="50800" tIns="50800" rIns="50800" bIns="50800" rtlCol="0" anchor="ctr"/>
+            <a:lstStyle/>
+            <a:p>
+              <a:pPr algn="ctr">
+                <a:lnSpc>
+                  <a:spcPts val="1919"/>
+                </a:lnSpc>
+              </a:pPr>
+              <a:r>
+                <a:rPr lang="en-US" b="1">
+                  <a:solidFill>
+                    <a:srgbClr val="FFFFFF"/>
+                  </a:solidFill>
+                  <a:latin typeface="Times New Roman Bold"/>
+                  <a:ea typeface="Times New Roman Bold"/>
+                  <a:cs typeface="Times New Roman Bold"/>
+                  <a:sym typeface="Times New Roman Bold"/>
+                </a:rPr>
+                <a:t>✓</a:t>
+              </a:r>
+            </a:p>
+          </p:txBody>
+        </p:sp>
+      </p:grpSp>
+      <p:sp>
+        <p:nvSpPr>
+          <p:cNvPr id="64" name="TextBox 64"/>
+          <p:cNvSpPr txBox="1"/>
+          <p:nvPr/>
+        </p:nvSpPr>
+        <p:spPr>
+          <a:xfrm>
+            <a:off x="8263757" y="3665587"/>
+            <a:ext cx="764479" cy="243656"/>
+          </a:xfrm>
+          <a:prstGeom prst="rect">
+            <a:avLst/>
+          </a:prstGeom>
+        </p:spPr>
+        <p:txBody>
+          <a:bodyPr wrap="square" lIns="0" tIns="0" rIns="0" bIns="0" rtlCol="0" anchor="t">
+            <a:spAutoFit/>
+          </a:bodyPr>
+          <a:lstStyle/>
+          <a:p>
+            <a:pPr algn="ctr">
+              <a:lnSpc>
+                <a:spcPts val="1919"/>
+              </a:lnSpc>
+            </a:pPr>
+            <a:r>
+              <a:rPr lang="en-US" b="1" dirty="0">
+                <a:solidFill>
+                  <a:srgbClr val="111827"/>
+                </a:solidFill>
+                <a:latin typeface="Times New Roman Bold"/>
+                <a:ea typeface="Times New Roman Bold"/>
+                <a:cs typeface="Times New Roman Bold"/>
+                <a:sym typeface="Times New Roman Bold"/>
+              </a:rPr>
+              <a:t>Passed</a:t>
+            </a:r>
+          </a:p>
+        </p:txBody>
+      </p:sp>
+      <p:sp>
+        <p:nvSpPr>
+          <p:cNvPr id="65" name="TextBox 65"/>
+          <p:cNvSpPr txBox="1"/>
+          <p:nvPr/>
+        </p:nvSpPr>
+        <p:spPr>
+          <a:xfrm>
+            <a:off x="8116967" y="3894397"/>
+            <a:ext cx="1235402" cy="243656"/>
+          </a:xfrm>
+          <a:prstGeom prst="rect">
+            <a:avLst/>
+          </a:prstGeom>
+        </p:spPr>
+        <p:txBody>
+          <a:bodyPr lIns="0" tIns="0" rIns="0" bIns="0" rtlCol="0" anchor="t">
+            <a:spAutoFit/>
+          </a:bodyPr>
+          <a:lstStyle/>
+          <a:p>
+            <a:pPr algn="ctr">
+              <a:lnSpc>
+                <a:spcPts val="1919"/>
+              </a:lnSpc>
+            </a:pPr>
+            <a:r>
+              <a:rPr lang="en-US" b="1" dirty="0">
+                <a:solidFill>
+                  <a:srgbClr val="4B5563"/>
+                </a:solidFill>
+                <a:latin typeface="Times New Roman Bold"/>
+                <a:ea typeface="Times New Roman Bold"/>
+                <a:cs typeface="Times New Roman Bold"/>
+                <a:sym typeface="Times New Roman Bold"/>
+              </a:rPr>
+              <a:t>Structural</a:t>
+            </a:r>
+          </a:p>
+        </p:txBody>
+      </p:sp>
+      <p:grpSp>
+        <p:nvGrpSpPr>
+          <p:cNvPr id="66" name="Group 66"/>
+          <p:cNvGrpSpPr/>
+          <p:nvPr/>
+        </p:nvGrpSpPr>
+        <p:grpSpPr>
+          <a:xfrm>
+            <a:off x="9878473" y="3009900"/>
+            <a:ext cx="411804" cy="411802"/>
+            <a:chOff x="0" y="0"/>
+            <a:chExt cx="549072" cy="549069"/>
+          </a:xfrm>
+        </p:grpSpPr>
+        <p:sp>
+          <p:nvSpPr>
+            <p:cNvPr id="67" name="Freeform 67"/>
+            <p:cNvSpPr/>
+            <p:nvPr/>
+          </p:nvSpPr>
+          <p:spPr>
+            <a:xfrm>
+              <a:off x="0" y="0"/>
+              <a:ext cx="549021" cy="549018"/>
+            </a:xfrm>
+            <a:custGeom>
+              <a:avLst/>
+              <a:gdLst/>
+              <a:ahLst/>
+              <a:cxnLst/>
+              <a:rect l="l" t="t" r="r" b="b"/>
+              <a:pathLst>
+                <a:path w="549021" h="549018">
+                  <a:moveTo>
+                    <a:pt x="0" y="274573"/>
+                  </a:moveTo>
+                  <a:cubicBezTo>
+                    <a:pt x="0" y="122935"/>
+                    <a:pt x="122936" y="0"/>
+                    <a:pt x="274574" y="0"/>
+                  </a:cubicBezTo>
+                  <a:cubicBezTo>
+                    <a:pt x="426212" y="0"/>
+                    <a:pt x="549021" y="122935"/>
+                    <a:pt x="549021" y="274573"/>
+                  </a:cubicBezTo>
+                  <a:cubicBezTo>
+                    <a:pt x="549021" y="426210"/>
+                    <a:pt x="426212" y="549018"/>
+                    <a:pt x="274574" y="549018"/>
+                  </a:cubicBezTo>
+                  <a:cubicBezTo>
+                    <a:pt x="122936" y="549018"/>
+                    <a:pt x="0" y="426210"/>
+                    <a:pt x="0" y="274573"/>
+                  </a:cubicBezTo>
+                  <a:close/>
+                </a:path>
+              </a:pathLst>
+            </a:custGeom>
+            <a:solidFill>
+              <a:srgbClr val="1E40AF"/>
+            </a:solidFill>
+          </p:spPr>
+        </p:sp>
+        <p:sp>
+          <p:nvSpPr>
+            <p:cNvPr id="68" name="TextBox 68"/>
+            <p:cNvSpPr txBox="1"/>
+            <p:nvPr/>
+          </p:nvSpPr>
+          <p:spPr>
+            <a:xfrm>
+              <a:off x="0" y="-19050"/>
+              <a:ext cx="549072" cy="568119"/>
+            </a:xfrm>
+            <a:prstGeom prst="rect">
+              <a:avLst/>
+            </a:prstGeom>
+          </p:spPr>
+          <p:txBody>
+            <a:bodyPr lIns="50800" tIns="50800" rIns="50800" bIns="50800" rtlCol="0" anchor="ctr"/>
+            <a:lstStyle/>
+            <a:p>
+              <a:pPr algn="ctr">
+                <a:lnSpc>
+                  <a:spcPts val="1919"/>
+                </a:lnSpc>
+              </a:pPr>
+              <a:r>
+                <a:rPr lang="en-US" b="1">
+                  <a:solidFill>
+                    <a:srgbClr val="FFFFFF"/>
+                  </a:solidFill>
+                  <a:latin typeface="Times New Roman Bold"/>
+                  <a:ea typeface="Times New Roman Bold"/>
+                  <a:cs typeface="Times New Roman Bold"/>
+                  <a:sym typeface="Times New Roman Bold"/>
+                </a:rPr>
+                <a:t>✓</a:t>
+              </a:r>
+            </a:p>
+          </p:txBody>
+        </p:sp>
+      </p:grpSp>
+      <p:sp>
+        <p:nvSpPr>
+          <p:cNvPr id="69" name="TextBox 69"/>
+          <p:cNvSpPr txBox="1"/>
+          <p:nvPr/>
+        </p:nvSpPr>
+        <p:spPr>
+          <a:xfrm>
+            <a:off x="9533907" y="3656567"/>
+            <a:ext cx="844032" cy="243656"/>
+          </a:xfrm>
+          <a:prstGeom prst="rect">
+            <a:avLst/>
+          </a:prstGeom>
+        </p:spPr>
+        <p:txBody>
+          <a:bodyPr wrap="square" lIns="0" tIns="0" rIns="0" bIns="0" rtlCol="0" anchor="t">
+            <a:spAutoFit/>
+          </a:bodyPr>
+          <a:lstStyle/>
+          <a:p>
+            <a:pPr algn="ctr">
+              <a:lnSpc>
+                <a:spcPts val="1919"/>
+              </a:lnSpc>
+            </a:pPr>
+            <a:r>
+              <a:rPr lang="en-US" b="1" dirty="0">
+                <a:solidFill>
+                  <a:srgbClr val="111827"/>
+                </a:solidFill>
+                <a:latin typeface="Times New Roman Bold"/>
+                <a:ea typeface="Times New Roman Bold"/>
+                <a:cs typeface="Times New Roman Bold"/>
+                <a:sym typeface="Times New Roman Bold"/>
+              </a:rPr>
+              <a:t>Passed</a:t>
+            </a:r>
+          </a:p>
+        </p:txBody>
+      </p:sp>
+      <p:sp>
+        <p:nvSpPr>
+          <p:cNvPr id="70" name="TextBox 70"/>
+          <p:cNvSpPr txBox="1"/>
+          <p:nvPr/>
+        </p:nvSpPr>
+        <p:spPr>
+          <a:xfrm>
+            <a:off x="9466669" y="3885376"/>
+            <a:ext cx="1235402" cy="243656"/>
+          </a:xfrm>
+          <a:prstGeom prst="rect">
+            <a:avLst/>
+          </a:prstGeom>
+        </p:spPr>
+        <p:txBody>
+          <a:bodyPr lIns="0" tIns="0" rIns="0" bIns="0" rtlCol="0" anchor="t">
+            <a:spAutoFit/>
+          </a:bodyPr>
+          <a:lstStyle/>
+          <a:p>
+            <a:pPr algn="ctr">
+              <a:lnSpc>
+                <a:spcPts val="1919"/>
+              </a:lnSpc>
+            </a:pPr>
+            <a:r>
+              <a:rPr lang="en-US" b="1" dirty="0">
+                <a:solidFill>
+                  <a:srgbClr val="4B5563"/>
+                </a:solidFill>
+                <a:latin typeface="Times New Roman Bold"/>
+                <a:ea typeface="Times New Roman Bold"/>
+                <a:cs typeface="Times New Roman Bold"/>
+                <a:sym typeface="Times New Roman Bold"/>
+              </a:rPr>
+              <a:t>ARIA</a:t>
+            </a:r>
+          </a:p>
+        </p:txBody>
+      </p:sp>
+      <p:sp>
+        <p:nvSpPr>
+          <p:cNvPr id="71" name="TextBox 71"/>
+          <p:cNvSpPr txBox="1"/>
+          <p:nvPr/>
+        </p:nvSpPr>
+        <p:spPr>
+          <a:xfrm>
+            <a:off x="5961278" y="4596705"/>
+            <a:ext cx="4667088" cy="1384995"/>
+          </a:xfrm>
+          <a:prstGeom prst="rect">
+            <a:avLst/>
+          </a:prstGeom>
+        </p:spPr>
+        <p:txBody>
+          <a:bodyPr lIns="0" tIns="0" rIns="0" bIns="0" rtlCol="0" anchor="t">
+            <a:spAutoFit/>
+          </a:bodyPr>
+          <a:lstStyle/>
+          <a:p>
+            <a:pPr algn="ctr"/>
+            <a:r>
+              <a:rPr lang="en-US" b="1" dirty="0">
+                <a:solidFill>
+                  <a:srgbClr val="1E40AF"/>
+                </a:solidFill>
+                <a:latin typeface="Times New Roman Bold"/>
+                <a:ea typeface="Times New Roman Bold"/>
+                <a:cs typeface="Times New Roman Bold"/>
+                <a:sym typeface="Times New Roman Bold"/>
+              </a:rPr>
+              <a:t>HIGHLIGHTS</a:t>
+            </a:r>
+          </a:p>
+          <a:p>
+            <a:pPr algn="l"/>
+            <a:r>
+              <a:rPr lang="en-US" dirty="0">
+                <a:solidFill>
+                  <a:srgbClr val="111827"/>
+                </a:solidFill>
+                <a:latin typeface="Times New Roman"/>
+                <a:ea typeface="Times New Roman"/>
+                <a:cs typeface="Times New Roman"/>
+                <a:sym typeface="Times New Roman"/>
+              </a:rPr>
+              <a:t>✓  All form labels are properly associated</a:t>
+            </a:r>
+          </a:p>
+          <a:p>
+            <a:pPr algn="l"/>
+            <a:r>
+              <a:rPr lang="en-US" dirty="0">
+                <a:solidFill>
+                  <a:srgbClr val="111827"/>
+                </a:solidFill>
+                <a:latin typeface="Times New Roman"/>
+                <a:ea typeface="Times New Roman"/>
+                <a:cs typeface="Times New Roman"/>
+                <a:sym typeface="Times New Roman"/>
+              </a:rPr>
+              <a:t>✓  All images have alternative text</a:t>
+            </a:r>
+          </a:p>
+          <a:p>
+            <a:pPr algn="l"/>
+            <a:r>
+              <a:rPr lang="en-US" dirty="0">
+                <a:solidFill>
+                  <a:srgbClr val="111827"/>
+                </a:solidFill>
+                <a:latin typeface="Times New Roman"/>
+                <a:ea typeface="Times New Roman"/>
+                <a:cs typeface="Times New Roman"/>
+                <a:sym typeface="Times New Roman"/>
+              </a:rPr>
+              <a:t>✓  No empty links or buttons</a:t>
+            </a:r>
+          </a:p>
+          <a:p>
+            <a:pPr algn="l"/>
+            <a:r>
+              <a:rPr lang="en-US" dirty="0">
+                <a:solidFill>
+                  <a:srgbClr val="111827"/>
+                </a:solidFill>
+                <a:latin typeface="Times New Roman"/>
+                <a:ea typeface="Times New Roman"/>
+                <a:cs typeface="Times New Roman"/>
+                <a:sym typeface="Times New Roman"/>
+              </a:rPr>
+              <a:t>✓  Heading structure is logical and sequential</a:t>
+            </a:r>
+          </a:p>
+        </p:txBody>
+      </p:sp>
+      <p:grpSp>
+        <p:nvGrpSpPr>
+          <p:cNvPr id="72" name="Group 72"/>
+          <p:cNvGrpSpPr/>
+          <p:nvPr/>
+        </p:nvGrpSpPr>
+        <p:grpSpPr>
+          <a:xfrm>
+            <a:off x="5951744" y="6672890"/>
+            <a:ext cx="4686148" cy="680410"/>
+            <a:chOff x="0" y="0"/>
+            <a:chExt cx="6248197" cy="720903"/>
+          </a:xfrm>
+        </p:grpSpPr>
+        <p:sp>
+          <p:nvSpPr>
+            <p:cNvPr id="73" name="Freeform 73"/>
+            <p:cNvSpPr/>
+            <p:nvPr/>
+          </p:nvSpPr>
+          <p:spPr>
+            <a:xfrm>
+              <a:off x="0" y="0"/>
+              <a:ext cx="6248146" cy="720852"/>
+            </a:xfrm>
+            <a:custGeom>
+              <a:avLst/>
+              <a:gdLst/>
+              <a:ahLst/>
+              <a:cxnLst/>
+              <a:rect l="l" t="t" r="r" b="b"/>
+              <a:pathLst>
+                <a:path w="6248146" h="720852">
+                  <a:moveTo>
+                    <a:pt x="0" y="108077"/>
+                  </a:moveTo>
+                  <a:cubicBezTo>
+                    <a:pt x="0" y="48387"/>
+                    <a:pt x="48387" y="0"/>
+                    <a:pt x="108077" y="0"/>
+                  </a:cubicBezTo>
+                  <a:lnTo>
+                    <a:pt x="6140069" y="0"/>
+                  </a:lnTo>
+                  <a:cubicBezTo>
+                    <a:pt x="6199759" y="0"/>
+                    <a:pt x="6248146" y="48387"/>
+                    <a:pt x="6248146" y="108077"/>
+                  </a:cubicBezTo>
+                  <a:lnTo>
+                    <a:pt x="6248146" y="612775"/>
+                  </a:lnTo>
+                  <a:cubicBezTo>
+                    <a:pt x="6248146" y="672465"/>
+                    <a:pt x="6199759" y="720852"/>
+                    <a:pt x="6140069" y="720852"/>
+                  </a:cubicBezTo>
+                  <a:lnTo>
+                    <a:pt x="108077" y="720852"/>
+                  </a:lnTo>
+                  <a:cubicBezTo>
+                    <a:pt x="48387" y="720852"/>
+                    <a:pt x="0" y="672465"/>
+                    <a:pt x="0" y="612775"/>
+                  </a:cubicBezTo>
+                  <a:close/>
+                </a:path>
+              </a:pathLst>
+            </a:custGeom>
+            <a:solidFill>
+              <a:srgbClr val="F9FAFB"/>
+            </a:solidFill>
+            <a:ln w="19065" cap="sq">
+              <a:solidFill>
+                <a:srgbClr val="1E40AF"/>
+              </a:solidFill>
+              <a:prstDash val="solid"/>
+              <a:miter/>
+            </a:ln>
+          </p:spPr>
+        </p:sp>
+      </p:grpSp>
+      <p:sp>
+        <p:nvSpPr>
+          <p:cNvPr id="74" name="TextBox 74"/>
+          <p:cNvSpPr txBox="1"/>
+          <p:nvPr/>
+        </p:nvSpPr>
+        <p:spPr>
+          <a:xfrm>
+            <a:off x="6121356" y="6838950"/>
+            <a:ext cx="297551" cy="285750"/>
+          </a:xfrm>
+          <a:prstGeom prst="rect">
+            <a:avLst/>
+          </a:prstGeom>
+        </p:spPr>
+        <p:txBody>
+          <a:bodyPr lIns="0" tIns="0" rIns="0" bIns="0" rtlCol="0" anchor="t">
+            <a:spAutoFit/>
+          </a:bodyPr>
+          <a:lstStyle/>
+          <a:p>
+            <a:pPr algn="ctr">
+              <a:lnSpc>
+                <a:spcPts val="2161"/>
+              </a:lnSpc>
+            </a:pPr>
+            <a:r>
+              <a:rPr lang="en-US" sz="1801" dirty="0">
+                <a:solidFill>
+                  <a:srgbClr val="1E40AF"/>
+                </a:solidFill>
+                <a:latin typeface="Times New Roman"/>
+                <a:ea typeface="Times New Roman"/>
+                <a:cs typeface="Times New Roman"/>
+                <a:sym typeface="Times New Roman"/>
+              </a:rPr>
+              <a:t>🛡️</a:t>
+            </a:r>
+          </a:p>
+        </p:txBody>
+      </p:sp>
+      <p:sp>
+        <p:nvSpPr>
+          <p:cNvPr id="75" name="TextBox 75"/>
+          <p:cNvSpPr txBox="1"/>
+          <p:nvPr/>
+        </p:nvSpPr>
+        <p:spPr>
+          <a:xfrm>
+            <a:off x="6601787" y="6743700"/>
+            <a:ext cx="3866502" cy="495300"/>
+          </a:xfrm>
+          <a:prstGeom prst="rect">
+            <a:avLst/>
+          </a:prstGeom>
+        </p:spPr>
+        <p:txBody>
+          <a:bodyPr lIns="0" tIns="0" rIns="0" bIns="0" rtlCol="0" anchor="t">
+            <a:spAutoFit/>
+          </a:bodyPr>
+          <a:lstStyle/>
+          <a:p>
+            <a:pPr algn="l">
+              <a:lnSpc>
+                <a:spcPts val="1919"/>
+              </a:lnSpc>
+            </a:pPr>
+            <a:r>
+              <a:rPr lang="en-US" b="1" dirty="0">
+                <a:solidFill>
+                  <a:srgbClr val="1E40AF"/>
+                </a:solidFill>
+                <a:latin typeface="Times New Roman Bold"/>
+                <a:ea typeface="Times New Roman Bold"/>
+                <a:cs typeface="Times New Roman Bold"/>
+                <a:sym typeface="Times New Roman Bold"/>
+              </a:rPr>
+              <a:t>WCAG 2.1 LEVEL AA Compliance Achieved</a:t>
+            </a:r>
+          </a:p>
+        </p:txBody>
+      </p:sp>
+      <p:grpSp>
+        <p:nvGrpSpPr>
+          <p:cNvPr id="76" name="Group 76"/>
+          <p:cNvGrpSpPr/>
+          <p:nvPr/>
+        </p:nvGrpSpPr>
+        <p:grpSpPr>
+          <a:xfrm>
+            <a:off x="10972800" y="177027"/>
+            <a:ext cx="5776791" cy="7456446"/>
+            <a:chOff x="0" y="0"/>
+            <a:chExt cx="6809981" cy="8758485"/>
+          </a:xfrm>
+        </p:grpSpPr>
+        <p:sp>
+          <p:nvSpPr>
+            <p:cNvPr id="77" name="Freeform 77"/>
+            <p:cNvSpPr/>
+            <p:nvPr/>
+          </p:nvSpPr>
+          <p:spPr>
+            <a:xfrm>
+              <a:off x="0" y="0"/>
+              <a:ext cx="6809994" cy="8758524"/>
+            </a:xfrm>
+            <a:custGeom>
+              <a:avLst/>
+              <a:gdLst/>
+              <a:ahLst/>
+              <a:cxnLst/>
+              <a:rect l="l" t="t" r="r" b="b"/>
+              <a:pathLst>
+                <a:path w="6809994" h="8758524">
+                  <a:moveTo>
+                    <a:pt x="0" y="254574"/>
+                  </a:moveTo>
+                  <a:cubicBezTo>
+                    <a:pt x="0" y="113935"/>
+                    <a:pt x="121920" y="0"/>
+                    <a:pt x="272415" y="0"/>
+                  </a:cubicBezTo>
+                  <a:lnTo>
+                    <a:pt x="6537579" y="0"/>
+                  </a:lnTo>
+                  <a:cubicBezTo>
+                    <a:pt x="6688074" y="0"/>
+                    <a:pt x="6809994" y="113935"/>
+                    <a:pt x="6809994" y="254574"/>
+                  </a:cubicBezTo>
+                  <a:lnTo>
+                    <a:pt x="6809994" y="8503947"/>
+                  </a:lnTo>
+                  <a:cubicBezTo>
+                    <a:pt x="6809994" y="8644586"/>
+                    <a:pt x="6688074" y="8758524"/>
+                    <a:pt x="6537579" y="8758524"/>
+                  </a:cubicBezTo>
+                  <a:lnTo>
+                    <a:pt x="272415" y="8758524"/>
+                  </a:lnTo>
+                  <a:cubicBezTo>
+                    <a:pt x="121920" y="8758523"/>
+                    <a:pt x="0" y="8644467"/>
+                    <a:pt x="0" y="8503947"/>
+                  </a:cubicBezTo>
+                  <a:close/>
+                </a:path>
+              </a:pathLst>
+            </a:custGeom>
+            <a:solidFill>
+              <a:srgbClr val="FFFFFF"/>
+            </a:solidFill>
+            <a:ln w="28597" cap="sq">
+              <a:solidFill>
+                <a:srgbClr val="6B21A8"/>
+              </a:solidFill>
+              <a:prstDash val="solid"/>
+              <a:miter/>
+            </a:ln>
+          </p:spPr>
+        </p:sp>
+      </p:grpSp>
+      <p:grpSp>
+        <p:nvGrpSpPr>
+          <p:cNvPr id="78" name="Group 78"/>
+          <p:cNvGrpSpPr/>
+          <p:nvPr/>
+        </p:nvGrpSpPr>
+        <p:grpSpPr>
+          <a:xfrm>
+            <a:off x="10972800" y="65844"/>
+            <a:ext cx="5791200" cy="960882"/>
+            <a:chOff x="124009" y="-209855"/>
+            <a:chExt cx="6771894" cy="1281176"/>
+          </a:xfrm>
+        </p:grpSpPr>
+        <p:sp>
+          <p:nvSpPr>
+            <p:cNvPr id="79" name="Freeform 79"/>
+            <p:cNvSpPr/>
+            <p:nvPr/>
+          </p:nvSpPr>
+          <p:spPr>
+            <a:xfrm>
+              <a:off x="124009" y="-209855"/>
+              <a:ext cx="6771894" cy="1281176"/>
+            </a:xfrm>
+            <a:custGeom>
+              <a:avLst/>
+              <a:gdLst/>
+              <a:ahLst/>
+              <a:cxnLst/>
+              <a:rect l="l" t="t" r="r" b="b"/>
+              <a:pathLst>
+                <a:path w="6771894" h="1281176">
+                  <a:moveTo>
+                    <a:pt x="0" y="0"/>
+                  </a:moveTo>
+                  <a:lnTo>
+                    <a:pt x="6771894" y="0"/>
+                  </a:lnTo>
+                  <a:lnTo>
+                    <a:pt x="6771894" y="1281176"/>
+                  </a:lnTo>
+                  <a:lnTo>
+                    <a:pt x="0" y="1281176"/>
+                  </a:lnTo>
+                  <a:close/>
+                </a:path>
+              </a:pathLst>
+            </a:custGeom>
+            <a:solidFill>
+              <a:srgbClr val="5E1F8C"/>
+            </a:solidFill>
+            <a:ln>
+              <a:noFill/>
+            </a:ln>
+          </p:spPr>
+          <p:style>
+            <a:lnRef idx="1">
+              <a:schemeClr val="accent1"/>
+            </a:lnRef>
+            <a:fillRef idx="3">
+              <a:schemeClr val="accent1"/>
+            </a:fillRef>
+            <a:effectRef idx="2">
+              <a:schemeClr val="accent1"/>
+            </a:effectRef>
+            <a:fontRef idx="minor">
+              <a:schemeClr val="lt1"/>
+            </a:fontRef>
+          </p:style>
+        </p:sp>
+      </p:grpSp>
+      <p:sp>
+        <p:nvSpPr>
+          <p:cNvPr id="80" name="TextBox 80"/>
+          <p:cNvSpPr txBox="1"/>
+          <p:nvPr/>
+        </p:nvSpPr>
+        <p:spPr>
+          <a:xfrm>
+            <a:off x="11269775" y="357702"/>
+            <a:ext cx="4884172" cy="495300"/>
+          </a:xfrm>
+          <a:prstGeom prst="rect">
+            <a:avLst/>
+          </a:prstGeom>
+        </p:spPr>
+        <p:txBody>
+          <a:bodyPr lIns="0" tIns="0" rIns="0" bIns="0" rtlCol="0" anchor="t">
+            <a:spAutoFit/>
+          </a:bodyPr>
+          <a:lstStyle/>
+          <a:p>
+            <a:pPr algn="ctr">
+              <a:lnSpc>
+                <a:spcPts val="1919"/>
+              </a:lnSpc>
+            </a:pPr>
+            <a:r>
+              <a:rPr lang="en-US" sz="2000" b="1" dirty="0">
+                <a:solidFill>
+                  <a:srgbClr val="FFFFFF"/>
+                </a:solidFill>
+                <a:latin typeface="Times New Roman Bold"/>
+                <a:ea typeface="Times New Roman Bold"/>
+                <a:cs typeface="Times New Roman Bold"/>
+                <a:sym typeface="Times New Roman Bold"/>
+              </a:rPr>
+              <a:t>3. AXE DEVTOOLS</a:t>
+            </a:r>
+          </a:p>
+          <a:p>
+            <a:pPr algn="ctr">
+              <a:lnSpc>
+                <a:spcPts val="1919"/>
+              </a:lnSpc>
+            </a:pPr>
+            <a:r>
+              <a:rPr lang="en-US" sz="2000" dirty="0">
+                <a:solidFill>
+                  <a:srgbClr val="FFFFFF"/>
+                </a:solidFill>
+                <a:latin typeface="Times New Roman"/>
+                <a:ea typeface="Times New Roman"/>
+                <a:cs typeface="Times New Roman"/>
+                <a:sym typeface="Times New Roman"/>
+              </a:rPr>
+              <a:t>(Automated Accessibility Testing)</a:t>
+            </a:r>
+          </a:p>
+        </p:txBody>
+      </p:sp>
+      <p:grpSp>
+        <p:nvGrpSpPr>
+          <p:cNvPr id="81" name="Group 81"/>
+          <p:cNvGrpSpPr/>
+          <p:nvPr/>
+        </p:nvGrpSpPr>
+        <p:grpSpPr>
+          <a:xfrm>
+            <a:off x="11386137" y="1332239"/>
+            <a:ext cx="1158954" cy="1158958"/>
+            <a:chOff x="0" y="0"/>
+            <a:chExt cx="1827682" cy="1827688"/>
+          </a:xfrm>
+        </p:grpSpPr>
+        <p:sp>
+          <p:nvSpPr>
+            <p:cNvPr id="82" name="Freeform 82"/>
+            <p:cNvSpPr/>
+            <p:nvPr/>
+          </p:nvSpPr>
+          <p:spPr>
+            <a:xfrm>
+              <a:off x="0" y="0"/>
+              <a:ext cx="1827784" cy="1827789"/>
+            </a:xfrm>
+            <a:custGeom>
+              <a:avLst/>
+              <a:gdLst/>
+              <a:ahLst/>
+              <a:cxnLst/>
+              <a:rect l="l" t="t" r="r" b="b"/>
+              <a:pathLst>
+                <a:path w="1827784" h="1827789">
+                  <a:moveTo>
+                    <a:pt x="0" y="913895"/>
+                  </a:moveTo>
+                  <a:cubicBezTo>
+                    <a:pt x="0" y="409195"/>
+                    <a:pt x="409194" y="0"/>
+                    <a:pt x="913892" y="0"/>
+                  </a:cubicBezTo>
+                  <a:cubicBezTo>
+                    <a:pt x="1418590" y="0"/>
+                    <a:pt x="1827784" y="409195"/>
+                    <a:pt x="1827784" y="913895"/>
+                  </a:cubicBezTo>
+                  <a:cubicBezTo>
+                    <a:pt x="1827784" y="1418594"/>
+                    <a:pt x="1418590" y="1827789"/>
+                    <a:pt x="913892" y="1827789"/>
+                  </a:cubicBezTo>
+                  <a:cubicBezTo>
+                    <a:pt x="409194" y="1827789"/>
+                    <a:pt x="0" y="1418594"/>
+                    <a:pt x="0" y="913895"/>
+                  </a:cubicBezTo>
+                  <a:close/>
+                </a:path>
+              </a:pathLst>
+            </a:custGeom>
+            <a:solidFill>
+              <a:srgbClr val="FFFFFF"/>
+            </a:solidFill>
+            <a:ln w="66727" cap="sq">
+              <a:solidFill>
+                <a:srgbClr val="6B21A8"/>
+              </a:solidFill>
+              <a:prstDash val="solid"/>
+              <a:miter/>
+            </a:ln>
+          </p:spPr>
+        </p:sp>
+        <p:sp>
+          <p:nvSpPr>
+            <p:cNvPr id="83" name="TextBox 83"/>
+            <p:cNvSpPr txBox="1"/>
+            <p:nvPr/>
+          </p:nvSpPr>
+          <p:spPr>
+            <a:xfrm>
+              <a:off x="0" y="-19050"/>
+              <a:ext cx="1827682" cy="1846738"/>
+            </a:xfrm>
+            <a:prstGeom prst="rect">
+              <a:avLst/>
+            </a:prstGeom>
+          </p:spPr>
+          <p:txBody>
+            <a:bodyPr lIns="50800" tIns="50800" rIns="50800" bIns="50800" rtlCol="0" anchor="ctr"/>
+            <a:lstStyle/>
+            <a:p>
+              <a:pPr algn="ctr">
+                <a:lnSpc>
+                  <a:spcPts val="1981"/>
+                </a:lnSpc>
+              </a:pPr>
+              <a:r>
+                <a:rPr lang="en-US" b="1" dirty="0">
+                  <a:solidFill>
+                    <a:srgbClr val="111827"/>
+                  </a:solidFill>
+                  <a:latin typeface="Times New Roman Bold"/>
+                  <a:ea typeface="Times New Roman Bold"/>
+                  <a:cs typeface="Times New Roman Bold"/>
+                  <a:sym typeface="Times New Roman Bold"/>
+                </a:rPr>
+                <a:t>0 Violations</a:t>
+              </a:r>
+            </a:p>
+          </p:txBody>
+        </p:sp>
+      </p:grpSp>
+      <p:sp>
+        <p:nvSpPr>
+          <p:cNvPr id="84" name="TextBox 84"/>
+          <p:cNvSpPr txBox="1"/>
+          <p:nvPr/>
+        </p:nvSpPr>
+        <p:spPr>
+          <a:xfrm>
+            <a:off x="12649200" y="1472627"/>
+            <a:ext cx="3539290" cy="733425"/>
+          </a:xfrm>
+          <a:prstGeom prst="rect">
+            <a:avLst/>
+          </a:prstGeom>
+        </p:spPr>
+        <p:txBody>
+          <a:bodyPr wrap="square" lIns="0" tIns="0" rIns="0" bIns="0" rtlCol="0" anchor="t">
+            <a:spAutoFit/>
+          </a:bodyPr>
+          <a:lstStyle/>
+          <a:p>
+            <a:pPr algn="l">
+              <a:lnSpc>
+                <a:spcPts val="1919"/>
+              </a:lnSpc>
+            </a:pPr>
+            <a:r>
+              <a:rPr lang="en-US" b="1" dirty="0">
+                <a:solidFill>
+                  <a:srgbClr val="4B5563"/>
+                </a:solidFill>
+                <a:latin typeface="Times New Roman Bold"/>
+                <a:ea typeface="Times New Roman Bold"/>
+                <a:cs typeface="Times New Roman Bold"/>
+                <a:sym typeface="Times New Roman Bold"/>
+              </a:rPr>
+              <a:t>Overall Result</a:t>
+            </a:r>
+          </a:p>
+          <a:p>
+            <a:pPr algn="l">
+              <a:lnSpc>
+                <a:spcPts val="1919"/>
+              </a:lnSpc>
+            </a:pPr>
+            <a:r>
+              <a:rPr lang="en-US" b="1" dirty="0">
+                <a:solidFill>
+                  <a:srgbClr val="6B21A8"/>
+                </a:solidFill>
+                <a:latin typeface="Times New Roman Bold"/>
+                <a:ea typeface="Times New Roman Bold"/>
+                <a:cs typeface="Times New Roman Bold"/>
+                <a:sym typeface="Times New Roman Bold"/>
+              </a:rPr>
+              <a:t>No WCAG 2.1 Level AA violations detected</a:t>
+            </a:r>
+          </a:p>
+        </p:txBody>
+      </p:sp>
+      <p:grpSp>
+        <p:nvGrpSpPr>
+          <p:cNvPr id="85" name="Group 85"/>
+          <p:cNvGrpSpPr/>
+          <p:nvPr/>
+        </p:nvGrpSpPr>
+        <p:grpSpPr>
+          <a:xfrm>
+            <a:off x="11049000" y="2628900"/>
+            <a:ext cx="5574594" cy="1597628"/>
+            <a:chOff x="-85409" y="-101600"/>
+            <a:chExt cx="6248273" cy="2130171"/>
+          </a:xfrm>
+        </p:grpSpPr>
+        <p:sp>
+          <p:nvSpPr>
+            <p:cNvPr id="86" name="Freeform 86"/>
+            <p:cNvSpPr/>
+            <p:nvPr/>
+          </p:nvSpPr>
+          <p:spPr>
+            <a:xfrm>
+              <a:off x="-85409" y="-101600"/>
+              <a:ext cx="6248273" cy="2130171"/>
+            </a:xfrm>
+            <a:custGeom>
+              <a:avLst/>
+              <a:gdLst/>
+              <a:ahLst/>
+              <a:cxnLst/>
+              <a:rect l="l" t="t" r="r" b="b"/>
+              <a:pathLst>
+                <a:path w="6248273" h="2130171">
+                  <a:moveTo>
+                    <a:pt x="0" y="106553"/>
+                  </a:moveTo>
+                  <a:cubicBezTo>
+                    <a:pt x="0" y="47625"/>
+                    <a:pt x="47625" y="0"/>
+                    <a:pt x="106553" y="0"/>
+                  </a:cubicBezTo>
+                  <a:lnTo>
+                    <a:pt x="6141720" y="0"/>
+                  </a:lnTo>
+                  <a:cubicBezTo>
+                    <a:pt x="6200521" y="0"/>
+                    <a:pt x="6248273" y="47625"/>
+                    <a:pt x="6248273" y="106553"/>
+                  </a:cubicBezTo>
+                  <a:lnTo>
+                    <a:pt x="6248273" y="2023618"/>
+                  </a:lnTo>
+                  <a:cubicBezTo>
+                    <a:pt x="6248273" y="2082419"/>
+                    <a:pt x="6200648" y="2130171"/>
+                    <a:pt x="6141720" y="2130171"/>
+                  </a:cubicBezTo>
+                  <a:lnTo>
+                    <a:pt x="106553" y="2130171"/>
+                  </a:lnTo>
+                  <a:cubicBezTo>
+                    <a:pt x="47752" y="2130171"/>
+                    <a:pt x="0" y="2082546"/>
+                    <a:pt x="0" y="2023618"/>
+                  </a:cubicBezTo>
+                  <a:close/>
+                </a:path>
+              </a:pathLst>
+            </a:custGeom>
+            <a:solidFill>
+              <a:srgbClr val="F9FAFB"/>
+            </a:solidFill>
+            <a:ln w="19065" cap="sq">
+              <a:solidFill>
+                <a:srgbClr val="E5E7EB"/>
+              </a:solidFill>
+              <a:prstDash val="solid"/>
+              <a:miter/>
+            </a:ln>
+          </p:spPr>
+        </p:sp>
+      </p:grpSp>
+      <p:sp>
+        <p:nvSpPr>
+          <p:cNvPr id="87" name="TextBox 87"/>
+          <p:cNvSpPr txBox="1"/>
+          <p:nvPr/>
+        </p:nvSpPr>
+        <p:spPr>
+          <a:xfrm>
+            <a:off x="12699017" y="2735312"/>
+            <a:ext cx="2388583" cy="198388"/>
+          </a:xfrm>
+          <a:prstGeom prst="rect">
+            <a:avLst/>
+          </a:prstGeom>
+        </p:spPr>
+        <p:txBody>
+          <a:bodyPr wrap="square" lIns="0" tIns="0" rIns="0" bIns="0" rtlCol="0" anchor="t">
+            <a:spAutoFit/>
+          </a:bodyPr>
+          <a:lstStyle/>
+          <a:p>
+            <a:pPr algn="ctr">
+              <a:lnSpc>
+                <a:spcPts val="1531"/>
+              </a:lnSpc>
+            </a:pPr>
+            <a:r>
+              <a:rPr lang="en-US" b="1" dirty="0">
+                <a:solidFill>
+                  <a:srgbClr val="6B21A8"/>
+                </a:solidFill>
+                <a:latin typeface="Times New Roman Bold"/>
+                <a:ea typeface="Times New Roman Bold"/>
+                <a:cs typeface="Times New Roman Bold"/>
+                <a:sym typeface="Times New Roman Bold"/>
+              </a:rPr>
+              <a:t>TEST COVERAGE</a:t>
+            </a:r>
+          </a:p>
+        </p:txBody>
+      </p:sp>
+      <p:grpSp>
+        <p:nvGrpSpPr>
+          <p:cNvPr id="88" name="Group 88"/>
+          <p:cNvGrpSpPr/>
+          <p:nvPr/>
+        </p:nvGrpSpPr>
+        <p:grpSpPr>
+          <a:xfrm>
+            <a:off x="11582400" y="3291573"/>
+            <a:ext cx="411804" cy="411802"/>
+            <a:chOff x="0" y="0"/>
+            <a:chExt cx="549072" cy="549069"/>
+          </a:xfrm>
+        </p:grpSpPr>
+        <p:sp>
+          <p:nvSpPr>
+            <p:cNvPr id="89" name="Freeform 89"/>
+            <p:cNvSpPr/>
+            <p:nvPr/>
+          </p:nvSpPr>
+          <p:spPr>
+            <a:xfrm>
+              <a:off x="0" y="0"/>
+              <a:ext cx="549021" cy="549018"/>
+            </a:xfrm>
+            <a:custGeom>
+              <a:avLst/>
+              <a:gdLst/>
+              <a:ahLst/>
+              <a:cxnLst/>
+              <a:rect l="l" t="t" r="r" b="b"/>
+              <a:pathLst>
+                <a:path w="549021" h="549018">
+                  <a:moveTo>
+                    <a:pt x="0" y="274573"/>
+                  </a:moveTo>
+                  <a:cubicBezTo>
+                    <a:pt x="0" y="122935"/>
+                    <a:pt x="122936" y="0"/>
+                    <a:pt x="274574" y="0"/>
+                  </a:cubicBezTo>
+                  <a:cubicBezTo>
+                    <a:pt x="426212" y="0"/>
+                    <a:pt x="549021" y="122935"/>
+                    <a:pt x="549021" y="274573"/>
+                  </a:cubicBezTo>
+                  <a:cubicBezTo>
+                    <a:pt x="549021" y="426210"/>
+                    <a:pt x="426212" y="549018"/>
+                    <a:pt x="274574" y="549018"/>
+                  </a:cubicBezTo>
+                  <a:cubicBezTo>
+                    <a:pt x="122936" y="549018"/>
+                    <a:pt x="0" y="426210"/>
+                    <a:pt x="0" y="274573"/>
+                  </a:cubicBezTo>
+                  <a:close/>
+                </a:path>
+              </a:pathLst>
+            </a:custGeom>
+            <a:solidFill>
+              <a:srgbClr val="6B21A8"/>
+            </a:solidFill>
+          </p:spPr>
+        </p:sp>
+        <p:sp>
+          <p:nvSpPr>
+            <p:cNvPr id="90" name="TextBox 90"/>
+            <p:cNvSpPr txBox="1"/>
+            <p:nvPr/>
+          </p:nvSpPr>
+          <p:spPr>
+            <a:xfrm>
+              <a:off x="0" y="-19050"/>
+              <a:ext cx="549072" cy="568119"/>
+            </a:xfrm>
+            <a:prstGeom prst="rect">
+              <a:avLst/>
+            </a:prstGeom>
+          </p:spPr>
+          <p:txBody>
+            <a:bodyPr lIns="50800" tIns="50800" rIns="50800" bIns="50800" rtlCol="0" anchor="ctr"/>
+            <a:lstStyle/>
+            <a:p>
+              <a:pPr algn="ctr">
+                <a:lnSpc>
+                  <a:spcPts val="1441"/>
+                </a:lnSpc>
+              </a:pPr>
+              <a:r>
+                <a:rPr lang="en-US" sz="1600" b="1">
+                  <a:solidFill>
+                    <a:srgbClr val="FFFFFF"/>
+                  </a:solidFill>
+                  <a:latin typeface="Times New Roman Bold"/>
+                  <a:ea typeface="Times New Roman Bold"/>
+                  <a:cs typeface="Times New Roman Bold"/>
+                  <a:sym typeface="Times New Roman Bold"/>
+                </a:rPr>
+                <a:t>✓</a:t>
+              </a:r>
+            </a:p>
+          </p:txBody>
+        </p:sp>
+      </p:grpSp>
+      <p:sp>
+        <p:nvSpPr>
+          <p:cNvPr id="91" name="TextBox 91"/>
+          <p:cNvSpPr txBox="1"/>
+          <p:nvPr/>
+        </p:nvSpPr>
+        <p:spPr>
+          <a:xfrm>
+            <a:off x="11430000" y="3747664"/>
+            <a:ext cx="714538" cy="198388"/>
+          </a:xfrm>
+          <a:prstGeom prst="rect">
+            <a:avLst/>
+          </a:prstGeom>
+        </p:spPr>
+        <p:txBody>
+          <a:bodyPr wrap="square" lIns="0" tIns="0" rIns="0" bIns="0" rtlCol="0" anchor="t">
+            <a:spAutoFit/>
+          </a:bodyPr>
+          <a:lstStyle/>
+          <a:p>
+            <a:pPr algn="ctr">
+              <a:lnSpc>
+                <a:spcPts val="1531"/>
+              </a:lnSpc>
+            </a:pPr>
+            <a:r>
+              <a:rPr lang="en-US" b="1" dirty="0">
+                <a:solidFill>
+                  <a:srgbClr val="111827"/>
+                </a:solidFill>
+                <a:latin typeface="Times New Roman Bold"/>
+                <a:ea typeface="Times New Roman Bold"/>
+                <a:cs typeface="Times New Roman Bold"/>
+                <a:sym typeface="Times New Roman Bold"/>
+              </a:rPr>
+              <a:t>Passed</a:t>
+            </a:r>
+          </a:p>
+        </p:txBody>
+      </p:sp>
+      <p:sp>
+        <p:nvSpPr>
+          <p:cNvPr id="92" name="TextBox 92"/>
+          <p:cNvSpPr txBox="1"/>
+          <p:nvPr/>
+        </p:nvSpPr>
+        <p:spPr>
+          <a:xfrm>
+            <a:off x="11049000" y="4011077"/>
+            <a:ext cx="1486966" cy="179152"/>
+          </a:xfrm>
+          <a:prstGeom prst="rect">
+            <a:avLst/>
+          </a:prstGeom>
+        </p:spPr>
+        <p:txBody>
+          <a:bodyPr wrap="square" lIns="0" tIns="0" rIns="0" bIns="0" rtlCol="0" anchor="t">
+            <a:spAutoFit/>
+          </a:bodyPr>
+          <a:lstStyle/>
+          <a:p>
+            <a:pPr algn="ctr">
+              <a:lnSpc>
+                <a:spcPts val="1297"/>
+              </a:lnSpc>
+            </a:pPr>
+            <a:r>
+              <a:rPr lang="en-US" b="1" dirty="0">
+                <a:solidFill>
+                  <a:srgbClr val="4B5563"/>
+                </a:solidFill>
+                <a:latin typeface="Times New Roman Bold"/>
+                <a:ea typeface="Times New Roman Bold"/>
+                <a:cs typeface="Times New Roman Bold"/>
+                <a:sym typeface="Times New Roman Bold"/>
+              </a:rPr>
+              <a:t>WCAG Rules</a:t>
+            </a:r>
+          </a:p>
+        </p:txBody>
+      </p:sp>
+      <p:grpSp>
+        <p:nvGrpSpPr>
+          <p:cNvPr id="93" name="Group 93"/>
+          <p:cNvGrpSpPr/>
+          <p:nvPr/>
+        </p:nvGrpSpPr>
+        <p:grpSpPr>
+          <a:xfrm>
+            <a:off x="13109286" y="3291573"/>
+            <a:ext cx="411804" cy="411802"/>
+            <a:chOff x="0" y="0"/>
+            <a:chExt cx="549072" cy="549069"/>
+          </a:xfrm>
+        </p:grpSpPr>
+        <p:sp>
+          <p:nvSpPr>
+            <p:cNvPr id="94" name="Freeform 94"/>
+            <p:cNvSpPr/>
+            <p:nvPr/>
+          </p:nvSpPr>
+          <p:spPr>
+            <a:xfrm>
+              <a:off x="0" y="0"/>
+              <a:ext cx="549021" cy="549018"/>
+            </a:xfrm>
+            <a:custGeom>
+              <a:avLst/>
+              <a:gdLst/>
+              <a:ahLst/>
+              <a:cxnLst/>
+              <a:rect l="l" t="t" r="r" b="b"/>
+              <a:pathLst>
+                <a:path w="549021" h="549018">
+                  <a:moveTo>
+                    <a:pt x="0" y="274573"/>
+                  </a:moveTo>
+                  <a:cubicBezTo>
+                    <a:pt x="0" y="122935"/>
+                    <a:pt x="122936" y="0"/>
+                    <a:pt x="274574" y="0"/>
+                  </a:cubicBezTo>
+                  <a:cubicBezTo>
+                    <a:pt x="426212" y="0"/>
+                    <a:pt x="549021" y="122935"/>
+                    <a:pt x="549021" y="274573"/>
+                  </a:cubicBezTo>
+                  <a:cubicBezTo>
+                    <a:pt x="549021" y="426210"/>
+                    <a:pt x="426212" y="549018"/>
+                    <a:pt x="274574" y="549018"/>
+                  </a:cubicBezTo>
+                  <a:cubicBezTo>
+                    <a:pt x="122936" y="549018"/>
+                    <a:pt x="0" y="426210"/>
+                    <a:pt x="0" y="274573"/>
+                  </a:cubicBezTo>
+                  <a:close/>
+                </a:path>
+              </a:pathLst>
+            </a:custGeom>
+            <a:solidFill>
+              <a:srgbClr val="6B21A8"/>
+            </a:solidFill>
+          </p:spPr>
+        </p:sp>
+        <p:sp>
+          <p:nvSpPr>
+            <p:cNvPr id="95" name="TextBox 95"/>
+            <p:cNvSpPr txBox="1"/>
+            <p:nvPr/>
+          </p:nvSpPr>
+          <p:spPr>
+            <a:xfrm>
+              <a:off x="0" y="-19050"/>
+              <a:ext cx="549072" cy="568119"/>
+            </a:xfrm>
+            <a:prstGeom prst="rect">
+              <a:avLst/>
+            </a:prstGeom>
+          </p:spPr>
+          <p:txBody>
+            <a:bodyPr lIns="50800" tIns="50800" rIns="50800" bIns="50800" rtlCol="0" anchor="ctr"/>
+            <a:lstStyle/>
+            <a:p>
+              <a:pPr algn="ctr">
+                <a:lnSpc>
+                  <a:spcPts val="1441"/>
+                </a:lnSpc>
+              </a:pPr>
+              <a:r>
+                <a:rPr lang="en-US" sz="1600" b="1">
+                  <a:solidFill>
+                    <a:srgbClr val="FFFFFF"/>
+                  </a:solidFill>
+                  <a:latin typeface="Times New Roman Bold"/>
+                  <a:ea typeface="Times New Roman Bold"/>
+                  <a:cs typeface="Times New Roman Bold"/>
+                  <a:sym typeface="Times New Roman Bold"/>
+                </a:rPr>
+                <a:t>✓</a:t>
+              </a:r>
+            </a:p>
+          </p:txBody>
+        </p:sp>
+      </p:grpSp>
+      <p:sp>
+        <p:nvSpPr>
+          <p:cNvPr id="96" name="TextBox 96"/>
+          <p:cNvSpPr txBox="1"/>
+          <p:nvPr/>
+        </p:nvSpPr>
+        <p:spPr>
+          <a:xfrm>
+            <a:off x="12970934" y="3774688"/>
+            <a:ext cx="668866" cy="198388"/>
+          </a:xfrm>
+          <a:prstGeom prst="rect">
+            <a:avLst/>
+          </a:prstGeom>
+        </p:spPr>
+        <p:txBody>
+          <a:bodyPr wrap="square" lIns="0" tIns="0" rIns="0" bIns="0" rtlCol="0" anchor="t">
+            <a:spAutoFit/>
+          </a:bodyPr>
+          <a:lstStyle/>
+          <a:p>
+            <a:pPr algn="ctr">
+              <a:lnSpc>
+                <a:spcPts val="1531"/>
+              </a:lnSpc>
+            </a:pPr>
+            <a:r>
+              <a:rPr lang="en-US" b="1" dirty="0">
+                <a:solidFill>
+                  <a:srgbClr val="111827"/>
+                </a:solidFill>
+                <a:latin typeface="Times New Roman Bold"/>
+                <a:ea typeface="Times New Roman Bold"/>
+                <a:cs typeface="Times New Roman Bold"/>
+                <a:sym typeface="Times New Roman Bold"/>
+              </a:rPr>
+              <a:t>Passed</a:t>
+            </a:r>
+          </a:p>
+        </p:txBody>
+      </p:sp>
+      <p:sp>
+        <p:nvSpPr>
+          <p:cNvPr id="97" name="TextBox 97"/>
+          <p:cNvSpPr txBox="1"/>
+          <p:nvPr/>
+        </p:nvSpPr>
+        <p:spPr>
+          <a:xfrm>
+            <a:off x="12547359" y="4038101"/>
+            <a:ext cx="1385535" cy="179152"/>
+          </a:xfrm>
+          <a:prstGeom prst="rect">
+            <a:avLst/>
+          </a:prstGeom>
+        </p:spPr>
+        <p:txBody>
+          <a:bodyPr wrap="square" lIns="0" tIns="0" rIns="0" bIns="0" rtlCol="0" anchor="t">
+            <a:spAutoFit/>
+          </a:bodyPr>
+          <a:lstStyle/>
+          <a:p>
+            <a:pPr algn="ctr">
+              <a:lnSpc>
+                <a:spcPts val="1297"/>
+              </a:lnSpc>
+            </a:pPr>
+            <a:r>
+              <a:rPr lang="en-US" b="1" dirty="0">
+                <a:solidFill>
+                  <a:srgbClr val="4B5563"/>
+                </a:solidFill>
+                <a:latin typeface="Times New Roman Bold"/>
+                <a:ea typeface="Times New Roman Bold"/>
+                <a:cs typeface="Times New Roman Bold"/>
+                <a:sym typeface="Times New Roman Bold"/>
+              </a:rPr>
+              <a:t>ARIA Checks</a:t>
+            </a:r>
+          </a:p>
+        </p:txBody>
+      </p:sp>
+      <p:grpSp>
+        <p:nvGrpSpPr>
+          <p:cNvPr id="98" name="Group 98"/>
+          <p:cNvGrpSpPr/>
+          <p:nvPr/>
+        </p:nvGrpSpPr>
+        <p:grpSpPr>
+          <a:xfrm>
+            <a:off x="14673653" y="3291573"/>
+            <a:ext cx="411804" cy="411802"/>
+            <a:chOff x="0" y="0"/>
+            <a:chExt cx="549072" cy="549069"/>
+          </a:xfrm>
+        </p:grpSpPr>
+        <p:sp>
+          <p:nvSpPr>
+            <p:cNvPr id="99" name="Freeform 99"/>
+            <p:cNvSpPr/>
+            <p:nvPr/>
+          </p:nvSpPr>
+          <p:spPr>
+            <a:xfrm>
+              <a:off x="0" y="0"/>
+              <a:ext cx="549021" cy="549018"/>
+            </a:xfrm>
+            <a:custGeom>
+              <a:avLst/>
+              <a:gdLst/>
+              <a:ahLst/>
+              <a:cxnLst/>
+              <a:rect l="l" t="t" r="r" b="b"/>
+              <a:pathLst>
+                <a:path w="549021" h="549018">
+                  <a:moveTo>
+                    <a:pt x="0" y="274573"/>
+                  </a:moveTo>
+                  <a:cubicBezTo>
+                    <a:pt x="0" y="122935"/>
+                    <a:pt x="122936" y="0"/>
+                    <a:pt x="274574" y="0"/>
+                  </a:cubicBezTo>
+                  <a:cubicBezTo>
+                    <a:pt x="426212" y="0"/>
+                    <a:pt x="549021" y="122935"/>
+                    <a:pt x="549021" y="274573"/>
+                  </a:cubicBezTo>
+                  <a:cubicBezTo>
+                    <a:pt x="549021" y="426210"/>
+                    <a:pt x="426212" y="549018"/>
+                    <a:pt x="274574" y="549018"/>
+                  </a:cubicBezTo>
+                  <a:cubicBezTo>
+                    <a:pt x="122936" y="549018"/>
+                    <a:pt x="0" y="426210"/>
+                    <a:pt x="0" y="274573"/>
+                  </a:cubicBezTo>
+                  <a:close/>
+                </a:path>
+              </a:pathLst>
+            </a:custGeom>
+            <a:solidFill>
+              <a:srgbClr val="6B21A8"/>
+            </a:solidFill>
+          </p:spPr>
+        </p:sp>
+        <p:sp>
+          <p:nvSpPr>
+            <p:cNvPr id="100" name="TextBox 100"/>
+            <p:cNvSpPr txBox="1"/>
+            <p:nvPr/>
+          </p:nvSpPr>
+          <p:spPr>
+            <a:xfrm>
+              <a:off x="0" y="-19050"/>
+              <a:ext cx="549072" cy="568119"/>
+            </a:xfrm>
+            <a:prstGeom prst="rect">
+              <a:avLst/>
+            </a:prstGeom>
+          </p:spPr>
+          <p:txBody>
+            <a:bodyPr lIns="50800" tIns="50800" rIns="50800" bIns="50800" rtlCol="0" anchor="ctr"/>
+            <a:lstStyle/>
+            <a:p>
+              <a:pPr algn="ctr">
+                <a:lnSpc>
+                  <a:spcPts val="1441"/>
+                </a:lnSpc>
+              </a:pPr>
+              <a:r>
+                <a:rPr lang="en-US" sz="1600" b="1">
+                  <a:solidFill>
+                    <a:srgbClr val="FFFFFF"/>
+                  </a:solidFill>
+                  <a:latin typeface="Times New Roman Bold"/>
+                  <a:ea typeface="Times New Roman Bold"/>
+                  <a:cs typeface="Times New Roman Bold"/>
+                  <a:sym typeface="Times New Roman Bold"/>
+                </a:rPr>
+                <a:t>✓</a:t>
+              </a:r>
+            </a:p>
+          </p:txBody>
+        </p:sp>
+      </p:grpSp>
+      <p:sp>
+        <p:nvSpPr>
+          <p:cNvPr id="101" name="TextBox 101"/>
+          <p:cNvSpPr txBox="1"/>
+          <p:nvPr/>
+        </p:nvSpPr>
+        <p:spPr>
+          <a:xfrm>
+            <a:off x="14563230" y="3774688"/>
+            <a:ext cx="668867" cy="198388"/>
+          </a:xfrm>
+          <a:prstGeom prst="rect">
+            <a:avLst/>
+          </a:prstGeom>
+        </p:spPr>
+        <p:txBody>
+          <a:bodyPr wrap="square" lIns="0" tIns="0" rIns="0" bIns="0" rtlCol="0" anchor="t">
+            <a:spAutoFit/>
+          </a:bodyPr>
+          <a:lstStyle/>
+          <a:p>
+            <a:pPr algn="ctr">
+              <a:lnSpc>
+                <a:spcPts val="1531"/>
+              </a:lnSpc>
+            </a:pPr>
+            <a:r>
+              <a:rPr lang="en-US" b="1" dirty="0">
+                <a:solidFill>
+                  <a:srgbClr val="111827"/>
+                </a:solidFill>
+                <a:latin typeface="Times New Roman Bold"/>
+                <a:ea typeface="Times New Roman Bold"/>
+                <a:cs typeface="Times New Roman Bold"/>
+                <a:sym typeface="Times New Roman Bold"/>
+              </a:rPr>
+              <a:t>Passed</a:t>
+            </a:r>
+          </a:p>
+        </p:txBody>
+      </p:sp>
+      <p:sp>
+        <p:nvSpPr>
+          <p:cNvPr id="102" name="TextBox 102"/>
+          <p:cNvSpPr txBox="1"/>
+          <p:nvPr/>
+        </p:nvSpPr>
+        <p:spPr>
+          <a:xfrm>
+            <a:off x="14056662" y="4048625"/>
+            <a:ext cx="1640538" cy="179152"/>
+          </a:xfrm>
+          <a:prstGeom prst="rect">
+            <a:avLst/>
+          </a:prstGeom>
+        </p:spPr>
+        <p:txBody>
+          <a:bodyPr wrap="square" lIns="0" tIns="0" rIns="0" bIns="0" rtlCol="0" anchor="t">
+            <a:spAutoFit/>
+          </a:bodyPr>
+          <a:lstStyle/>
+          <a:p>
+            <a:pPr algn="ctr">
+              <a:lnSpc>
+                <a:spcPts val="1297"/>
+              </a:lnSpc>
+            </a:pPr>
+            <a:r>
+              <a:rPr lang="en-US" b="1" dirty="0">
+                <a:solidFill>
+                  <a:srgbClr val="4B5563"/>
+                </a:solidFill>
+                <a:latin typeface="Times New Roman Bold"/>
+                <a:ea typeface="Times New Roman Bold"/>
+                <a:cs typeface="Times New Roman Bold"/>
+                <a:sym typeface="Times New Roman Bold"/>
+              </a:rPr>
+              <a:t>Best Practices</a:t>
+            </a:r>
+          </a:p>
+        </p:txBody>
+      </p:sp>
+      <p:grpSp>
+        <p:nvGrpSpPr>
+          <p:cNvPr id="103" name="Group 103"/>
+          <p:cNvGrpSpPr/>
+          <p:nvPr/>
+        </p:nvGrpSpPr>
+        <p:grpSpPr>
+          <a:xfrm>
+            <a:off x="15940402" y="3291573"/>
+            <a:ext cx="411804" cy="411802"/>
+            <a:chOff x="0" y="0"/>
+            <a:chExt cx="549072" cy="549069"/>
+          </a:xfrm>
+        </p:grpSpPr>
+        <p:sp>
+          <p:nvSpPr>
+            <p:cNvPr id="104" name="Freeform 104"/>
+            <p:cNvSpPr/>
+            <p:nvPr/>
+          </p:nvSpPr>
+          <p:spPr>
+            <a:xfrm>
+              <a:off x="0" y="0"/>
+              <a:ext cx="549021" cy="549018"/>
+            </a:xfrm>
+            <a:custGeom>
+              <a:avLst/>
+              <a:gdLst/>
+              <a:ahLst/>
+              <a:cxnLst/>
+              <a:rect l="l" t="t" r="r" b="b"/>
+              <a:pathLst>
+                <a:path w="549021" h="549018">
+                  <a:moveTo>
+                    <a:pt x="0" y="274573"/>
+                  </a:moveTo>
+                  <a:cubicBezTo>
+                    <a:pt x="0" y="122935"/>
+                    <a:pt x="122936" y="0"/>
+                    <a:pt x="274574" y="0"/>
+                  </a:cubicBezTo>
+                  <a:cubicBezTo>
+                    <a:pt x="426212" y="0"/>
+                    <a:pt x="549021" y="122935"/>
+                    <a:pt x="549021" y="274573"/>
+                  </a:cubicBezTo>
+                  <a:cubicBezTo>
+                    <a:pt x="549021" y="426210"/>
+                    <a:pt x="426212" y="549018"/>
+                    <a:pt x="274574" y="549018"/>
+                  </a:cubicBezTo>
+                  <a:cubicBezTo>
+                    <a:pt x="122936" y="549018"/>
+                    <a:pt x="0" y="426210"/>
+                    <a:pt x="0" y="274573"/>
+                  </a:cubicBezTo>
+                  <a:close/>
+                </a:path>
+              </a:pathLst>
+            </a:custGeom>
+            <a:solidFill>
+              <a:srgbClr val="6B21A8"/>
+            </a:solidFill>
+          </p:spPr>
+        </p:sp>
+        <p:sp>
+          <p:nvSpPr>
+            <p:cNvPr id="105" name="TextBox 105"/>
+            <p:cNvSpPr txBox="1"/>
+            <p:nvPr/>
+          </p:nvSpPr>
+          <p:spPr>
+            <a:xfrm>
+              <a:off x="0" y="-19050"/>
+              <a:ext cx="549072" cy="568119"/>
+            </a:xfrm>
+            <a:prstGeom prst="rect">
+              <a:avLst/>
+            </a:prstGeom>
+          </p:spPr>
+          <p:txBody>
+            <a:bodyPr lIns="50800" tIns="50800" rIns="50800" bIns="50800" rtlCol="0" anchor="ctr"/>
+            <a:lstStyle/>
+            <a:p>
+              <a:pPr algn="ctr">
+                <a:lnSpc>
+                  <a:spcPts val="1441"/>
+                </a:lnSpc>
+              </a:pPr>
+              <a:r>
+                <a:rPr lang="en-US" sz="1600" b="1">
+                  <a:solidFill>
+                    <a:srgbClr val="FFFFFF"/>
+                  </a:solidFill>
+                  <a:latin typeface="Times New Roman Bold"/>
+                  <a:ea typeface="Times New Roman Bold"/>
+                  <a:cs typeface="Times New Roman Bold"/>
+                  <a:sym typeface="Times New Roman Bold"/>
+                </a:rPr>
+                <a:t>✓</a:t>
+              </a:r>
+            </a:p>
+          </p:txBody>
+        </p:sp>
+      </p:grpSp>
+      <p:sp>
+        <p:nvSpPr>
+          <p:cNvPr id="106" name="TextBox 106"/>
+          <p:cNvSpPr txBox="1"/>
+          <p:nvPr/>
+        </p:nvSpPr>
+        <p:spPr>
+          <a:xfrm>
+            <a:off x="15798632" y="3747664"/>
+            <a:ext cx="668867" cy="198388"/>
+          </a:xfrm>
+          <a:prstGeom prst="rect">
+            <a:avLst/>
+          </a:prstGeom>
+        </p:spPr>
+        <p:txBody>
+          <a:bodyPr wrap="square" lIns="0" tIns="0" rIns="0" bIns="0" rtlCol="0" anchor="t">
+            <a:spAutoFit/>
+          </a:bodyPr>
+          <a:lstStyle/>
+          <a:p>
+            <a:pPr algn="ctr">
+              <a:lnSpc>
+                <a:spcPts val="1531"/>
+              </a:lnSpc>
+            </a:pPr>
+            <a:r>
+              <a:rPr lang="en-US" b="1" dirty="0">
+                <a:solidFill>
+                  <a:srgbClr val="111827"/>
+                </a:solidFill>
+                <a:latin typeface="Times New Roman Bold"/>
+                <a:ea typeface="Times New Roman Bold"/>
+                <a:cs typeface="Times New Roman Bold"/>
+                <a:sym typeface="Times New Roman Bold"/>
+              </a:rPr>
+              <a:t>Passed</a:t>
+            </a:r>
+          </a:p>
+        </p:txBody>
+      </p:sp>
+      <p:sp>
+        <p:nvSpPr>
+          <p:cNvPr id="107" name="TextBox 107"/>
+          <p:cNvSpPr txBox="1"/>
+          <p:nvPr/>
+        </p:nvSpPr>
+        <p:spPr>
+          <a:xfrm>
+            <a:off x="15528598" y="3995833"/>
+            <a:ext cx="1235402" cy="179152"/>
+          </a:xfrm>
+          <a:prstGeom prst="rect">
+            <a:avLst/>
+          </a:prstGeom>
+        </p:spPr>
+        <p:txBody>
+          <a:bodyPr lIns="0" tIns="0" rIns="0" bIns="0" rtlCol="0" anchor="t">
+            <a:spAutoFit/>
+          </a:bodyPr>
+          <a:lstStyle/>
+          <a:p>
+            <a:pPr algn="ctr">
+              <a:lnSpc>
+                <a:spcPts val="1297"/>
+              </a:lnSpc>
+            </a:pPr>
+            <a:r>
+              <a:rPr lang="en-US" b="1" dirty="0">
+                <a:solidFill>
+                  <a:srgbClr val="4B5563"/>
+                </a:solidFill>
+                <a:latin typeface="Times New Roman Bold"/>
+                <a:ea typeface="Times New Roman Bold"/>
+                <a:cs typeface="Times New Roman Bold"/>
+                <a:sym typeface="Times New Roman Bold"/>
+              </a:rPr>
+              <a:t>Contrast</a:t>
+            </a:r>
+          </a:p>
+        </p:txBody>
+      </p:sp>
+      <p:sp>
+        <p:nvSpPr>
+          <p:cNvPr id="108" name="TextBox 108"/>
+          <p:cNvSpPr txBox="1"/>
+          <p:nvPr/>
+        </p:nvSpPr>
+        <p:spPr>
+          <a:xfrm>
+            <a:off x="11378317" y="4533900"/>
+            <a:ext cx="4667088" cy="1384995"/>
+          </a:xfrm>
+          <a:prstGeom prst="rect">
+            <a:avLst/>
+          </a:prstGeom>
+        </p:spPr>
+        <p:txBody>
+          <a:bodyPr lIns="0" tIns="0" rIns="0" bIns="0" rtlCol="0" anchor="t">
+            <a:spAutoFit/>
+          </a:bodyPr>
+          <a:lstStyle/>
+          <a:p>
+            <a:pPr algn="ctr"/>
+            <a:r>
+              <a:rPr lang="en-US" b="1" dirty="0">
+                <a:solidFill>
+                  <a:srgbClr val="6B21A8"/>
+                </a:solidFill>
+                <a:latin typeface="Times New Roman Bold"/>
+                <a:ea typeface="Times New Roman Bold"/>
+                <a:cs typeface="Times New Roman Bold"/>
+                <a:sym typeface="Times New Roman Bold"/>
+              </a:rPr>
+              <a:t>HIGHLIGHTS</a:t>
+            </a:r>
+          </a:p>
+          <a:p>
+            <a:pPr algn="l"/>
+            <a:r>
+              <a:rPr lang="en-US" dirty="0">
+                <a:solidFill>
+                  <a:srgbClr val="111827"/>
+                </a:solidFill>
+                <a:latin typeface="Times New Roman"/>
+                <a:ea typeface="Times New Roman"/>
+                <a:cs typeface="Times New Roman"/>
+                <a:sym typeface="Times New Roman"/>
+              </a:rPr>
+              <a:t>✓  All interactive controls have accessible names</a:t>
+            </a:r>
+          </a:p>
+          <a:p>
+            <a:pPr algn="l"/>
+            <a:r>
+              <a:rPr lang="en-US" dirty="0">
+                <a:solidFill>
+                  <a:srgbClr val="111827"/>
+                </a:solidFill>
+                <a:latin typeface="Times New Roman"/>
+                <a:ea typeface="Times New Roman"/>
+                <a:cs typeface="Times New Roman"/>
+                <a:sym typeface="Times New Roman"/>
+              </a:rPr>
+              <a:t>✓  Sufficient color contrast across all components</a:t>
+            </a:r>
+          </a:p>
+          <a:p>
+            <a:pPr algn="l"/>
+            <a:r>
+              <a:rPr lang="en-US" dirty="0">
+                <a:solidFill>
+                  <a:srgbClr val="111827"/>
+                </a:solidFill>
+                <a:latin typeface="Times New Roman"/>
+                <a:ea typeface="Times New Roman"/>
+                <a:cs typeface="Times New Roman"/>
+                <a:sym typeface="Times New Roman"/>
+              </a:rPr>
+              <a:t>✓  No elements missing required ARIA attributes</a:t>
+            </a:r>
+          </a:p>
+          <a:p>
+            <a:pPr algn="l"/>
+            <a:r>
+              <a:rPr lang="en-US" dirty="0">
+                <a:solidFill>
+                  <a:srgbClr val="111827"/>
+                </a:solidFill>
+                <a:latin typeface="Times New Roman"/>
+                <a:ea typeface="Times New Roman"/>
+                <a:cs typeface="Times New Roman"/>
+                <a:sym typeface="Times New Roman"/>
+              </a:rPr>
+              <a:t>✓  Keyboard navigation is fully supported</a:t>
+            </a:r>
+          </a:p>
+        </p:txBody>
+      </p:sp>
+      <p:grpSp>
+        <p:nvGrpSpPr>
+          <p:cNvPr id="109" name="Group 109"/>
+          <p:cNvGrpSpPr/>
+          <p:nvPr/>
+        </p:nvGrpSpPr>
+        <p:grpSpPr>
+          <a:xfrm>
+            <a:off x="11368782" y="6667500"/>
+            <a:ext cx="5242817" cy="733425"/>
+            <a:chOff x="0" y="0"/>
+            <a:chExt cx="6248197" cy="720903"/>
+          </a:xfrm>
+        </p:grpSpPr>
+        <p:sp>
+          <p:nvSpPr>
+            <p:cNvPr id="110" name="Freeform 110"/>
+            <p:cNvSpPr/>
+            <p:nvPr/>
+          </p:nvSpPr>
+          <p:spPr>
+            <a:xfrm>
+              <a:off x="0" y="0"/>
+              <a:ext cx="6248146" cy="720852"/>
+            </a:xfrm>
+            <a:custGeom>
+              <a:avLst/>
+              <a:gdLst/>
+              <a:ahLst/>
+              <a:cxnLst/>
+              <a:rect l="l" t="t" r="r" b="b"/>
+              <a:pathLst>
+                <a:path w="6248146" h="720852">
+                  <a:moveTo>
+                    <a:pt x="0" y="108077"/>
+                  </a:moveTo>
+                  <a:cubicBezTo>
+                    <a:pt x="0" y="48387"/>
+                    <a:pt x="48387" y="0"/>
+                    <a:pt x="108077" y="0"/>
+                  </a:cubicBezTo>
+                  <a:lnTo>
+                    <a:pt x="6140069" y="0"/>
+                  </a:lnTo>
+                  <a:cubicBezTo>
+                    <a:pt x="6199759" y="0"/>
+                    <a:pt x="6248146" y="48387"/>
+                    <a:pt x="6248146" y="108077"/>
+                  </a:cubicBezTo>
+                  <a:lnTo>
+                    <a:pt x="6248146" y="612775"/>
+                  </a:lnTo>
+                  <a:cubicBezTo>
+                    <a:pt x="6248146" y="672465"/>
+                    <a:pt x="6199759" y="720852"/>
+                    <a:pt x="6140069" y="720852"/>
+                  </a:cubicBezTo>
+                  <a:lnTo>
+                    <a:pt x="108077" y="720852"/>
+                  </a:lnTo>
+                  <a:cubicBezTo>
+                    <a:pt x="48387" y="720852"/>
+                    <a:pt x="0" y="672465"/>
+                    <a:pt x="0" y="612775"/>
+                  </a:cubicBezTo>
+                  <a:close/>
+                </a:path>
+              </a:pathLst>
+            </a:custGeom>
+            <a:solidFill>
+              <a:srgbClr val="F9FAFB"/>
+            </a:solidFill>
+            <a:ln w="19065" cap="sq">
+              <a:solidFill>
+                <a:srgbClr val="6B21A8"/>
+              </a:solidFill>
+              <a:prstDash val="solid"/>
+              <a:miter/>
+            </a:ln>
+          </p:spPr>
+        </p:sp>
+      </p:grpSp>
+      <p:sp>
+        <p:nvSpPr>
+          <p:cNvPr id="111" name="TextBox 111"/>
+          <p:cNvSpPr txBox="1"/>
+          <p:nvPr/>
+        </p:nvSpPr>
+        <p:spPr>
+          <a:xfrm>
+            <a:off x="11538394" y="6845237"/>
+            <a:ext cx="297551" cy="285750"/>
+          </a:xfrm>
+          <a:prstGeom prst="rect">
+            <a:avLst/>
+          </a:prstGeom>
+        </p:spPr>
+        <p:txBody>
+          <a:bodyPr lIns="0" tIns="0" rIns="0" bIns="0" rtlCol="0" anchor="t">
+            <a:spAutoFit/>
+          </a:bodyPr>
+          <a:lstStyle/>
+          <a:p>
+            <a:pPr algn="ctr">
+              <a:lnSpc>
+                <a:spcPts val="2161"/>
+              </a:lnSpc>
+            </a:pPr>
+            <a:r>
+              <a:rPr lang="en-US" sz="1801" dirty="0">
+                <a:solidFill>
+                  <a:srgbClr val="6B21A8"/>
+                </a:solidFill>
+                <a:latin typeface="Times New Roman"/>
+                <a:ea typeface="Times New Roman"/>
+                <a:cs typeface="Times New Roman"/>
+                <a:sym typeface="Times New Roman"/>
+              </a:rPr>
+              <a:t>🛡️</a:t>
+            </a:r>
+          </a:p>
+        </p:txBody>
+      </p:sp>
+      <p:sp>
+        <p:nvSpPr>
+          <p:cNvPr id="112" name="TextBox 112"/>
+          <p:cNvSpPr txBox="1"/>
+          <p:nvPr/>
+        </p:nvSpPr>
+        <p:spPr>
+          <a:xfrm>
+            <a:off x="12018826" y="6781248"/>
+            <a:ext cx="3866502" cy="495300"/>
+          </a:xfrm>
+          <a:prstGeom prst="rect">
+            <a:avLst/>
+          </a:prstGeom>
+        </p:spPr>
+        <p:txBody>
+          <a:bodyPr lIns="0" tIns="0" rIns="0" bIns="0" rtlCol="0" anchor="t">
+            <a:spAutoFit/>
+          </a:bodyPr>
+          <a:lstStyle/>
+          <a:p>
+            <a:pPr algn="l">
+              <a:lnSpc>
+                <a:spcPts val="1919"/>
+              </a:lnSpc>
+            </a:pPr>
+            <a:r>
+              <a:rPr lang="en-US" sz="1599" b="1">
+                <a:solidFill>
+                  <a:srgbClr val="6B21A8"/>
+                </a:solidFill>
+                <a:latin typeface="Times New Roman Bold"/>
+                <a:ea typeface="Times New Roman Bold"/>
+                <a:cs typeface="Times New Roman Bold"/>
+                <a:sym typeface="Times New Roman Bold"/>
+              </a:rPr>
+              <a:t>WCAG 2.1 LEVEL AA Compliance Achieved</a:t>
+            </a:r>
+          </a:p>
+        </p:txBody>
+      </p:sp>
+      <p:grpSp>
+        <p:nvGrpSpPr>
+          <p:cNvPr id="113" name="Group 113"/>
+          <p:cNvGrpSpPr/>
+          <p:nvPr/>
+        </p:nvGrpSpPr>
+        <p:grpSpPr>
+          <a:xfrm>
+            <a:off x="407032" y="8024565"/>
+            <a:ext cx="16204568" cy="1538535"/>
+            <a:chOff x="0" y="0"/>
+            <a:chExt cx="21125701" cy="2051380"/>
+          </a:xfrm>
+        </p:grpSpPr>
+        <p:sp>
+          <p:nvSpPr>
+            <p:cNvPr id="114" name="Freeform 114"/>
+            <p:cNvSpPr/>
+            <p:nvPr/>
+          </p:nvSpPr>
+          <p:spPr>
+            <a:xfrm>
+              <a:off x="0" y="0"/>
+              <a:ext cx="21125802" cy="2051431"/>
+            </a:xfrm>
+            <a:custGeom>
+              <a:avLst/>
+              <a:gdLst/>
+              <a:ahLst/>
+              <a:cxnLst/>
+              <a:rect l="l" t="t" r="r" b="b"/>
+              <a:pathLst>
+                <a:path w="21125802" h="2051431">
+                  <a:moveTo>
+                    <a:pt x="0" y="102616"/>
+                  </a:moveTo>
+                  <a:cubicBezTo>
+                    <a:pt x="0" y="45974"/>
+                    <a:pt x="41716" y="0"/>
+                    <a:pt x="93112" y="0"/>
+                  </a:cubicBezTo>
+                  <a:lnTo>
+                    <a:pt x="21032682" y="0"/>
+                  </a:lnTo>
+                  <a:cubicBezTo>
+                    <a:pt x="21084077" y="0"/>
+                    <a:pt x="21125802" y="45974"/>
+                    <a:pt x="21125802" y="102616"/>
+                  </a:cubicBezTo>
+                  <a:lnTo>
+                    <a:pt x="21125802" y="1948815"/>
+                  </a:lnTo>
+                  <a:cubicBezTo>
+                    <a:pt x="21125802" y="2005457"/>
+                    <a:pt x="21084077" y="2051431"/>
+                    <a:pt x="21032682" y="2051431"/>
+                  </a:cubicBezTo>
+                  <a:lnTo>
+                    <a:pt x="93112" y="2051431"/>
+                  </a:lnTo>
+                  <a:cubicBezTo>
+                    <a:pt x="41716" y="2051431"/>
+                    <a:pt x="0" y="2005457"/>
+                    <a:pt x="0" y="1948815"/>
+                  </a:cubicBezTo>
+                  <a:close/>
+                </a:path>
+              </a:pathLst>
+            </a:custGeom>
+            <a:solidFill>
+              <a:srgbClr val="F9FAFB"/>
+            </a:solidFill>
+            <a:ln w="28597" cap="sq">
+              <a:solidFill>
+                <a:srgbClr val="1E40AF"/>
+              </a:solidFill>
+              <a:prstDash val="solid"/>
+              <a:miter/>
+            </a:ln>
+          </p:spPr>
+        </p:sp>
+      </p:grpSp>
+      <p:sp>
+        <p:nvSpPr>
+          <p:cNvPr id="115" name="TextBox 115"/>
+          <p:cNvSpPr txBox="1"/>
+          <p:nvPr/>
+        </p:nvSpPr>
+        <p:spPr>
+          <a:xfrm>
+            <a:off x="592903" y="8201525"/>
+            <a:ext cx="6321152" cy="971550"/>
+          </a:xfrm>
+          <a:prstGeom prst="rect">
+            <a:avLst/>
+          </a:prstGeom>
+        </p:spPr>
+        <p:txBody>
+          <a:bodyPr lIns="0" tIns="0" rIns="0" bIns="0" rtlCol="0" anchor="t">
+            <a:spAutoFit/>
+          </a:bodyPr>
+          <a:lstStyle/>
+          <a:p>
+            <a:pPr algn="l">
+              <a:lnSpc>
+                <a:spcPts val="1919"/>
+              </a:lnSpc>
+            </a:pPr>
+            <a:r>
+              <a:rPr lang="en-US" b="1" dirty="0">
+                <a:solidFill>
+                  <a:srgbClr val="1E40AF"/>
+                </a:solidFill>
+                <a:latin typeface="Times New Roman" panose="02020603050405020304" pitchFamily="18" charset="0"/>
+                <a:ea typeface="Times New Roman Bold"/>
+                <a:cs typeface="Times New Roman" panose="02020603050405020304" pitchFamily="18" charset="0"/>
+                <a:sym typeface="Times New Roman Bold"/>
+              </a:rPr>
+              <a:t>OVERALL AUTOMATED ACCESSIBILITY OUTCOME</a:t>
+            </a:r>
+          </a:p>
+          <a:p>
+            <a:pPr algn="l">
+              <a:lnSpc>
+                <a:spcPts val="1919"/>
+              </a:lnSpc>
+            </a:pPr>
+            <a:r>
+              <a:rPr lang="en-US" dirty="0">
+                <a:solidFill>
+                  <a:srgbClr val="111827"/>
+                </a:solidFill>
+                <a:latin typeface="Times New Roman" panose="02020603050405020304" pitchFamily="18" charset="0"/>
+                <a:ea typeface="Times New Roman"/>
+                <a:cs typeface="Times New Roman" panose="02020603050405020304" pitchFamily="18" charset="0"/>
+                <a:sym typeface="Times New Roman"/>
+              </a:rPr>
+              <a:t>All three automated tools confirm that the BCHAIN-ACCESS prototype fully complies with WCAG 2.1 Level AA. No accessibility errors, alerts, or violations were detected.</a:t>
+            </a:r>
+          </a:p>
+        </p:txBody>
+      </p:sp>
+      <p:sp>
+        <p:nvSpPr>
+          <p:cNvPr id="116" name="TextBox 116"/>
+          <p:cNvSpPr txBox="1"/>
+          <p:nvPr/>
+        </p:nvSpPr>
+        <p:spPr>
+          <a:xfrm>
+            <a:off x="8064036" y="8201525"/>
+            <a:ext cx="7246269" cy="974626"/>
+          </a:xfrm>
+          <a:prstGeom prst="rect">
+            <a:avLst/>
+          </a:prstGeom>
+        </p:spPr>
+        <p:txBody>
+          <a:bodyPr lIns="0" tIns="0" rIns="0" bIns="0" rtlCol="0" anchor="t">
+            <a:spAutoFit/>
+          </a:bodyPr>
+          <a:lstStyle/>
+          <a:p>
+            <a:pPr algn="l">
+              <a:lnSpc>
+                <a:spcPts val="1919"/>
+              </a:lnSpc>
+            </a:pPr>
+            <a:r>
+              <a:rPr lang="en-US" b="1" dirty="0">
+                <a:solidFill>
+                  <a:srgbClr val="B45309"/>
+                </a:solidFill>
+                <a:latin typeface="Times New Roman" panose="02020603050405020304" pitchFamily="18" charset="0"/>
+                <a:ea typeface="Times New Roman Bold"/>
+                <a:cs typeface="Times New Roman" panose="02020603050405020304" pitchFamily="18" charset="0"/>
+                <a:sym typeface="Times New Roman Bold"/>
+              </a:rPr>
+              <a:t>TOOLS COMPLEMENT EACH OTHER</a:t>
+            </a:r>
+          </a:p>
+          <a:p>
+            <a:pPr algn="l">
+              <a:lnSpc>
+                <a:spcPts val="1919"/>
+              </a:lnSpc>
+            </a:pPr>
+            <a:r>
+              <a:rPr lang="en-US" dirty="0">
+                <a:solidFill>
+                  <a:srgbClr val="111827"/>
+                </a:solidFill>
+                <a:latin typeface="Times New Roman" panose="02020603050405020304" pitchFamily="18" charset="0"/>
+                <a:ea typeface="Times New Roman"/>
+                <a:cs typeface="Times New Roman" panose="02020603050405020304" pitchFamily="18" charset="0"/>
+                <a:sym typeface="Times New Roman"/>
+              </a:rPr>
+              <a:t>Lighthouse provides a holistic audit, WAVE offers visual feedback and structural validation and Axe </a:t>
+            </a:r>
+            <a:r>
+              <a:rPr lang="en-US" dirty="0" err="1">
+                <a:solidFill>
+                  <a:srgbClr val="111827"/>
+                </a:solidFill>
+                <a:latin typeface="Times New Roman" panose="02020603050405020304" pitchFamily="18" charset="0"/>
+                <a:ea typeface="Times New Roman"/>
+                <a:cs typeface="Times New Roman" panose="02020603050405020304" pitchFamily="18" charset="0"/>
+                <a:sym typeface="Times New Roman"/>
+              </a:rPr>
+              <a:t>DevTools</a:t>
+            </a:r>
+            <a:r>
+              <a:rPr lang="en-US" dirty="0">
+                <a:solidFill>
+                  <a:srgbClr val="111827"/>
+                </a:solidFill>
+                <a:latin typeface="Times New Roman" panose="02020603050405020304" pitchFamily="18" charset="0"/>
+                <a:ea typeface="Times New Roman"/>
+                <a:cs typeface="Times New Roman" panose="02020603050405020304" pitchFamily="18" charset="0"/>
+                <a:sym typeface="Times New Roman"/>
+              </a:rPr>
+              <a:t> ensures rigorous WCAG rule-based testing.</a:t>
+            </a:r>
+          </a:p>
+        </p:txBody>
+      </p:sp>
     </p:spTree>
   </p:cSld>
   <p:clrMapOvr>
@@ -3195,7 +7924,6 @@
         <a:font script="Mong" typeface="Mongolian Baiti"/>
         <a:font script="Viet" typeface="Times New Roman"/>
         <a:font script="Uigh" typeface="Microsoft Uighur"/>
-        <a:font script="Geor" typeface="Sylfaen"/>
       </a:majorFont>
       <a:minorFont>
         <a:latin typeface="Calibri"/>
@@ -3230,7 +7958,6 @@
         <a:font script="Mong" typeface="Mongolian Baiti"/>
         <a:font script="Viet" typeface="Arial"/>
         <a:font script="Uigh" typeface="Microsoft Uighur"/>
-        <a:font script="Geor" typeface="Sylfaen"/>
       </a:minorFont>
     </a:fontScheme>
     <a:fmtScheme name="Office">
@@ -3265,16 +7992,20 @@
           <a:gsLst>
             <a:gs pos="0">
               <a:schemeClr val="phClr">
-                <a:tint val="100000"/>
-                <a:shade val="100000"/>
+                <a:shade val="51000"/>
+                <a:satMod val="130000"/>
+              </a:schemeClr>
+            </a:gs>
+            <a:gs pos="80000">
+              <a:schemeClr val="phClr">
+                <a:shade val="93000"/>
                 <a:satMod val="130000"/>
               </a:schemeClr>
             </a:gs>
             <a:gs pos="100000">
               <a:schemeClr val="phClr">
-                <a:tint val="50000"/>
-                <a:shade val="100000"/>
-                <a:satMod val="350000"/>
+                <a:shade val="94000"/>
+                <a:satMod val="135000"/>
               </a:schemeClr>
             </a:gs>
           </a:gsLst>
@@ -3396,46 +8127,7 @@
       </a:bgFillStyleLst>
     </a:fmtScheme>
   </a:themeElements>
-  <a:objectDefaults>
-    <a:spDef>
-      <a:spPr/>
-      <a:bodyPr/>
-      <a:lstStyle/>
-      <a:style>
-        <a:lnRef idx="1">
-          <a:schemeClr val="accent1"/>
-        </a:lnRef>
-        <a:fillRef idx="3">
-          <a:schemeClr val="accent1"/>
-        </a:fillRef>
-        <a:effectRef idx="2">
-          <a:schemeClr val="accent1"/>
-        </a:effectRef>
-        <a:fontRef idx="minor">
-          <a:schemeClr val="lt1"/>
-        </a:fontRef>
-      </a:style>
-    </a:spDef>
-    <a:lnDef>
-      <a:spPr/>
-      <a:bodyPr/>
-      <a:lstStyle/>
-      <a:style>
-        <a:lnRef idx="2">
-          <a:schemeClr val="accent1"/>
-        </a:lnRef>
-        <a:fillRef idx="0">
-          <a:schemeClr val="accent1"/>
-        </a:fillRef>
-        <a:effectRef idx="1">
-          <a:schemeClr val="accent1"/>
-        </a:effectRef>
-        <a:fontRef idx="minor">
-          <a:schemeClr val="tx1"/>
-        </a:fontRef>
-      </a:style>
-    </a:lnDef>
-  </a:objectDefaults>
+  <a:objectDefaults/>
   <a:extraClrSchemeLst/>
 </a:theme>
 </file>